--- a/policy/proposal_007.pptx
+++ b/policy/proposal_007.pptx
@@ -2370,7 +2370,7 @@
     <p:bg>
       <p:bgPr>
         <a:solidFill>
-          <a:srgbClr val="0A0A0A"/>
+          <a:srgbClr val="F5F6F8"/>
         </a:solidFill>
       </p:bgPr>
     </p:bg>
@@ -2403,11 +2403,11 @@
             <a:avLst/>
           </a:prstGeom>
           <a:solidFill>
-            <a:srgbClr val="D62828"/>
+            <a:srgbClr val="C8161D"/>
           </a:solidFill>
           <a:ln w="12700">
             <a:solidFill>
-              <a:srgbClr val="D62828"/>
+              <a:srgbClr val="C8161D"/>
             </a:solidFill>
             <a:prstDash val="solid"/>
           </a:ln>
@@ -2440,11 +2440,11 @@
             <a:r>
               <a:rPr lang="en-US" sz="1000" b="1" spc="300" kern="0" dirty="0">
                 <a:solidFill>
-                  <a:srgbClr val="D62828"/>
-                </a:solidFill>
-                <a:latin typeface="Arial" pitchFamily="34" charset="0"/>
-                <a:ea typeface="Arial" pitchFamily="34" charset="-122"/>
-                <a:cs typeface="Arial" pitchFamily="34" charset="-120"/>
+                  <a:srgbClr val="C8161D"/>
+                </a:solidFill>
+                <a:latin typeface="Arial" pitchFamily="34" charset="0"/>
+                <a:ea typeface="BIZ UDPGothic" pitchFamily="34" charset="-122"/>
+                <a:cs typeface="BIZ UDPGothic" pitchFamily="34" charset="-120"/>
               </a:rPr>
               <a:t>政策提言プラットフォーム ── 提言007</a:t>
             </a:r>
@@ -2479,11 +2479,11 @@
             <a:r>
               <a:rPr lang="en-US" sz="3400" b="1" dirty="0">
                 <a:solidFill>
-                  <a:srgbClr val="F5F5F0"/>
-                </a:solidFill>
-                <a:latin typeface="Cambria" pitchFamily="34" charset="0"/>
-                <a:ea typeface="Cambria" pitchFamily="34" charset="-122"/>
-                <a:cs typeface="Cambria" pitchFamily="34" charset="-120"/>
+                  <a:srgbClr val="16181D"/>
+                </a:solidFill>
+                <a:latin typeface="BIZ UDPGothic" pitchFamily="34" charset="0"/>
+                <a:ea typeface="BIZ UDPGothic" pitchFamily="34" charset="-122"/>
+                <a:cs typeface="BIZ UDPGothic" pitchFamily="34" charset="-120"/>
               </a:rPr>
               <a:t>教育・雇用一体型システム</a:t>
             </a:r>
@@ -2496,11 +2496,11 @@
             <a:r>
               <a:rPr lang="en-US" sz="3400" b="1" dirty="0">
                 <a:solidFill>
-                  <a:srgbClr val="F5F5F0"/>
-                </a:solidFill>
-                <a:latin typeface="Cambria" pitchFamily="34" charset="0"/>
-                <a:ea typeface="Cambria" pitchFamily="34" charset="-122"/>
-                <a:cs typeface="Cambria" pitchFamily="34" charset="-120"/>
+                  <a:srgbClr val="16181D"/>
+                </a:solidFill>
+                <a:latin typeface="BIZ UDPGothic" pitchFamily="34" charset="0"/>
+                <a:ea typeface="BIZ UDPGothic" pitchFamily="34" charset="-122"/>
+                <a:cs typeface="BIZ UDPGothic" pitchFamily="34" charset="-120"/>
               </a:rPr>
               <a:t>「21歳社会人スタート」</a:t>
             </a:r>
@@ -2513,11 +2513,11 @@
             <a:r>
               <a:rPr lang="en-US" sz="3400" b="1" dirty="0">
                 <a:solidFill>
-                  <a:srgbClr val="F5F5F0"/>
-                </a:solidFill>
-                <a:latin typeface="Cambria" pitchFamily="34" charset="0"/>
-                <a:ea typeface="Cambria" pitchFamily="34" charset="-122"/>
-                <a:cs typeface="Cambria" pitchFamily="34" charset="-120"/>
+                  <a:srgbClr val="16181D"/>
+                </a:solidFill>
+                <a:latin typeface="BIZ UDPGothic" pitchFamily="34" charset="0"/>
+                <a:ea typeface="BIZ UDPGothic" pitchFamily="34" charset="-122"/>
+                <a:cs typeface="BIZ UDPGothic" pitchFamily="34" charset="-120"/>
               </a:rPr>
               <a:t>への構造改革</a:t>
             </a:r>
@@ -2540,11 +2540,11 @@
             <a:avLst/>
           </a:prstGeom>
           <a:solidFill>
-            <a:srgbClr val="2E2E2E"/>
+            <a:srgbClr val="DDE0E6"/>
           </a:solidFill>
           <a:ln w="12700">
             <a:solidFill>
-              <a:srgbClr val="2E2E2E"/>
+              <a:srgbClr val="DDE0E6"/>
             </a:solidFill>
             <a:prstDash val="solid"/>
           </a:ln>
@@ -2577,11 +2577,11 @@
             <a:r>
               <a:rPr lang="en-US" sz="1100" dirty="0">
                 <a:solidFill>
-                  <a:srgbClr val="888888"/>
-                </a:solidFill>
-                <a:latin typeface="Arial" pitchFamily="34" charset="0"/>
-                <a:ea typeface="Arial" pitchFamily="34" charset="-122"/>
-                <a:cs typeface="Arial" pitchFamily="34" charset="-120"/>
+                  <a:srgbClr val="626875"/>
+                </a:solidFill>
+                <a:latin typeface="Arial" pitchFamily="34" charset="0"/>
+                <a:ea typeface="BIZ UDPGothic" pitchFamily="34" charset="-122"/>
+                <a:cs typeface="BIZ UDPGothic" pitchFamily="34" charset="-120"/>
               </a:rPr>
               <a:t>REBOOT JAPAN ── 市民による政策提言プラットフォーム</a:t>
             </a:r>
@@ -2603,7 +2603,7 @@
     <p:bg>
       <p:bgPr>
         <a:solidFill>
-          <a:srgbClr val="0A0A0A"/>
+          <a:srgbClr val="F5F6F8"/>
         </a:solidFill>
       </p:bgPr>
     </p:bg>
@@ -2648,11 +2648,11 @@
             <a:r>
               <a:rPr lang="en-US" sz="900" b="1" spc="400" kern="0" dirty="0">
                 <a:solidFill>
-                  <a:srgbClr val="D62828"/>
-                </a:solidFill>
-                <a:latin typeface="Arial" pitchFamily="34" charset="0"/>
-                <a:ea typeface="Arial" pitchFamily="34" charset="-122"/>
-                <a:cs typeface="Arial" pitchFamily="34" charset="-120"/>
+                  <a:srgbClr val="C8161D"/>
+                </a:solidFill>
+                <a:latin typeface="Arial" pitchFamily="34" charset="0"/>
+                <a:ea typeface="BIZ UDPGothic" pitchFamily="34" charset="-122"/>
+                <a:cs typeface="BIZ UDPGothic" pitchFamily="34" charset="-120"/>
               </a:rPr>
               <a:t>ROUTE 02 — FUNDING</a:t>
             </a:r>
@@ -2687,11 +2687,11 @@
             <a:r>
               <a:rPr lang="en-US" sz="3600" b="1" dirty="0">
                 <a:solidFill>
-                  <a:srgbClr val="F5F5F0"/>
-                </a:solidFill>
-                <a:latin typeface="Cambria" pitchFamily="34" charset="0"/>
-                <a:ea typeface="Cambria" pitchFamily="34" charset="-122"/>
-                <a:cs typeface="Cambria" pitchFamily="34" charset="-120"/>
+                  <a:srgbClr val="16181D"/>
+                </a:solidFill>
+                <a:latin typeface="BIZ UDPGothic" pitchFamily="34" charset="0"/>
+                <a:ea typeface="BIZ UDPGothic" pitchFamily="34" charset="-122"/>
+                <a:cs typeface="BIZ UDPGothic" pitchFamily="34" charset="-120"/>
               </a:rPr>
               <a:t>国費で育てた以上、10年は国に返す</a:t>
             </a:r>
@@ -2714,11 +2714,11 @@
             <a:avLst/>
           </a:prstGeom>
           <a:solidFill>
-            <a:srgbClr val="2E2E2E"/>
+            <a:srgbClr val="DDE0E6"/>
           </a:solidFill>
           <a:ln w="12700">
             <a:solidFill>
-              <a:srgbClr val="2E2E2E"/>
+              <a:srgbClr val="DDE0E6"/>
             </a:solidFill>
             <a:prstDash val="solid"/>
           </a:ln>
@@ -2741,11 +2741,11 @@
             </a:avLst>
           </a:prstGeom>
           <a:solidFill>
-            <a:srgbClr val="1A1A1A"/>
+            <a:srgbClr val="FFFFFF"/>
           </a:solidFill>
           <a:ln w="12700">
             <a:solidFill>
-              <a:srgbClr val="2E2E2E"/>
+              <a:srgbClr val="DDE0E6"/>
             </a:solidFill>
             <a:prstDash val="solid"/>
           </a:ln>
@@ -2778,11 +2778,11 @@
             <a:r>
               <a:rPr lang="en-US" sz="1500" b="1" dirty="0">
                 <a:solidFill>
-                  <a:srgbClr val="F5F5F0"/>
-                </a:solidFill>
-                <a:latin typeface="Cambria" pitchFamily="34" charset="0"/>
-                <a:ea typeface="Cambria" pitchFamily="34" charset="-122"/>
-                <a:cs typeface="Cambria" pitchFamily="34" charset="-120"/>
+                  <a:srgbClr val="16181D"/>
+                </a:solidFill>
+                <a:latin typeface="BIZ UDPGothic" pitchFamily="34" charset="0"/>
+                <a:ea typeface="BIZ UDPGothic" pitchFamily="34" charset="-122"/>
+                <a:cs typeface="BIZ UDPGothic" pitchFamily="34" charset="-120"/>
               </a:rPr>
               <a:t>費用負担</a:t>
             </a:r>
@@ -2805,11 +2805,11 @@
             <a:avLst/>
           </a:prstGeom>
           <a:solidFill>
-            <a:srgbClr val="2E2E2E"/>
+            <a:srgbClr val="DDE0E6"/>
           </a:solidFill>
           <a:ln w="12700">
             <a:solidFill>
-              <a:srgbClr val="2E2E2E"/>
+              <a:srgbClr val="DDE0E6"/>
             </a:solidFill>
             <a:prstDash val="solid"/>
           </a:ln>
@@ -2842,11 +2842,11 @@
             <a:r>
               <a:rPr lang="en-US" sz="1100" dirty="0">
                 <a:solidFill>
-                  <a:srgbClr val="CCCCCC"/>
-                </a:solidFill>
-                <a:latin typeface="Arial" pitchFamily="34" charset="0"/>
-                <a:ea typeface="Arial" pitchFamily="34" charset="-122"/>
-                <a:cs typeface="Arial" pitchFamily="34" charset="-120"/>
+                  <a:srgbClr val="2B2F36"/>
+                </a:solidFill>
+                <a:latin typeface="Arial" pitchFamily="34" charset="0"/>
+                <a:ea typeface="BIZ UDPGothic" pitchFamily="34" charset="-122"/>
+                <a:cs typeface="BIZ UDPGothic" pitchFamily="34" charset="-120"/>
               </a:rPr>
               <a:t>基本は国費。</a:t>
             </a:r>
@@ -2859,11 +2859,11 @@
             <a:r>
               <a:rPr lang="en-US" sz="1100" dirty="0">
                 <a:solidFill>
-                  <a:srgbClr val="CCCCCC"/>
-                </a:solidFill>
-                <a:latin typeface="Arial" pitchFamily="34" charset="0"/>
-                <a:ea typeface="Arial" pitchFamily="34" charset="-122"/>
-                <a:cs typeface="Arial" pitchFamily="34" charset="-120"/>
+                  <a:srgbClr val="2B2F36"/>
+                </a:solidFill>
+                <a:latin typeface="Arial" pitchFamily="34" charset="0"/>
+                <a:ea typeface="BIZ UDPGothic" pitchFamily="34" charset="-122"/>
+                <a:cs typeface="BIZ UDPGothic" pitchFamily="34" charset="-120"/>
               </a:rPr>
               <a:t>専門学校程度の学費のみ自費負担。</a:t>
             </a:r>
@@ -2876,11 +2876,11 @@
             <a:r>
               <a:rPr lang="en-US" sz="1100" dirty="0">
                 <a:solidFill>
-                  <a:srgbClr val="CCCCCC"/>
-                </a:solidFill>
-                <a:latin typeface="Arial" pitchFamily="34" charset="0"/>
-                <a:ea typeface="Arial" pitchFamily="34" charset="-122"/>
-                <a:cs typeface="Arial" pitchFamily="34" charset="-120"/>
+                  <a:srgbClr val="2B2F36"/>
+                </a:solidFill>
+                <a:latin typeface="Arial" pitchFamily="34" charset="0"/>
+                <a:ea typeface="BIZ UDPGothic" pitchFamily="34" charset="-122"/>
+                <a:cs typeface="BIZ UDPGothic" pitchFamily="34" charset="-120"/>
               </a:rPr>
               <a:t>親の経済力に関係なく、意志と適性で進める。</a:t>
             </a:r>
@@ -2905,11 +2905,11 @@
             </a:avLst>
           </a:prstGeom>
           <a:solidFill>
-            <a:srgbClr val="1A1A1A"/>
+            <a:srgbClr val="FFFFFF"/>
           </a:solidFill>
           <a:ln w="12700">
             <a:solidFill>
-              <a:srgbClr val="2E2E2E"/>
+              <a:srgbClr val="DDE0E6"/>
             </a:solidFill>
             <a:prstDash val="solid"/>
           </a:ln>
@@ -2942,11 +2942,11 @@
             <a:r>
               <a:rPr lang="en-US" sz="1500" b="1" dirty="0">
                 <a:solidFill>
-                  <a:srgbClr val="D62828"/>
-                </a:solidFill>
-                <a:latin typeface="Cambria" pitchFamily="34" charset="0"/>
-                <a:ea typeface="Cambria" pitchFamily="34" charset="-122"/>
-                <a:cs typeface="Cambria" pitchFamily="34" charset="-120"/>
+                  <a:srgbClr val="C8161D"/>
+                </a:solidFill>
+                <a:latin typeface="BIZ UDPGothic" pitchFamily="34" charset="0"/>
+                <a:ea typeface="BIZ UDPGothic" pitchFamily="34" charset="-122"/>
+                <a:cs typeface="BIZ UDPGothic" pitchFamily="34" charset="-120"/>
               </a:rPr>
               <a:t>従事義務</a:t>
             </a:r>
@@ -2969,11 +2969,11 @@
             <a:avLst/>
           </a:prstGeom>
           <a:solidFill>
-            <a:srgbClr val="2E2E2E"/>
+            <a:srgbClr val="DDE0E6"/>
           </a:solidFill>
           <a:ln w="12700">
             <a:solidFill>
-              <a:srgbClr val="2E2E2E"/>
+              <a:srgbClr val="DDE0E6"/>
             </a:solidFill>
             <a:prstDash val="solid"/>
           </a:ln>
@@ -3006,11 +3006,11 @@
             <a:r>
               <a:rPr lang="en-US" sz="1100" dirty="0">
                 <a:solidFill>
-                  <a:srgbClr val="CCCCCC"/>
-                </a:solidFill>
-                <a:latin typeface="Arial" pitchFamily="34" charset="0"/>
-                <a:ea typeface="Arial" pitchFamily="34" charset="-122"/>
-                <a:cs typeface="Arial" pitchFamily="34" charset="-120"/>
+                  <a:srgbClr val="2B2F36"/>
+                </a:solidFill>
+                <a:latin typeface="Arial" pitchFamily="34" charset="0"/>
+                <a:ea typeface="BIZ UDPGothic" pitchFamily="34" charset="-122"/>
+                <a:cs typeface="BIZ UDPGothic" pitchFamily="34" charset="-120"/>
               </a:rPr>
               <a:t>卒業・任官後10年間（医療・公安・防衛ともに共通）。シンプルで明快な原則。</a:t>
             </a:r>
@@ -3035,11 +3035,11 @@
             </a:avLst>
           </a:prstGeom>
           <a:solidFill>
-            <a:srgbClr val="1A1A1A"/>
+            <a:srgbClr val="FFFFFF"/>
           </a:solidFill>
           <a:ln w="12700">
             <a:solidFill>
-              <a:srgbClr val="2E2E2E"/>
+              <a:srgbClr val="DDE0E6"/>
             </a:solidFill>
             <a:prstDash val="solid"/>
           </a:ln>
@@ -3072,11 +3072,11 @@
             <a:r>
               <a:rPr lang="en-US" sz="1500" b="1" dirty="0">
                 <a:solidFill>
-                  <a:srgbClr val="4CAF50"/>
-                </a:solidFill>
-                <a:latin typeface="Cambria" pitchFamily="34" charset="0"/>
-                <a:ea typeface="Cambria" pitchFamily="34" charset="-122"/>
-                <a:cs typeface="Cambria" pitchFamily="34" charset="-120"/>
+                  <a:srgbClr val="1D4F91"/>
+                </a:solidFill>
+                <a:latin typeface="BIZ UDPGothic" pitchFamily="34" charset="0"/>
+                <a:ea typeface="BIZ UDPGothic" pitchFamily="34" charset="-122"/>
+                <a:cs typeface="BIZ UDPGothic" pitchFamily="34" charset="-120"/>
               </a:rPr>
               <a:t>義務終了後</a:t>
             </a:r>
@@ -3099,11 +3099,11 @@
             <a:avLst/>
           </a:prstGeom>
           <a:solidFill>
-            <a:srgbClr val="2E2E2E"/>
+            <a:srgbClr val="DDE0E6"/>
           </a:solidFill>
           <a:ln w="12700">
             <a:solidFill>
-              <a:srgbClr val="2E2E2E"/>
+              <a:srgbClr val="DDE0E6"/>
             </a:solidFill>
             <a:prstDash val="solid"/>
           </a:ln>
@@ -3136,11 +3136,11 @@
             <a:r>
               <a:rPr lang="en-US" sz="1100" dirty="0">
                 <a:solidFill>
-                  <a:srgbClr val="CCCCCC"/>
-                </a:solidFill>
-                <a:latin typeface="Arial" pitchFamily="34" charset="0"/>
-                <a:ea typeface="Arial" pitchFamily="34" charset="-122"/>
-                <a:cs typeface="Arial" pitchFamily="34" charset="-120"/>
+                  <a:srgbClr val="2B2F36"/>
+                </a:solidFill>
+                <a:latin typeface="Arial" pitchFamily="34" charset="0"/>
+                <a:ea typeface="BIZ UDPGothic" pitchFamily="34" charset="-122"/>
+                <a:cs typeface="BIZ UDPGothic" pitchFamily="34" charset="-120"/>
               </a:rPr>
               <a:t>完全自由。民間転職・開業・海外移住を含め一切の制限なし。余計な縛りをつけない。</a:t>
             </a:r>
@@ -3165,11 +3165,11 @@
             </a:avLst>
           </a:prstGeom>
           <a:solidFill>
-            <a:srgbClr val="1A1A1A"/>
+            <a:srgbClr val="FFFFFF"/>
           </a:solidFill>
           <a:ln w="12700">
             <a:solidFill>
-              <a:srgbClr val="2E2E2E"/>
+              <a:srgbClr val="DDE0E6"/>
             </a:solidFill>
             <a:prstDash val="solid"/>
           </a:ln>
@@ -3202,11 +3202,11 @@
             <a:r>
               <a:rPr lang="en-US" sz="1100" b="1" dirty="0">
                 <a:solidFill>
-                  <a:srgbClr val="F5F5F0"/>
-                </a:solidFill>
-                <a:latin typeface="Cambria" pitchFamily="34" charset="0"/>
-                <a:ea typeface="Cambria" pitchFamily="34" charset="-122"/>
-                <a:cs typeface="Cambria" pitchFamily="34" charset="-120"/>
+                  <a:srgbClr val="16181D"/>
+                </a:solidFill>
+                <a:latin typeface="BIZ UDPGothic" pitchFamily="34" charset="0"/>
+                <a:ea typeface="BIZ UDPGothic" pitchFamily="34" charset="-122"/>
+                <a:cs typeface="BIZ UDPGothic" pitchFamily="34" charset="-120"/>
               </a:rPr>
               <a:t>「国費で育てる」＝「10年で返す」。シンプルな原則が制度への信頼をつくる</a:t>
             </a:r>
@@ -3228,7 +3228,7 @@
     <p:bg>
       <p:bgPr>
         <a:solidFill>
-          <a:srgbClr val="0A0A0A"/>
+          <a:srgbClr val="F5F6F8"/>
         </a:solidFill>
       </p:bgPr>
     </p:bg>
@@ -3273,11 +3273,11 @@
             <a:r>
               <a:rPr lang="en-US" sz="900" b="1" spc="400" kern="0" dirty="0">
                 <a:solidFill>
-                  <a:srgbClr val="D62828"/>
-                </a:solidFill>
-                <a:latin typeface="Arial" pitchFamily="34" charset="0"/>
-                <a:ea typeface="Arial" pitchFamily="34" charset="-122"/>
-                <a:cs typeface="Arial" pitchFamily="34" charset="-120"/>
+                  <a:srgbClr val="C8161D"/>
+                </a:solidFill>
+                <a:latin typeface="Arial" pitchFamily="34" charset="0"/>
+                <a:ea typeface="BIZ UDPGothic" pitchFamily="34" charset="-122"/>
+                <a:cs typeface="BIZ UDPGothic" pitchFamily="34" charset="-120"/>
               </a:rPr>
               <a:t>ROUTE 03</a:t>
             </a:r>
@@ -3312,11 +3312,11 @@
             <a:r>
               <a:rPr lang="en-US" sz="2000" b="1" dirty="0">
                 <a:solidFill>
-                  <a:srgbClr val="F5F5F0"/>
-                </a:solidFill>
-                <a:latin typeface="Cambria" pitchFamily="34" charset="0"/>
-                <a:ea typeface="Cambria" pitchFamily="34" charset="-122"/>
-                <a:cs typeface="Cambria" pitchFamily="34" charset="-120"/>
+                  <a:srgbClr val="16181D"/>
+                </a:solidFill>
+                <a:latin typeface="BIZ UDPGothic" pitchFamily="34" charset="0"/>
+                <a:ea typeface="BIZ UDPGothic" pitchFamily="34" charset="-122"/>
+                <a:cs typeface="BIZ UDPGothic" pitchFamily="34" charset="-120"/>
               </a:rPr>
               <a:t>天才・研究者ルート ── 上位数％のトップインテリジェンス</a:t>
             </a:r>
@@ -3339,11 +3339,11 @@
             <a:avLst/>
           </a:prstGeom>
           <a:solidFill>
-            <a:srgbClr val="2E2E2E"/>
+            <a:srgbClr val="DDE0E6"/>
           </a:solidFill>
           <a:ln w="12700">
             <a:solidFill>
-              <a:srgbClr val="2E2E2E"/>
+              <a:srgbClr val="DDE0E6"/>
             </a:solidFill>
             <a:prstDash val="solid"/>
           </a:ln>
@@ -3376,11 +3376,11 @@
             <a:r>
               <a:rPr lang="en-US" sz="1100" dirty="0">
                 <a:solidFill>
-                  <a:srgbClr val="CCCCCC"/>
-                </a:solidFill>
-                <a:latin typeface="Arial" pitchFamily="34" charset="0"/>
-                <a:ea typeface="Arial" pitchFamily="34" charset="-122"/>
-                <a:cs typeface="Arial" pitchFamily="34" charset="-120"/>
+                  <a:srgbClr val="2B2F36"/>
+                </a:solidFill>
+                <a:latin typeface="Arial" pitchFamily="34" charset="0"/>
+                <a:ea typeface="BIZ UDPGothic" pitchFamily="34" charset="-122"/>
+                <a:cs typeface="BIZ UDPGothic" pitchFamily="34" charset="-120"/>
               </a:rPr>
               <a:t>高校卒業時点で突出した才能・成果を示した人材を国費で選抜。親の経済力に関係なく10代から最先端研究へ。</a:t>
             </a:r>
@@ -3405,11 +3405,11 @@
             </a:avLst>
           </a:prstGeom>
           <a:solidFill>
-            <a:srgbClr val="1A1A1A"/>
+            <a:srgbClr val="FFFFFF"/>
           </a:solidFill>
           <a:ln w="12700">
             <a:solidFill>
-              <a:srgbClr val="2E2E2E"/>
+              <a:srgbClr val="DDE0E6"/>
             </a:solidFill>
             <a:prstDash val="solid"/>
           </a:ln>
@@ -3442,11 +3442,11 @@
             <a:r>
               <a:rPr lang="en-US" sz="1400" b="1" dirty="0">
                 <a:solidFill>
-                  <a:srgbClr val="D62828"/>
-                </a:solidFill>
-                <a:latin typeface="Cambria" pitchFamily="34" charset="0"/>
-                <a:ea typeface="Cambria" pitchFamily="34" charset="-122"/>
-                <a:cs typeface="Cambria" pitchFamily="34" charset="-120"/>
+                  <a:srgbClr val="C8161D"/>
+                </a:solidFill>
+                <a:latin typeface="BIZ UDPGothic" pitchFamily="34" charset="0"/>
+                <a:ea typeface="BIZ UDPGothic" pitchFamily="34" charset="-122"/>
+                <a:cs typeface="BIZ UDPGothic" pitchFamily="34" charset="-120"/>
               </a:rPr>
               <a:t>制度設計</a:t>
             </a:r>
@@ -3485,11 +3485,11 @@
             <a:r>
               <a:rPr lang="en-US" sz="1100" dirty="0">
                 <a:solidFill>
-                  <a:srgbClr val="CCCCCC"/>
-                </a:solidFill>
-                <a:latin typeface="Arial" pitchFamily="34" charset="0"/>
-                <a:ea typeface="Arial" pitchFamily="34" charset="-122"/>
-                <a:cs typeface="Arial" pitchFamily="34" charset="-120"/>
+                  <a:srgbClr val="2B2F36"/>
+                </a:solidFill>
+                <a:latin typeface="Arial" pitchFamily="34" charset="0"/>
+                <a:ea typeface="BIZ UDPGothic" pitchFamily="34" charset="-122"/>
+                <a:cs typeface="BIZ UDPGothic" pitchFamily="34" charset="-120"/>
               </a:rPr>
               <a:t>対象：数学・物理・文学・AIアルゴリズム等で突出した才能・成果</a:t>
             </a:r>
@@ -3506,11 +3506,11 @@
             <a:r>
               <a:rPr lang="en-US" sz="1100" dirty="0">
                 <a:solidFill>
-                  <a:srgbClr val="CCCCCC"/>
-                </a:solidFill>
-                <a:latin typeface="Arial" pitchFamily="34" charset="0"/>
-                <a:ea typeface="Arial" pitchFamily="34" charset="-122"/>
-                <a:cs typeface="Arial" pitchFamily="34" charset="-120"/>
+                  <a:srgbClr val="2B2F36"/>
+                </a:solidFill>
+                <a:latin typeface="Arial" pitchFamily="34" charset="0"/>
+                <a:ea typeface="BIZ UDPGothic" pitchFamily="34" charset="-122"/>
+                <a:cs typeface="BIZ UDPGothic" pitchFamily="34" charset="-120"/>
               </a:rPr>
               <a:t>行程：高校3年 → 最高峰研究型大学・大学院へ直行</a:t>
             </a:r>
@@ -3527,11 +3527,11 @@
             <a:r>
               <a:rPr lang="en-US" sz="1100" dirty="0">
                 <a:solidFill>
-                  <a:srgbClr val="CCCCCC"/>
-                </a:solidFill>
-                <a:latin typeface="Arial" pitchFamily="34" charset="0"/>
-                <a:ea typeface="Arial" pitchFamily="34" charset="-122"/>
-                <a:cs typeface="Arial" pitchFamily="34" charset="-120"/>
+                  <a:srgbClr val="2B2F36"/>
+                </a:solidFill>
+                <a:latin typeface="Arial" pitchFamily="34" charset="0"/>
+                <a:ea typeface="BIZ UDPGothic" pitchFamily="34" charset="-122"/>
+                <a:cs typeface="BIZ UDPGothic" pitchFamily="34" charset="-120"/>
               </a:rPr>
               <a:t>費用：完全無償（国費選抜）</a:t>
             </a:r>
@@ -3548,11 +3548,11 @@
             <a:r>
               <a:rPr lang="en-US" sz="1100" dirty="0">
                 <a:solidFill>
-                  <a:srgbClr val="CCCCCC"/>
-                </a:solidFill>
-                <a:latin typeface="Arial" pitchFamily="34" charset="0"/>
-                <a:ea typeface="Arial" pitchFamily="34" charset="-122"/>
-                <a:cs typeface="Arial" pitchFamily="34" charset="-120"/>
+                  <a:srgbClr val="2B2F36"/>
+                </a:solidFill>
+                <a:latin typeface="Arial" pitchFamily="34" charset="0"/>
+                <a:ea typeface="BIZ UDPGothic" pitchFamily="34" charset="-122"/>
+                <a:cs typeface="BIZ UDPGothic" pitchFamily="34" charset="-120"/>
               </a:rPr>
               <a:t>選抜：高校卒業時点の研究成果・実績で判定</a:t>
             </a:r>
@@ -3577,11 +3577,11 @@
             </a:avLst>
           </a:prstGeom>
           <a:solidFill>
-            <a:srgbClr val="201414"/>
+            <a:srgbClr val="FCEBEB"/>
           </a:solidFill>
           <a:ln w="12700">
             <a:solidFill>
-              <a:srgbClr val="2E2E2E"/>
+              <a:srgbClr val="DDE0E6"/>
             </a:solidFill>
             <a:prstDash val="solid"/>
           </a:ln>
@@ -3614,11 +3614,11 @@
             <a:r>
               <a:rPr lang="en-US" sz="1400" b="1" dirty="0">
                 <a:solidFill>
-                  <a:srgbClr val="4CAF50"/>
-                </a:solidFill>
-                <a:latin typeface="Cambria" pitchFamily="34" charset="0"/>
-                <a:ea typeface="Cambria" pitchFamily="34" charset="-122"/>
-                <a:cs typeface="Cambria" pitchFamily="34" charset="-120"/>
+                  <a:srgbClr val="1D4F91"/>
+                </a:solidFill>
+                <a:latin typeface="BIZ UDPGothic" pitchFamily="34" charset="0"/>
+                <a:ea typeface="BIZ UDPGothic" pitchFamily="34" charset="-122"/>
+                <a:cs typeface="BIZ UDPGothic" pitchFamily="34" charset="-120"/>
               </a:rPr>
               <a:t>改革の効果</a:t>
             </a:r>
@@ -3657,11 +3657,11 @@
             <a:r>
               <a:rPr lang="en-US" sz="1100" dirty="0">
                 <a:solidFill>
-                  <a:srgbClr val="CCCCCC"/>
-                </a:solidFill>
-                <a:latin typeface="Arial" pitchFamily="34" charset="0"/>
-                <a:ea typeface="Arial" pitchFamily="34" charset="-122"/>
-                <a:cs typeface="Arial" pitchFamily="34" charset="-120"/>
+                  <a:srgbClr val="2B2F36"/>
+                </a:solidFill>
+                <a:latin typeface="Arial" pitchFamily="34" charset="0"/>
+                <a:ea typeface="BIZ UDPGothic" pitchFamily="34" charset="-122"/>
+                <a:cs typeface="BIZ UDPGothic" pitchFamily="34" charset="-120"/>
               </a:rPr>
               <a:t>大学の絶対数を激減させる根拠になる</a:t>
             </a:r>
@@ -3678,11 +3678,11 @@
             <a:r>
               <a:rPr lang="en-US" sz="1100" dirty="0">
                 <a:solidFill>
-                  <a:srgbClr val="CCCCCC"/>
-                </a:solidFill>
-                <a:latin typeface="Arial" pitchFamily="34" charset="0"/>
-                <a:ea typeface="Arial" pitchFamily="34" charset="-122"/>
-                <a:cs typeface="Arial" pitchFamily="34" charset="-120"/>
+                  <a:srgbClr val="2B2F36"/>
+                </a:solidFill>
+                <a:latin typeface="Arial" pitchFamily="34" charset="0"/>
+                <a:ea typeface="BIZ UDPGothic" pitchFamily="34" charset="-122"/>
+                <a:cs typeface="BIZ UDPGothic" pitchFamily="34" charset="-120"/>
               </a:rPr>
               <a:t>浮いた私学助成金をトップ研究機関の研究開発費へ全額投入</a:t>
             </a:r>
@@ -3699,11 +3699,11 @@
             <a:r>
               <a:rPr lang="en-US" sz="1100" dirty="0">
                 <a:solidFill>
-                  <a:srgbClr val="CCCCCC"/>
-                </a:solidFill>
-                <a:latin typeface="Arial" pitchFamily="34" charset="0"/>
-                <a:ea typeface="Arial" pitchFamily="34" charset="-122"/>
-                <a:cs typeface="Arial" pitchFamily="34" charset="-120"/>
+                  <a:srgbClr val="2B2F36"/>
+                </a:solidFill>
+                <a:latin typeface="Arial" pitchFamily="34" charset="0"/>
+                <a:ea typeface="BIZ UDPGothic" pitchFamily="34" charset="-122"/>
+                <a:cs typeface="BIZ UDPGothic" pitchFamily="34" charset="-120"/>
               </a:rPr>
               <a:t>「才能があれば家庭の経済力は関係ない」を制度として実現</a:t>
             </a:r>
@@ -3720,11 +3720,11 @@
             <a:r>
               <a:rPr lang="en-US" sz="1100" dirty="0">
                 <a:solidFill>
-                  <a:srgbClr val="CCCCCC"/>
-                </a:solidFill>
-                <a:latin typeface="Arial" pitchFamily="34" charset="0"/>
-                <a:ea typeface="Arial" pitchFamily="34" charset="-122"/>
-                <a:cs typeface="Arial" pitchFamily="34" charset="-120"/>
+                  <a:srgbClr val="2B2F36"/>
+                </a:solidFill>
+                <a:latin typeface="Arial" pitchFamily="34" charset="0"/>
+                <a:ea typeface="BIZ UDPGothic" pitchFamily="34" charset="-122"/>
+                <a:cs typeface="BIZ UDPGothic" pitchFamily="34" charset="-120"/>
               </a:rPr>
               <a:t>日本の研究力・国際競争力の再建</a:t>
             </a:r>
@@ -3746,7 +3746,7 @@
     <p:bg>
       <p:bgPr>
         <a:solidFill>
-          <a:srgbClr val="0A0A0A"/>
+          <a:srgbClr val="F5F6F8"/>
         </a:solidFill>
       </p:bgPr>
     </p:bg>
@@ -3791,11 +3791,11 @@
             <a:r>
               <a:rPr lang="en-US" sz="900" b="1" spc="400" kern="0" dirty="0">
                 <a:solidFill>
-                  <a:srgbClr val="D62828"/>
-                </a:solidFill>
-                <a:latin typeface="Arial" pitchFamily="34" charset="0"/>
-                <a:ea typeface="Arial" pitchFamily="34" charset="-122"/>
-                <a:cs typeface="Arial" pitchFamily="34" charset="-120"/>
+                  <a:srgbClr val="C8161D"/>
+                </a:solidFill>
+                <a:latin typeface="Arial" pitchFamily="34" charset="0"/>
+                <a:ea typeface="BIZ UDPGothic" pitchFamily="34" charset="-122"/>
+                <a:cs typeface="BIZ UDPGothic" pitchFamily="34" charset="-120"/>
               </a:rPr>
               <a:t>UNIVERSITY PROBLEM</a:t>
             </a:r>
@@ -3828,17 +3828,17 @@
               <a:buNone/>
             </a:pPr>
             <a:r>
-              <a:rPr lang="en-US" sz="3600" b="1" dirty="0">
-                <a:solidFill>
-                  <a:srgbClr val="F5F5F0"/>
-                </a:solidFill>
-                <a:latin typeface="Cambria" pitchFamily="34" charset="0"/>
-                <a:ea typeface="Cambria" pitchFamily="34" charset="-122"/>
-                <a:cs typeface="Cambria" pitchFamily="34" charset="-120"/>
+              <a:rPr lang="en-US" sz="2400" b="1" dirty="0">
+                <a:solidFill>
+                  <a:srgbClr val="16181D"/>
+                </a:solidFill>
+                <a:latin typeface="BIZ UDPGothic" pitchFamily="34" charset="0"/>
+                <a:ea typeface="BIZ UDPGothic" pitchFamily="34" charset="-122"/>
+                <a:cs typeface="BIZ UDPGothic" pitchFamily="34" charset="-120"/>
               </a:rPr>
               <a:t>大学制度の現状：「人気取り」が経営軸になっている</a:t>
             </a:r>
-            <a:endParaRPr lang="en-US" sz="3600" dirty="0"/>
+            <a:endParaRPr lang="en-US" sz="2400" dirty="0"/>
           </a:p>
         </p:txBody>
       </p:sp>
@@ -3857,11 +3857,11 @@
             <a:avLst/>
           </a:prstGeom>
           <a:solidFill>
-            <a:srgbClr val="2E2E2E"/>
+            <a:srgbClr val="DDE0E6"/>
           </a:solidFill>
           <a:ln w="12700">
             <a:solidFill>
-              <a:srgbClr val="2E2E2E"/>
+              <a:srgbClr val="DDE0E6"/>
             </a:solidFill>
             <a:prstDash val="solid"/>
           </a:ln>
@@ -3884,11 +3884,11 @@
             </a:avLst>
           </a:prstGeom>
           <a:solidFill>
-            <a:srgbClr val="1A1A1A"/>
+            <a:srgbClr val="FFFFFF"/>
           </a:solidFill>
           <a:ln w="12700">
             <a:solidFill>
-              <a:srgbClr val="2E2E2E"/>
+              <a:srgbClr val="DDE0E6"/>
             </a:solidFill>
             <a:prstDash val="solid"/>
           </a:ln>
@@ -3921,11 +3921,11 @@
             <a:r>
               <a:rPr lang="en-US" sz="2800" b="1" dirty="0">
                 <a:solidFill>
-                  <a:srgbClr val="D62828"/>
-                </a:solidFill>
-                <a:latin typeface="Cambria" pitchFamily="34" charset="0"/>
-                <a:ea typeface="Cambria" pitchFamily="34" charset="-122"/>
-                <a:cs typeface="Cambria" pitchFamily="34" charset="-120"/>
+                  <a:srgbClr val="C8161D"/>
+                </a:solidFill>
+                <a:latin typeface="BIZ UDPGothic" pitchFamily="34" charset="0"/>
+                <a:ea typeface="BIZ UDPGothic" pitchFamily="34" charset="-122"/>
+                <a:cs typeface="BIZ UDPGothic" pitchFamily="34" charset="-120"/>
               </a:rPr>
               <a:t>約800校</a:t>
             </a:r>
@@ -3960,11 +3960,11 @@
             <a:r>
               <a:rPr lang="en-US" sz="1200" dirty="0">
                 <a:solidFill>
-                  <a:srgbClr val="CCCCCC"/>
-                </a:solidFill>
-                <a:latin typeface="Arial" pitchFamily="34" charset="0"/>
-                <a:ea typeface="Arial" pitchFamily="34" charset="-122"/>
-                <a:cs typeface="Arial" pitchFamily="34" charset="-120"/>
+                  <a:srgbClr val="2B2F36"/>
+                </a:solidFill>
+                <a:latin typeface="Arial" pitchFamily="34" charset="0"/>
+                <a:ea typeface="BIZ UDPGothic" pitchFamily="34" charset="-122"/>
+                <a:cs typeface="BIZ UDPGothic" pitchFamily="34" charset="-120"/>
               </a:rPr>
               <a:t>日本の大学数</a:t>
             </a:r>
@@ -3989,11 +3989,11 @@
             </a:avLst>
           </a:prstGeom>
           <a:solidFill>
-            <a:srgbClr val="1A1A1A"/>
+            <a:srgbClr val="FFFFFF"/>
           </a:solidFill>
           <a:ln w="12700">
             <a:solidFill>
-              <a:srgbClr val="2E2E2E"/>
+              <a:srgbClr val="DDE0E6"/>
             </a:solidFill>
             <a:prstDash val="solid"/>
           </a:ln>
@@ -4026,11 +4026,11 @@
             <a:r>
               <a:rPr lang="en-US" sz="2800" b="1" dirty="0">
                 <a:solidFill>
-                  <a:srgbClr val="D62828"/>
-                </a:solidFill>
-                <a:latin typeface="Cambria" pitchFamily="34" charset="0"/>
-                <a:ea typeface="Cambria" pitchFamily="34" charset="-122"/>
-                <a:cs typeface="Cambria" pitchFamily="34" charset="-120"/>
+                  <a:srgbClr val="C8161D"/>
+                </a:solidFill>
+                <a:latin typeface="BIZ UDPGothic" pitchFamily="34" charset="0"/>
+                <a:ea typeface="BIZ UDPGothic" pitchFamily="34" charset="-122"/>
+                <a:cs typeface="BIZ UDPGothic" pitchFamily="34" charset="-120"/>
               </a:rPr>
               <a:t>約4割</a:t>
             </a:r>
@@ -4065,11 +4065,11 @@
             <a:r>
               <a:rPr lang="en-US" sz="1200" dirty="0">
                 <a:solidFill>
-                  <a:srgbClr val="CCCCCC"/>
-                </a:solidFill>
-                <a:latin typeface="Arial" pitchFamily="34" charset="0"/>
-                <a:ea typeface="Arial" pitchFamily="34" charset="-122"/>
-                <a:cs typeface="Arial" pitchFamily="34" charset="-120"/>
+                  <a:srgbClr val="2B2F36"/>
+                </a:solidFill>
+                <a:latin typeface="Arial" pitchFamily="34" charset="0"/>
+                <a:ea typeface="BIZ UDPGothic" pitchFamily="34" charset="-122"/>
+                <a:cs typeface="BIZ UDPGothic" pitchFamily="34" charset="-120"/>
               </a:rPr>
               <a:t>定員割れ大学の割合</a:t>
             </a:r>
@@ -4094,11 +4094,11 @@
             </a:avLst>
           </a:prstGeom>
           <a:solidFill>
-            <a:srgbClr val="1A1A1A"/>
+            <a:srgbClr val="FFFFFF"/>
           </a:solidFill>
           <a:ln w="12700">
             <a:solidFill>
-              <a:srgbClr val="2E2E2E"/>
+              <a:srgbClr val="DDE0E6"/>
             </a:solidFill>
             <a:prstDash val="solid"/>
           </a:ln>
@@ -4131,11 +4131,11 @@
             <a:r>
               <a:rPr lang="en-US" sz="2800" b="1" dirty="0">
                 <a:solidFill>
-                  <a:srgbClr val="D62828"/>
-                </a:solidFill>
-                <a:latin typeface="Cambria" pitchFamily="34" charset="0"/>
-                <a:ea typeface="Cambria" pitchFamily="34" charset="-122"/>
-                <a:cs typeface="Cambria" pitchFamily="34" charset="-120"/>
+                  <a:srgbClr val="C8161D"/>
+                </a:solidFill>
+                <a:latin typeface="BIZ UDPGothic" pitchFamily="34" charset="0"/>
+                <a:ea typeface="BIZ UDPGothic" pitchFamily="34" charset="-122"/>
+                <a:cs typeface="BIZ UDPGothic" pitchFamily="34" charset="-120"/>
               </a:rPr>
               <a:t>数百万円</a:t>
             </a:r>
@@ -4170,11 +4170,11 @@
             <a:r>
               <a:rPr lang="en-US" sz="1200" dirty="0">
                 <a:solidFill>
-                  <a:srgbClr val="CCCCCC"/>
-                </a:solidFill>
-                <a:latin typeface="Arial" pitchFamily="34" charset="0"/>
-                <a:ea typeface="Arial" pitchFamily="34" charset="-122"/>
-                <a:cs typeface="Arial" pitchFamily="34" charset="-120"/>
+                  <a:srgbClr val="2B2F36"/>
+                </a:solidFill>
+                <a:latin typeface="Arial" pitchFamily="34" charset="0"/>
+                <a:ea typeface="BIZ UDPGothic" pitchFamily="34" charset="-122"/>
+                <a:cs typeface="BIZ UDPGothic" pitchFamily="34" charset="-120"/>
               </a:rPr>
               <a:t>私立医学部6年間の学費</a:t>
             </a:r>
@@ -4199,11 +4199,11 @@
             </a:avLst>
           </a:prstGeom>
           <a:solidFill>
-            <a:srgbClr val="1A1A1A"/>
+            <a:srgbClr val="FFFFFF"/>
           </a:solidFill>
           <a:ln w="12700">
             <a:solidFill>
-              <a:srgbClr val="2E2E2E"/>
+              <a:srgbClr val="DDE0E6"/>
             </a:solidFill>
             <a:prstDash val="solid"/>
           </a:ln>
@@ -4236,11 +4236,11 @@
             <a:r>
               <a:rPr lang="en-US" sz="2800" b="1" dirty="0">
                 <a:solidFill>
-                  <a:srgbClr val="D62828"/>
-                </a:solidFill>
-                <a:latin typeface="Cambria" pitchFamily="34" charset="0"/>
-                <a:ea typeface="Cambria" pitchFamily="34" charset="-122"/>
-                <a:cs typeface="Cambria" pitchFamily="34" charset="-120"/>
+                  <a:srgbClr val="C8161D"/>
+                </a:solidFill>
+                <a:latin typeface="BIZ UDPGothic" pitchFamily="34" charset="0"/>
+                <a:ea typeface="BIZ UDPGothic" pitchFamily="34" charset="-122"/>
+                <a:cs typeface="BIZ UDPGothic" pitchFamily="34" charset="-120"/>
               </a:rPr>
               <a:t>1〜2兆円</a:t>
             </a:r>
@@ -4275,11 +4275,11 @@
             <a:r>
               <a:rPr lang="en-US" sz="1200" dirty="0">
                 <a:solidFill>
-                  <a:srgbClr val="CCCCCC"/>
-                </a:solidFill>
-                <a:latin typeface="Arial" pitchFamily="34" charset="0"/>
-                <a:ea typeface="Arial" pitchFamily="34" charset="-122"/>
-                <a:cs typeface="Arial" pitchFamily="34" charset="-120"/>
+                  <a:srgbClr val="2B2F36"/>
+                </a:solidFill>
+                <a:latin typeface="Arial" pitchFamily="34" charset="0"/>
+                <a:ea typeface="BIZ UDPGothic" pitchFamily="34" charset="-122"/>
+                <a:cs typeface="BIZ UDPGothic" pitchFamily="34" charset="-120"/>
               </a:rPr>
               <a:t>年間の私学助成金規模</a:t>
             </a:r>
@@ -4304,11 +4304,11 @@
             </a:avLst>
           </a:prstGeom>
           <a:solidFill>
-            <a:srgbClr val="1A0808"/>
+            <a:srgbClr val="FCEBEB"/>
           </a:solidFill>
           <a:ln w="12700">
             <a:solidFill>
-              <a:srgbClr val="2E2E2E"/>
+              <a:srgbClr val="DDE0E6"/>
             </a:solidFill>
             <a:prstDash val="solid"/>
           </a:ln>
@@ -4341,11 +4341,11 @@
             <a:r>
               <a:rPr lang="en-US" sz="1100" dirty="0">
                 <a:solidFill>
-                  <a:srgbClr val="CCCCCC"/>
-                </a:solidFill>
-                <a:latin typeface="Arial" pitchFamily="34" charset="0"/>
-                <a:ea typeface="Arial" pitchFamily="34" charset="-122"/>
-                <a:cs typeface="Arial" pitchFamily="34" charset="-120"/>
+                  <a:srgbClr val="2B2F36"/>
+                </a:solidFill>
+                <a:latin typeface="Arial" pitchFamily="34" charset="0"/>
+                <a:ea typeface="BIZ UDPGothic" pitchFamily="34" charset="-122"/>
+                <a:cs typeface="BIZ UDPGothic" pitchFamily="34" charset="-120"/>
               </a:rPr>
               <a:t>私学助成金が競争力のない大学を延命させ、「人気取り」が大学経営の主軸になっている</a:t>
             </a:r>
@@ -4367,7 +4367,7 @@
     <p:bg>
       <p:bgPr>
         <a:solidFill>
-          <a:srgbClr val="0A0A0A"/>
+          <a:srgbClr val="F5F6F8"/>
         </a:solidFill>
       </p:bgPr>
     </p:bg>
@@ -4412,11 +4412,11 @@
             <a:r>
               <a:rPr lang="en-US" sz="900" b="1" spc="400" kern="0" dirty="0">
                 <a:solidFill>
-                  <a:srgbClr val="D62828"/>
-                </a:solidFill>
-                <a:latin typeface="Arial" pitchFamily="34" charset="0"/>
-                <a:ea typeface="Arial" pitchFamily="34" charset="-122"/>
-                <a:cs typeface="Arial" pitchFamily="34" charset="-120"/>
+                  <a:srgbClr val="C8161D"/>
+                </a:solidFill>
+                <a:latin typeface="Arial" pitchFamily="34" charset="0"/>
+                <a:ea typeface="BIZ UDPGothic" pitchFamily="34" charset="-122"/>
+                <a:cs typeface="BIZ UDPGothic" pitchFamily="34" charset="-120"/>
               </a:rPr>
               <a:t>UNIVERSITY REFORM</a:t>
             </a:r>
@@ -4451,11 +4451,11 @@
             <a:r>
               <a:rPr lang="en-US" sz="3200" b="1" dirty="0">
                 <a:solidFill>
-                  <a:srgbClr val="F5F5F0"/>
-                </a:solidFill>
-                <a:latin typeface="Cambria" pitchFamily="34" charset="0"/>
-                <a:ea typeface="Cambria" pitchFamily="34" charset="-122"/>
-                <a:cs typeface="Cambria" pitchFamily="34" charset="-120"/>
+                  <a:srgbClr val="16181D"/>
+                </a:solidFill>
+                <a:latin typeface="BIZ UDPGothic" pitchFamily="34" charset="0"/>
+                <a:ea typeface="BIZ UDPGothic" pitchFamily="34" charset="-122"/>
+                <a:cs typeface="BIZ UDPGothic" pitchFamily="34" charset="-120"/>
               </a:rPr>
               <a:t>大学削減：5年移行計画</a:t>
             </a:r>
@@ -4478,11 +4478,11 @@
             <a:avLst/>
           </a:prstGeom>
           <a:solidFill>
-            <a:srgbClr val="2E2E2E"/>
+            <a:srgbClr val="DDE0E6"/>
           </a:solidFill>
           <a:ln w="12700">
             <a:solidFill>
-              <a:srgbClr val="2E2E2E"/>
+              <a:srgbClr val="DDE0E6"/>
             </a:solidFill>
             <a:prstDash val="solid"/>
           </a:ln>
@@ -4515,11 +4515,11 @@
             <a:r>
               <a:rPr lang="en-US" sz="1100" dirty="0">
                 <a:solidFill>
-                  <a:srgbClr val="CCCCCC"/>
-                </a:solidFill>
-                <a:latin typeface="Arial" pitchFamily="34" charset="0"/>
-                <a:ea typeface="Arial" pitchFamily="34" charset="-122"/>
-                <a:cs typeface="Arial" pitchFamily="34" charset="-120"/>
+                  <a:srgbClr val="2B2F36"/>
+                </a:solidFill>
+                <a:latin typeface="Arial" pitchFamily="34" charset="0"/>
+                <a:ea typeface="BIZ UDPGothic" pitchFamily="34" charset="-122"/>
+                <a:cs typeface="BIZ UDPGothic" pitchFamily="34" charset="-120"/>
               </a:rPr>
               <a:t>偏差値60を分岐点に。助成金削減と強制転換の2本立てで確実に進める。</a:t>
             </a:r>
@@ -4544,11 +4544,11 @@
             </a:avLst>
           </a:prstGeom>
           <a:solidFill>
-            <a:srgbClr val="1A1A1A"/>
+            <a:srgbClr val="FFFFFF"/>
           </a:solidFill>
           <a:ln w="12700">
             <a:solidFill>
-              <a:srgbClr val="2E2E2E"/>
+              <a:srgbClr val="DDE0E6"/>
             </a:solidFill>
             <a:prstDash val="solid"/>
           </a:ln>
@@ -4571,11 +4571,11 @@
             </a:avLst>
           </a:prstGeom>
           <a:solidFill>
-            <a:srgbClr val="D62828"/>
+            <a:srgbClr val="C8161D"/>
           </a:solidFill>
           <a:ln w="12700">
             <a:solidFill>
-              <a:srgbClr val="D62828"/>
+              <a:srgbClr val="C8161D"/>
             </a:solidFill>
             <a:prstDash val="solid"/>
           </a:ln>
@@ -4608,11 +4608,11 @@
             <a:r>
               <a:rPr lang="en-US" sz="1100" b="1" dirty="0">
                 <a:solidFill>
-                  <a:srgbClr val="F5F5F0"/>
-                </a:solidFill>
-                <a:latin typeface="Arial" pitchFamily="34" charset="0"/>
-                <a:ea typeface="Arial" pitchFamily="34" charset="-122"/>
-                <a:cs typeface="Arial" pitchFamily="34" charset="-120"/>
+                  <a:srgbClr val="FFFFFF"/>
+                </a:solidFill>
+                <a:latin typeface="Arial" pitchFamily="34" charset="0"/>
+                <a:ea typeface="BIZ UDPGothic" pitchFamily="34" charset="-122"/>
+                <a:cs typeface="BIZ UDPGothic" pitchFamily="34" charset="-120"/>
               </a:rPr>
               <a:t>移行開始</a:t>
             </a:r>
@@ -4647,11 +4647,11 @@
             <a:r>
               <a:rPr lang="en-US" sz="1400" b="1" dirty="0">
                 <a:solidFill>
-                  <a:srgbClr val="F5F5F0"/>
-                </a:solidFill>
-                <a:latin typeface="Cambria" pitchFamily="34" charset="0"/>
-                <a:ea typeface="Cambria" pitchFamily="34" charset="-122"/>
-                <a:cs typeface="Cambria" pitchFamily="34" charset="-120"/>
+                  <a:srgbClr val="16181D"/>
+                </a:solidFill>
+                <a:latin typeface="BIZ UDPGothic" pitchFamily="34" charset="0"/>
+                <a:ea typeface="BIZ UDPGothic" pitchFamily="34" charset="-122"/>
+                <a:cs typeface="BIZ UDPGothic" pitchFamily="34" charset="-120"/>
               </a:rPr>
               <a:t>転換対象の指定</a:t>
             </a:r>
@@ -4686,11 +4686,11 @@
             <a:r>
               <a:rPr lang="en-US" sz="1000" dirty="0">
                 <a:solidFill>
-                  <a:srgbClr val="CCCCCC"/>
-                </a:solidFill>
-                <a:latin typeface="Arial" pitchFamily="34" charset="0"/>
-                <a:ea typeface="Arial" pitchFamily="34" charset="-122"/>
-                <a:cs typeface="Arial" pitchFamily="34" charset="-120"/>
+                  <a:srgbClr val="2B2F36"/>
+                </a:solidFill>
+                <a:latin typeface="Arial" pitchFamily="34" charset="0"/>
+                <a:ea typeface="BIZ UDPGothic" pitchFamily="34" charset="-122"/>
+                <a:cs typeface="BIZ UDPGothic" pitchFamily="34" charset="-120"/>
               </a:rPr>
               <a:t>偏差値60未満の大学・学部を転換対象に指定。制度の全内容を公表し、各大学が対応を検討できる環境を整える。</a:t>
             </a:r>
@@ -4715,11 +4715,11 @@
             </a:avLst>
           </a:prstGeom>
           <a:solidFill>
-            <a:srgbClr val="1A1A1A"/>
+            <a:srgbClr val="FFFFFF"/>
           </a:solidFill>
           <a:ln w="12700">
             <a:solidFill>
-              <a:srgbClr val="2E2E2E"/>
+              <a:srgbClr val="DDE0E6"/>
             </a:solidFill>
             <a:prstDash val="solid"/>
           </a:ln>
@@ -4742,11 +4742,11 @@
             </a:avLst>
           </a:prstGeom>
           <a:solidFill>
-            <a:srgbClr val="D62828"/>
+            <a:srgbClr val="C8161D"/>
           </a:solidFill>
           <a:ln w="12700">
             <a:solidFill>
-              <a:srgbClr val="D62828"/>
+              <a:srgbClr val="C8161D"/>
             </a:solidFill>
             <a:prstDash val="solid"/>
           </a:ln>
@@ -4779,11 +4779,11 @@
             <a:r>
               <a:rPr lang="en-US" sz="1100" b="1" dirty="0">
                 <a:solidFill>
-                  <a:srgbClr val="F5F5F0"/>
-                </a:solidFill>
-                <a:latin typeface="Arial" pitchFamily="34" charset="0"/>
-                <a:ea typeface="Arial" pitchFamily="34" charset="-122"/>
-                <a:cs typeface="Arial" pitchFamily="34" charset="-120"/>
+                  <a:srgbClr val="FFFFFF"/>
+                </a:solidFill>
+                <a:latin typeface="Arial" pitchFamily="34" charset="0"/>
+                <a:ea typeface="BIZ UDPGothic" pitchFamily="34" charset="-122"/>
+                <a:cs typeface="BIZ UDPGothic" pitchFamily="34" charset="-120"/>
               </a:rPr>
               <a:t>1〜5年目</a:t>
             </a:r>
@@ -4818,11 +4818,11 @@
             <a:r>
               <a:rPr lang="en-US" sz="1400" b="1" dirty="0">
                 <a:solidFill>
-                  <a:srgbClr val="F5F5F0"/>
-                </a:solidFill>
-                <a:latin typeface="Cambria" pitchFamily="34" charset="0"/>
-                <a:ea typeface="Cambria" pitchFamily="34" charset="-122"/>
-                <a:cs typeface="Cambria" pitchFamily="34" charset="-120"/>
+                  <a:srgbClr val="16181D"/>
+                </a:solidFill>
+                <a:latin typeface="BIZ UDPGothic" pitchFamily="34" charset="0"/>
+                <a:ea typeface="BIZ UDPGothic" pitchFamily="34" charset="-122"/>
+                <a:cs typeface="BIZ UDPGothic" pitchFamily="34" charset="-120"/>
               </a:rPr>
               <a:t>助成金を年20%ずつ削減</a:t>
             </a:r>
@@ -4857,11 +4857,11 @@
             <a:r>
               <a:rPr lang="en-US" sz="1000" dirty="0">
                 <a:solidFill>
-                  <a:srgbClr val="CCCCCC"/>
-                </a:solidFill>
-                <a:latin typeface="Arial" pitchFamily="34" charset="0"/>
-                <a:ea typeface="Arial" pitchFamily="34" charset="-122"/>
-                <a:cs typeface="Arial" pitchFamily="34" charset="-120"/>
+                  <a:srgbClr val="2B2F36"/>
+                </a:solidFill>
+                <a:latin typeface="Arial" pitchFamily="34" charset="0"/>
+                <a:ea typeface="BIZ UDPGothic" pitchFamily="34" charset="-122"/>
+                <a:cs typeface="BIZ UDPGothic" pitchFamily="34" charset="-120"/>
               </a:rPr>
               <a:t>毎年20%ずつカット。5年目にゼロ。段階的な圧力をかけることで急激な混乱を避けながら確実に絞る。</a:t>
             </a:r>
@@ -4886,11 +4886,11 @@
             </a:avLst>
           </a:prstGeom>
           <a:solidFill>
-            <a:srgbClr val="1A1A1A"/>
+            <a:srgbClr val="FFFFFF"/>
           </a:solidFill>
           <a:ln w="12700">
             <a:solidFill>
-              <a:srgbClr val="2E2E2E"/>
+              <a:srgbClr val="DDE0E6"/>
             </a:solidFill>
             <a:prstDash val="solid"/>
           </a:ln>
@@ -4913,11 +4913,11 @@
             </a:avLst>
           </a:prstGeom>
           <a:solidFill>
-            <a:srgbClr val="D62828"/>
+            <a:srgbClr val="C8161D"/>
           </a:solidFill>
           <a:ln w="12700">
             <a:solidFill>
-              <a:srgbClr val="D62828"/>
+              <a:srgbClr val="C8161D"/>
             </a:solidFill>
             <a:prstDash val="solid"/>
           </a:ln>
@@ -4950,11 +4950,11 @@
             <a:r>
               <a:rPr lang="en-US" sz="1100" b="1" dirty="0">
                 <a:solidFill>
-                  <a:srgbClr val="F5F5F0"/>
-                </a:solidFill>
-                <a:latin typeface="Arial" pitchFamily="34" charset="0"/>
-                <a:ea typeface="Arial" pitchFamily="34" charset="-122"/>
-                <a:cs typeface="Arial" pitchFamily="34" charset="-120"/>
+                  <a:srgbClr val="FFFFFF"/>
+                </a:solidFill>
+                <a:latin typeface="Arial" pitchFamily="34" charset="0"/>
+                <a:ea typeface="BIZ UDPGothic" pitchFamily="34" charset="-122"/>
+                <a:cs typeface="BIZ UDPGothic" pitchFamily="34" charset="-120"/>
               </a:rPr>
               <a:t>4・5年目</a:t>
             </a:r>
@@ -4989,11 +4989,11 @@
             <a:r>
               <a:rPr lang="en-US" sz="1400" b="1" dirty="0">
                 <a:solidFill>
-                  <a:srgbClr val="F5F5F0"/>
-                </a:solidFill>
-                <a:latin typeface="Cambria" pitchFamily="34" charset="0"/>
-                <a:ea typeface="Cambria" pitchFamily="34" charset="-122"/>
-                <a:cs typeface="Cambria" pitchFamily="34" charset="-120"/>
+                  <a:srgbClr val="16181D"/>
+                </a:solidFill>
+                <a:latin typeface="BIZ UDPGothic" pitchFamily="34" charset="0"/>
+                <a:ea typeface="BIZ UDPGothic" pitchFamily="34" charset="-122"/>
+                <a:cs typeface="BIZ UDPGothic" pitchFamily="34" charset="-120"/>
               </a:rPr>
               <a:t>強制転換トリガー</a:t>
             </a:r>
@@ -5028,11 +5028,11 @@
             <a:r>
               <a:rPr lang="en-US" sz="1000" dirty="0">
                 <a:solidFill>
-                  <a:srgbClr val="CCCCCC"/>
-                </a:solidFill>
-                <a:latin typeface="Arial" pitchFamily="34" charset="0"/>
-                <a:ea typeface="Arial" pitchFamily="34" charset="-122"/>
-                <a:cs typeface="Arial" pitchFamily="34" charset="-120"/>
+                  <a:srgbClr val="2B2F36"/>
+                </a:solidFill>
+                <a:latin typeface="Arial" pitchFamily="34" charset="0"/>
+                <a:ea typeface="BIZ UDPGothic" pitchFamily="34" charset="-122"/>
+                <a:cs typeface="BIZ UDPGothic" pitchFamily="34" charset="-120"/>
               </a:rPr>
               <a:t>移行期間最後の2年間に定員割れが発生した場合、専門学校への転換を強制。助成金ゼロでも定員を満たせた大学は存続を認める。</a:t>
             </a:r>
@@ -5057,11 +5057,11 @@
             </a:avLst>
           </a:prstGeom>
           <a:solidFill>
-            <a:srgbClr val="1A1A1A"/>
+            <a:srgbClr val="FFFFFF"/>
           </a:solidFill>
           <a:ln w="12700">
             <a:solidFill>
-              <a:srgbClr val="2E2E2E"/>
+              <a:srgbClr val="DDE0E6"/>
             </a:solidFill>
             <a:prstDash val="solid"/>
           </a:ln>
@@ -5094,11 +5094,11 @@
             <a:r>
               <a:rPr lang="en-US" sz="1000" dirty="0">
                 <a:solidFill>
-                  <a:srgbClr val="CCCCCC"/>
-                </a:solidFill>
-                <a:latin typeface="Arial" pitchFamily="34" charset="0"/>
-                <a:ea typeface="Arial" pitchFamily="34" charset="-122"/>
-                <a:cs typeface="Arial" pitchFamily="34" charset="-120"/>
+                  <a:srgbClr val="2B2F36"/>
+                </a:solidFill>
+                <a:latin typeface="Arial" pitchFamily="34" charset="0"/>
+                <a:ea typeface="BIZ UDPGothic" pitchFamily="34" charset="-122"/>
+                <a:cs typeface="BIZ UDPGothic" pitchFamily="34" charset="-120"/>
               </a:rPr>
               <a:t>助成金ゼロでも学生が来るなら、それは本物の需要。市場の審判を最終的な判定者にする。</a:t>
             </a:r>
@@ -5120,7 +5120,7 @@
     <p:bg>
       <p:bgPr>
         <a:solidFill>
-          <a:srgbClr val="0A0A0A"/>
+          <a:srgbClr val="F5F6F8"/>
         </a:solidFill>
       </p:bgPr>
     </p:bg>
@@ -5165,11 +5165,11 @@
             <a:r>
               <a:rPr lang="en-US" sz="900" b="1" spc="400" kern="0" dirty="0">
                 <a:solidFill>
-                  <a:srgbClr val="D62828"/>
-                </a:solidFill>
-                <a:latin typeface="Arial" pitchFamily="34" charset="0"/>
-                <a:ea typeface="Arial" pitchFamily="34" charset="-122"/>
-                <a:cs typeface="Arial" pitchFamily="34" charset="-120"/>
+                  <a:srgbClr val="C8161D"/>
+                </a:solidFill>
+                <a:latin typeface="Arial" pitchFamily="34" charset="0"/>
+                <a:ea typeface="BIZ UDPGothic" pitchFamily="34" charset="-122"/>
+                <a:cs typeface="BIZ UDPGothic" pitchFamily="34" charset="-120"/>
               </a:rPr>
               <a:t>UNIVERSITY REFORM — DETAIL</a:t>
             </a:r>
@@ -5202,17 +5202,17 @@
               <a:buNone/>
             </a:pPr>
             <a:r>
-              <a:rPr lang="en-US" sz="2600" b="1" dirty="0">
-                <a:solidFill>
-                  <a:srgbClr val="F5F5F0"/>
-                </a:solidFill>
-                <a:latin typeface="Cambria" pitchFamily="34" charset="0"/>
-                <a:ea typeface="Cambria" pitchFamily="34" charset="-122"/>
-                <a:cs typeface="Cambria" pitchFamily="34" charset="-120"/>
+              <a:rPr lang="en-US" sz="2000" b="1" dirty="0">
+                <a:solidFill>
+                  <a:srgbClr val="16181D"/>
+                </a:solidFill>
+                <a:latin typeface="BIZ UDPGothic" pitchFamily="34" charset="0"/>
+                <a:ea typeface="BIZ UDPGothic" pitchFamily="34" charset="-122"/>
+                <a:cs typeface="BIZ UDPGothic" pitchFamily="34" charset="-120"/>
               </a:rPr>
               <a:t>偏差値60以上は存続。ただし競争軸を「人気」から「研究力」へ</a:t>
             </a:r>
-            <a:endParaRPr lang="en-US" sz="2600" dirty="0"/>
+            <a:endParaRPr lang="en-US" sz="2000" dirty="0"/>
           </a:p>
         </p:txBody>
       </p:sp>
@@ -5231,11 +5231,11 @@
             <a:avLst/>
           </a:prstGeom>
           <a:solidFill>
-            <a:srgbClr val="2E2E2E"/>
+            <a:srgbClr val="DDE0E6"/>
           </a:solidFill>
           <a:ln w="12700">
             <a:solidFill>
-              <a:srgbClr val="2E2E2E"/>
+              <a:srgbClr val="DDE0E6"/>
             </a:solidFill>
             <a:prstDash val="solid"/>
           </a:ln>
@@ -5258,11 +5258,11 @@
             </a:avLst>
           </a:prstGeom>
           <a:solidFill>
-            <a:srgbClr val="1A0808"/>
+            <a:srgbClr val="FCEBEB"/>
           </a:solidFill>
           <a:ln w="12700">
             <a:solidFill>
-              <a:srgbClr val="2E2E2E"/>
+              <a:srgbClr val="DDE0E6"/>
             </a:solidFill>
             <a:prstDash val="solid"/>
           </a:ln>
@@ -5295,11 +5295,11 @@
             <a:r>
               <a:rPr lang="en-US" sz="1400" b="1" dirty="0">
                 <a:solidFill>
-                  <a:srgbClr val="D62828"/>
-                </a:solidFill>
-                <a:latin typeface="Cambria" pitchFamily="34" charset="0"/>
-                <a:ea typeface="Cambria" pitchFamily="34" charset="-122"/>
-                <a:cs typeface="Cambria" pitchFamily="34" charset="-120"/>
+                  <a:srgbClr val="C8161D"/>
+                </a:solidFill>
+                <a:latin typeface="BIZ UDPGothic" pitchFamily="34" charset="0"/>
+                <a:ea typeface="BIZ UDPGothic" pitchFamily="34" charset="-122"/>
+                <a:cs typeface="BIZ UDPGothic" pitchFamily="34" charset="-120"/>
               </a:rPr>
               <a:t>現行の競争軸</a:t>
             </a:r>
@@ -5338,11 +5338,11 @@
             <a:r>
               <a:rPr lang="en-US" sz="1200" dirty="0">
                 <a:solidFill>
-                  <a:srgbClr val="CCCCCC"/>
-                </a:solidFill>
-                <a:latin typeface="Arial" pitchFamily="34" charset="0"/>
-                <a:ea typeface="Arial" pitchFamily="34" charset="-122"/>
-                <a:cs typeface="Arial" pitchFamily="34" charset="-120"/>
+                  <a:srgbClr val="2B2F36"/>
+                </a:solidFill>
+                <a:latin typeface="Arial" pitchFamily="34" charset="0"/>
+                <a:ea typeface="BIZ UDPGothic" pitchFamily="34" charset="-122"/>
+                <a:cs typeface="BIZ UDPGothic" pitchFamily="34" charset="-120"/>
               </a:rPr>
               <a:t>志願者数・偏差値の高さ</a:t>
             </a:r>
@@ -5359,11 +5359,11 @@
             <a:r>
               <a:rPr lang="en-US" sz="1200" dirty="0">
                 <a:solidFill>
-                  <a:srgbClr val="CCCCCC"/>
-                </a:solidFill>
-                <a:latin typeface="Arial" pitchFamily="34" charset="0"/>
-                <a:ea typeface="Arial" pitchFamily="34" charset="-122"/>
-                <a:cs typeface="Arial" pitchFamily="34" charset="-120"/>
+                  <a:srgbClr val="2B2F36"/>
+                </a:solidFill>
+                <a:latin typeface="Arial" pitchFamily="34" charset="0"/>
+                <a:ea typeface="BIZ UDPGothic" pitchFamily="34" charset="-122"/>
+                <a:cs typeface="BIZ UDPGothic" pitchFamily="34" charset="-120"/>
               </a:rPr>
               <a:t>キャンパスの立地・設備の豪華さ</a:t>
             </a:r>
@@ -5380,11 +5380,11 @@
             <a:r>
               <a:rPr lang="en-US" sz="1200" dirty="0">
                 <a:solidFill>
-                  <a:srgbClr val="CCCCCC"/>
-                </a:solidFill>
-                <a:latin typeface="Arial" pitchFamily="34" charset="0"/>
-                <a:ea typeface="Arial" pitchFamily="34" charset="-122"/>
-                <a:cs typeface="Arial" pitchFamily="34" charset="-120"/>
+                  <a:srgbClr val="2B2F36"/>
+                </a:solidFill>
+                <a:latin typeface="Arial" pitchFamily="34" charset="0"/>
+                <a:ea typeface="BIZ UDPGothic" pitchFamily="34" charset="-122"/>
+                <a:cs typeface="BIZ UDPGothic" pitchFamily="34" charset="-120"/>
               </a:rPr>
               <a:t>就職実績・有名企業への輩出数</a:t>
             </a:r>
@@ -5401,11 +5401,11 @@
             <a:r>
               <a:rPr lang="en-US" sz="1200" dirty="0">
                 <a:solidFill>
-                  <a:srgbClr val="CCCCCC"/>
-                </a:solidFill>
-                <a:latin typeface="Arial" pitchFamily="34" charset="0"/>
-                <a:ea typeface="Arial" pitchFamily="34" charset="-122"/>
-                <a:cs typeface="Arial" pitchFamily="34" charset="-120"/>
+                  <a:srgbClr val="2B2F36"/>
+                </a:solidFill>
+                <a:latin typeface="Arial" pitchFamily="34" charset="0"/>
+                <a:ea typeface="BIZ UDPGothic" pitchFamily="34" charset="-122"/>
+                <a:cs typeface="BIZ UDPGothic" pitchFamily="34" charset="-120"/>
               </a:rPr>
               <a:t>CM・広報への投資</a:t>
             </a:r>
@@ -5430,11 +5430,11 @@
             </a:avLst>
           </a:prstGeom>
           <a:solidFill>
-            <a:srgbClr val="081808"/>
+            <a:srgbClr val="E9EFF8"/>
           </a:solidFill>
           <a:ln w="12700">
             <a:solidFill>
-              <a:srgbClr val="2E2E2E"/>
+              <a:srgbClr val="DDE0E6"/>
             </a:solidFill>
             <a:prstDash val="solid"/>
           </a:ln>
@@ -5467,11 +5467,11 @@
             <a:r>
               <a:rPr lang="en-US" sz="1400" b="1" dirty="0">
                 <a:solidFill>
-                  <a:srgbClr val="4CAF50"/>
-                </a:solidFill>
-                <a:latin typeface="Cambria" pitchFamily="34" charset="0"/>
-                <a:ea typeface="Cambria" pitchFamily="34" charset="-122"/>
-                <a:cs typeface="Cambria" pitchFamily="34" charset="-120"/>
+                  <a:srgbClr val="1D4F91"/>
+                </a:solidFill>
+                <a:latin typeface="BIZ UDPGothic" pitchFamily="34" charset="0"/>
+                <a:ea typeface="BIZ UDPGothic" pitchFamily="34" charset="-122"/>
+                <a:cs typeface="BIZ UDPGothic" pitchFamily="34" charset="-120"/>
               </a:rPr>
               <a:t>改革後の競争軸</a:t>
             </a:r>
@@ -5510,11 +5510,11 @@
             <a:r>
               <a:rPr lang="en-US" sz="1200" dirty="0">
                 <a:solidFill>
-                  <a:srgbClr val="CCCCCC"/>
-                </a:solidFill>
-                <a:latin typeface="Arial" pitchFamily="34" charset="0"/>
-                <a:ea typeface="Arial" pitchFamily="34" charset="-122"/>
-                <a:cs typeface="Arial" pitchFamily="34" charset="-120"/>
+                  <a:srgbClr val="2B2F36"/>
+                </a:solidFill>
+                <a:latin typeface="Arial" pitchFamily="34" charset="0"/>
+                <a:ea typeface="BIZ UDPGothic" pitchFamily="34" charset="-122"/>
+                <a:cs typeface="BIZ UDPGothic" pitchFamily="34" charset="-120"/>
               </a:rPr>
               <a:t>論文数・被引用数</a:t>
             </a:r>
@@ -5531,11 +5531,11 @@
             <a:r>
               <a:rPr lang="en-US" sz="1200" dirty="0">
                 <a:solidFill>
-                  <a:srgbClr val="CCCCCC"/>
-                </a:solidFill>
-                <a:latin typeface="Arial" pitchFamily="34" charset="0"/>
-                <a:ea typeface="Arial" pitchFamily="34" charset="-122"/>
-                <a:cs typeface="Arial" pitchFamily="34" charset="-120"/>
+                  <a:srgbClr val="2B2F36"/>
+                </a:solidFill>
+                <a:latin typeface="Arial" pitchFamily="34" charset="0"/>
+                <a:ea typeface="BIZ UDPGothic" pitchFamily="34" charset="-122"/>
+                <a:cs typeface="BIZ UDPGothic" pitchFamily="34" charset="-120"/>
               </a:rPr>
               <a:t>特許取得・産学連携実績</a:t>
             </a:r>
@@ -5552,11 +5552,11 @@
             <a:r>
               <a:rPr lang="en-US" sz="1200" dirty="0">
                 <a:solidFill>
-                  <a:srgbClr val="CCCCCC"/>
-                </a:solidFill>
-                <a:latin typeface="Arial" pitchFamily="34" charset="0"/>
-                <a:ea typeface="Arial" pitchFamily="34" charset="-122"/>
-                <a:cs typeface="Arial" pitchFamily="34" charset="-120"/>
+                  <a:srgbClr val="2B2F36"/>
+                </a:solidFill>
+                <a:latin typeface="Arial" pitchFamily="34" charset="0"/>
+                <a:ea typeface="BIZ UDPGothic" pitchFamily="34" charset="-122"/>
+                <a:cs typeface="BIZ UDPGothic" pitchFamily="34" charset="-120"/>
               </a:rPr>
               <a:t>国際共同研究の件数</a:t>
             </a:r>
@@ -5573,11 +5573,11 @@
             <a:r>
               <a:rPr lang="en-US" sz="1200" dirty="0">
                 <a:solidFill>
-                  <a:srgbClr val="CCCCCC"/>
-                </a:solidFill>
-                <a:latin typeface="Arial" pitchFamily="34" charset="0"/>
-                <a:ea typeface="Arial" pitchFamily="34" charset="-122"/>
-                <a:cs typeface="Arial" pitchFamily="34" charset="-120"/>
+                  <a:srgbClr val="2B2F36"/>
+                </a:solidFill>
+                <a:latin typeface="Arial" pitchFamily="34" charset="0"/>
+                <a:ea typeface="BIZ UDPGothic" pitchFamily="34" charset="-122"/>
+                <a:cs typeface="BIZ UDPGothic" pitchFamily="34" charset="-120"/>
               </a:rPr>
               <a:t>国からの研究費配分額（成果連動）</a:t>
             </a:r>
@@ -5612,11 +5612,11 @@
             <a:r>
               <a:rPr lang="en-US" sz="3600" dirty="0">
                 <a:solidFill>
-                  <a:srgbClr val="D62828"/>
-                </a:solidFill>
-                <a:latin typeface="Arial" pitchFamily="34" charset="0"/>
-                <a:ea typeface="Arial" pitchFamily="34" charset="-122"/>
-                <a:cs typeface="Arial" pitchFamily="34" charset="-120"/>
+                  <a:srgbClr val="C8161D"/>
+                </a:solidFill>
+                <a:latin typeface="Arial" pitchFamily="34" charset="0"/>
+                <a:ea typeface="BIZ UDPGothic" pitchFamily="34" charset="-122"/>
+                <a:cs typeface="BIZ UDPGothic" pitchFamily="34" charset="-120"/>
               </a:rPr>
               <a:t>→</a:t>
             </a:r>
@@ -5641,11 +5641,11 @@
             </a:avLst>
           </a:prstGeom>
           <a:solidFill>
-            <a:srgbClr val="1A1A1A"/>
+            <a:srgbClr val="FFFFFF"/>
           </a:solidFill>
           <a:ln w="12700">
             <a:solidFill>
-              <a:srgbClr val="2E2E2E"/>
+              <a:srgbClr val="DDE0E6"/>
             </a:solidFill>
             <a:prstDash val="solid"/>
           </a:ln>
@@ -5678,11 +5678,11 @@
             <a:r>
               <a:rPr lang="en-US" sz="1000" dirty="0">
                 <a:solidFill>
-                  <a:srgbClr val="CCCCCC"/>
-                </a:solidFill>
-                <a:latin typeface="Arial" pitchFamily="34" charset="0"/>
-                <a:ea typeface="Arial" pitchFamily="34" charset="-122"/>
-                <a:cs typeface="Arial" pitchFamily="34" charset="-120"/>
+                  <a:srgbClr val="2B2F36"/>
+                </a:solidFill>
+                <a:latin typeface="Arial" pitchFamily="34" charset="0"/>
+                <a:ea typeface="BIZ UDPGothic" pitchFamily="34" charset="-122"/>
+                <a:cs typeface="BIZ UDPGothic" pitchFamily="34" charset="-120"/>
               </a:rPr>
               <a:t>助成金ゼロ化＋研究費の傾斜配分を組み合わせることで、大学は「人気取り」では生き残れなくなる。</a:t>
             </a:r>
@@ -5695,11 +5695,11 @@
             <a:r>
               <a:rPr lang="en-US" sz="1000" dirty="0">
                 <a:solidFill>
-                  <a:srgbClr val="CCCCCC"/>
-                </a:solidFill>
-                <a:latin typeface="Arial" pitchFamily="34" charset="0"/>
-                <a:ea typeface="Arial" pitchFamily="34" charset="-122"/>
-                <a:cs typeface="Arial" pitchFamily="34" charset="-120"/>
+                  <a:srgbClr val="2B2F36"/>
+                </a:solidFill>
+                <a:latin typeface="Arial" pitchFamily="34" charset="0"/>
+                <a:ea typeface="BIZ UDPGothic" pitchFamily="34" charset="-122"/>
+                <a:cs typeface="BIZ UDPGothic" pitchFamily="34" charset="-120"/>
               </a:rPr>
               <a:t>本物の研究力を持つ機関だけが国費の恩恵を受ける。</a:t>
             </a:r>
@@ -5721,7 +5721,7 @@
     <p:bg>
       <p:bgPr>
         <a:solidFill>
-          <a:srgbClr val="0A0A0A"/>
+          <a:srgbClr val="F5F6F8"/>
         </a:solidFill>
       </p:bgPr>
     </p:bg>
@@ -5766,11 +5766,11 @@
             <a:r>
               <a:rPr lang="en-US" sz="900" b="1" spc="400" kern="0" dirty="0">
                 <a:solidFill>
-                  <a:srgbClr val="D62828"/>
-                </a:solidFill>
-                <a:latin typeface="Arial" pitchFamily="34" charset="0"/>
-                <a:ea typeface="Arial" pitchFamily="34" charset="-122"/>
-                <a:cs typeface="Arial" pitchFamily="34" charset="-120"/>
+                  <a:srgbClr val="C8161D"/>
+                </a:solidFill>
+                <a:latin typeface="Arial" pitchFamily="34" charset="0"/>
+                <a:ea typeface="BIZ UDPGothic" pitchFamily="34" charset="-122"/>
+                <a:cs typeface="BIZ UDPGothic" pitchFamily="34" charset="-120"/>
               </a:rPr>
               <a:t>UNIVERSITY — AFTER</a:t>
             </a:r>
@@ -5805,11 +5805,11 @@
             <a:r>
               <a:rPr lang="en-US" sz="3600" b="1" dirty="0">
                 <a:solidFill>
-                  <a:srgbClr val="F5F5F0"/>
-                </a:solidFill>
-                <a:latin typeface="Cambria" pitchFamily="34" charset="0"/>
-                <a:ea typeface="Cambria" pitchFamily="34" charset="-122"/>
-                <a:cs typeface="Cambria" pitchFamily="34" charset="-120"/>
+                  <a:srgbClr val="16181D"/>
+                </a:solidFill>
+                <a:latin typeface="BIZ UDPGothic" pitchFamily="34" charset="0"/>
+                <a:ea typeface="BIZ UDPGothic" pitchFamily="34" charset="-122"/>
+                <a:cs typeface="BIZ UDPGothic" pitchFamily="34" charset="-120"/>
               </a:rPr>
               <a:t>改革後の大学の姿</a:t>
             </a:r>
@@ -5832,11 +5832,11 @@
             <a:avLst/>
           </a:prstGeom>
           <a:solidFill>
-            <a:srgbClr val="2E2E2E"/>
+            <a:srgbClr val="DDE0E6"/>
           </a:solidFill>
           <a:ln w="12700">
             <a:solidFill>
-              <a:srgbClr val="2E2E2E"/>
+              <a:srgbClr val="DDE0E6"/>
             </a:solidFill>
             <a:prstDash val="solid"/>
           </a:ln>
@@ -5859,11 +5859,11 @@
             </a:avLst>
           </a:prstGeom>
           <a:solidFill>
-            <a:srgbClr val="081808"/>
+            <a:srgbClr val="E9EFF8"/>
           </a:solidFill>
           <a:ln w="12700">
             <a:solidFill>
-              <a:srgbClr val="2E2E2E"/>
+              <a:srgbClr val="DDE0E6"/>
             </a:solidFill>
             <a:prstDash val="solid"/>
           </a:ln>
@@ -5886,11 +5886,11 @@
             </a:avLst>
           </a:prstGeom>
           <a:solidFill>
-            <a:srgbClr val="D62828"/>
+            <a:srgbClr val="C8161D"/>
           </a:solidFill>
           <a:ln w="12700">
             <a:solidFill>
-              <a:srgbClr val="D62828"/>
+              <a:srgbClr val="C8161D"/>
             </a:solidFill>
             <a:prstDash val="solid"/>
           </a:ln>
@@ -5923,11 +5923,11 @@
             <a:r>
               <a:rPr lang="en-US" sz="1200" b="1" dirty="0">
                 <a:solidFill>
-                  <a:srgbClr val="F5F5F0"/>
-                </a:solidFill>
-                <a:latin typeface="Arial" pitchFamily="34" charset="0"/>
-                <a:ea typeface="Arial" pitchFamily="34" charset="-122"/>
-                <a:cs typeface="Arial" pitchFamily="34" charset="-120"/>
+                  <a:srgbClr val="FFFFFF"/>
+                </a:solidFill>
+                <a:latin typeface="Arial" pitchFamily="34" charset="0"/>
+                <a:ea typeface="BIZ UDPGothic" pitchFamily="34" charset="-122"/>
+                <a:cs typeface="BIZ UDPGothic" pitchFamily="34" charset="-120"/>
               </a:rPr>
               <a:t>トップ研究大学</a:t>
             </a:r>
@@ -5962,11 +5962,11 @@
             <a:r>
               <a:rPr lang="en-US" sz="1300" b="1" dirty="0">
                 <a:solidFill>
-                  <a:srgbClr val="4CAF50"/>
-                </a:solidFill>
-                <a:latin typeface="Cambria" pitchFamily="34" charset="0"/>
-                <a:ea typeface="Cambria" pitchFamily="34" charset="-122"/>
-                <a:cs typeface="Cambria" pitchFamily="34" charset="-120"/>
+                  <a:srgbClr val="1D4F91"/>
+                </a:solidFill>
+                <a:latin typeface="BIZ UDPGothic" pitchFamily="34" charset="0"/>
+                <a:ea typeface="BIZ UDPGothic" pitchFamily="34" charset="-122"/>
+                <a:cs typeface="BIZ UDPGothic" pitchFamily="34" charset="-120"/>
               </a:rPr>
               <a:t>大幅増強</a:t>
             </a:r>
@@ -6001,11 +6001,11 @@
             <a:r>
               <a:rPr lang="en-US" sz="1100" dirty="0">
                 <a:solidFill>
-                  <a:srgbClr val="CCCCCC"/>
-                </a:solidFill>
-                <a:latin typeface="Arial" pitchFamily="34" charset="0"/>
-                <a:ea typeface="Arial" pitchFamily="34" charset="-122"/>
-                <a:cs typeface="Arial" pitchFamily="34" charset="-120"/>
+                  <a:srgbClr val="2B2F36"/>
+                </a:solidFill>
+                <a:latin typeface="Arial" pitchFamily="34" charset="0"/>
+                <a:ea typeface="BIZ UDPGothic" pitchFamily="34" charset="-122"/>
+                <a:cs typeface="BIZ UDPGothic" pitchFamily="34" charset="-120"/>
               </a:rPr>
               <a:t>世界と戦う研究拠点。ルート③選抜者と社会人リカレントの受け皿。国費（研究力連動）で強化。</a:t>
             </a:r>
@@ -6030,11 +6030,11 @@
             </a:avLst>
           </a:prstGeom>
           <a:solidFill>
-            <a:srgbClr val="08081A"/>
+            <a:srgbClr val="E9EFF8"/>
           </a:solidFill>
           <a:ln w="12700">
             <a:solidFill>
-              <a:srgbClr val="2E2E2E"/>
+              <a:srgbClr val="DDE0E6"/>
             </a:solidFill>
             <a:prstDash val="solid"/>
           </a:ln>
@@ -6057,11 +6057,11 @@
             </a:avLst>
           </a:prstGeom>
           <a:solidFill>
-            <a:srgbClr val="D62828"/>
+            <a:srgbClr val="C8161D"/>
           </a:solidFill>
           <a:ln w="12700">
             <a:solidFill>
-              <a:srgbClr val="D62828"/>
+              <a:srgbClr val="C8161D"/>
             </a:solidFill>
             <a:prstDash val="solid"/>
           </a:ln>
@@ -6094,11 +6094,11 @@
             <a:r>
               <a:rPr lang="en-US" sz="1200" b="1" dirty="0">
                 <a:solidFill>
-                  <a:srgbClr val="F5F5F0"/>
-                </a:solidFill>
-                <a:latin typeface="Arial" pitchFamily="34" charset="0"/>
-                <a:ea typeface="Arial" pitchFamily="34" charset="-122"/>
-                <a:cs typeface="Arial" pitchFamily="34" charset="-120"/>
+                  <a:srgbClr val="FFFFFF"/>
+                </a:solidFill>
+                <a:latin typeface="Arial" pitchFamily="34" charset="0"/>
+                <a:ea typeface="BIZ UDPGothic" pitchFamily="34" charset="-122"/>
+                <a:cs typeface="BIZ UDPGothic" pitchFamily="34" charset="-120"/>
               </a:rPr>
               <a:t>専門大学・大学校</a:t>
             </a:r>
@@ -6133,11 +6133,11 @@
             <a:r>
               <a:rPr lang="en-US" sz="1300" b="1" dirty="0">
                 <a:solidFill>
-                  <a:srgbClr val="4090D0"/>
-                </a:solidFill>
-                <a:latin typeface="Cambria" pitchFamily="34" charset="0"/>
-                <a:ea typeface="Cambria" pitchFamily="34" charset="-122"/>
-                <a:cs typeface="Cambria" pitchFamily="34" charset="-120"/>
+                  <a:srgbClr val="1D4F91"/>
+                </a:solidFill>
+                <a:latin typeface="BIZ UDPGothic" pitchFamily="34" charset="0"/>
+                <a:ea typeface="BIZ UDPGothic" pitchFamily="34" charset="-122"/>
+                <a:cs typeface="BIZ UDPGothic" pitchFamily="34" charset="-120"/>
               </a:rPr>
               <a:t>維持</a:t>
             </a:r>
@@ -6172,11 +6172,11 @@
             <a:r>
               <a:rPr lang="en-US" sz="1100" dirty="0">
                 <a:solidFill>
-                  <a:srgbClr val="CCCCCC"/>
-                </a:solidFill>
-                <a:latin typeface="Arial" pitchFamily="34" charset="0"/>
-                <a:ea typeface="Arial" pitchFamily="34" charset="-122"/>
-                <a:cs typeface="Arial" pitchFamily="34" charset="-120"/>
+                  <a:srgbClr val="2B2F36"/>
+                </a:solidFill>
+                <a:latin typeface="Arial" pitchFamily="34" charset="0"/>
+                <a:ea typeface="BIZ UDPGothic" pitchFamily="34" charset="-122"/>
+                <a:cs typeface="BIZ UDPGothic" pitchFamily="34" charset="-120"/>
               </a:rPr>
               <a:t>国家資格・高度専門職の育成（ルート②）。医学部・防衛大学校・看護大学等。国費でルート②授業料を補助。</a:t>
             </a:r>
@@ -6201,11 +6201,11 @@
             </a:avLst>
           </a:prstGeom>
           <a:solidFill>
-            <a:srgbClr val="1A1408"/>
+            <a:srgbClr val="FFF4DB"/>
           </a:solidFill>
           <a:ln w="12700">
             <a:solidFill>
-              <a:srgbClr val="2E2E2E"/>
+              <a:srgbClr val="DDE0E6"/>
             </a:solidFill>
             <a:prstDash val="solid"/>
           </a:ln>
@@ -6228,11 +6228,11 @@
             </a:avLst>
           </a:prstGeom>
           <a:solidFill>
-            <a:srgbClr val="D62828"/>
+            <a:srgbClr val="C8161D"/>
           </a:solidFill>
           <a:ln w="12700">
             <a:solidFill>
-              <a:srgbClr val="D62828"/>
+              <a:srgbClr val="C8161D"/>
             </a:solidFill>
             <a:prstDash val="solid"/>
           </a:ln>
@@ -6265,11 +6265,11 @@
             <a:r>
               <a:rPr lang="en-US" sz="1200" b="1" dirty="0">
                 <a:solidFill>
-                  <a:srgbClr val="F5F5F0"/>
-                </a:solidFill>
-                <a:latin typeface="Arial" pitchFamily="34" charset="0"/>
-                <a:ea typeface="Arial" pitchFamily="34" charset="-122"/>
-                <a:cs typeface="Arial" pitchFamily="34" charset="-120"/>
+                  <a:srgbClr val="FFFFFF"/>
+                </a:solidFill>
+                <a:latin typeface="Arial" pitchFamily="34" charset="0"/>
+                <a:ea typeface="BIZ UDPGothic" pitchFamily="34" charset="-122"/>
+                <a:cs typeface="BIZ UDPGothic" pitchFamily="34" charset="-120"/>
               </a:rPr>
               <a:t>転換専門学校</a:t>
             </a:r>
@@ -6304,11 +6304,11 @@
             <a:r>
               <a:rPr lang="en-US" sz="1300" b="1" dirty="0">
                 <a:solidFill>
-                  <a:srgbClr val="E0A000"/>
-                </a:solidFill>
-                <a:latin typeface="Cambria" pitchFamily="34" charset="0"/>
-                <a:ea typeface="Cambria" pitchFamily="34" charset="-122"/>
-                <a:cs typeface="Cambria" pitchFamily="34" charset="-120"/>
+                  <a:srgbClr val="9A6200"/>
+                </a:solidFill>
+                <a:latin typeface="BIZ UDPGothic" pitchFamily="34" charset="0"/>
+                <a:ea typeface="BIZ UDPGothic" pitchFamily="34" charset="-122"/>
+                <a:cs typeface="BIZ UDPGothic" pitchFamily="34" charset="-120"/>
               </a:rPr>
               <a:t>偏差値60未満から転換</a:t>
             </a:r>
@@ -6343,11 +6343,11 @@
             <a:r>
               <a:rPr lang="en-US" sz="1100" dirty="0">
                 <a:solidFill>
-                  <a:srgbClr val="CCCCCC"/>
-                </a:solidFill>
-                <a:latin typeface="Arial" pitchFamily="34" charset="0"/>
-                <a:ea typeface="Arial" pitchFamily="34" charset="-122"/>
-                <a:cs typeface="Arial" pitchFamily="34" charset="-120"/>
+                  <a:srgbClr val="2B2F36"/>
+                </a:solidFill>
+                <a:latin typeface="Arial" pitchFamily="34" charset="0"/>
+                <a:ea typeface="BIZ UDPGothic" pitchFamily="34" charset="-122"/>
+                <a:cs typeface="BIZ UDPGothic" pitchFamily="34" charset="-120"/>
               </a:rPr>
               <a:t>ルート①（9割）の受け皿として機能。実務直結スキルを2年間で習得する場へ。自費中心。</a:t>
             </a:r>
@@ -6372,11 +6372,11 @@
             </a:avLst>
           </a:prstGeom>
           <a:solidFill>
-            <a:srgbClr val="2E2E2E"/>
+            <a:srgbClr val="DDE0E6"/>
           </a:solidFill>
           <a:ln w="12700">
             <a:solidFill>
-              <a:srgbClr val="2E2E2E"/>
+              <a:srgbClr val="DDE0E6"/>
             </a:solidFill>
             <a:prstDash val="solid"/>
           </a:ln>
@@ -6396,7 +6396,7 @@
     <p:bg>
       <p:bgPr>
         <a:solidFill>
-          <a:srgbClr val="0A0A0A"/>
+          <a:srgbClr val="F5F6F8"/>
         </a:solidFill>
       </p:bgPr>
     </p:bg>
@@ -6441,11 +6441,11 @@
             <a:r>
               <a:rPr lang="en-US" sz="900" b="1" spc="400" kern="0" dirty="0">
                 <a:solidFill>
-                  <a:srgbClr val="D62828"/>
-                </a:solidFill>
-                <a:latin typeface="Arial" pitchFamily="34" charset="0"/>
-                <a:ea typeface="Arial" pitchFamily="34" charset="-122"/>
-                <a:cs typeface="Arial" pitchFamily="34" charset="-120"/>
+                  <a:srgbClr val="C8161D"/>
+                </a:solidFill>
+                <a:latin typeface="Arial" pitchFamily="34" charset="0"/>
+                <a:ea typeface="BIZ UDPGothic" pitchFamily="34" charset="-122"/>
+                <a:cs typeface="BIZ UDPGothic" pitchFamily="34" charset="-120"/>
               </a:rPr>
               <a:t>SOCIAL INFRASTRUCTURE 01</a:t>
             </a:r>
@@ -6480,11 +6480,11 @@
             <a:r>
               <a:rPr lang="en-US" sz="3600" b="1" dirty="0">
                 <a:solidFill>
-                  <a:srgbClr val="F5F5F0"/>
-                </a:solidFill>
-                <a:latin typeface="Cambria" pitchFamily="34" charset="0"/>
-                <a:ea typeface="Cambria" pitchFamily="34" charset="-122"/>
-                <a:cs typeface="Cambria" pitchFamily="34" charset="-120"/>
+                  <a:srgbClr val="16181D"/>
+                </a:solidFill>
+                <a:latin typeface="BIZ UDPGothic" pitchFamily="34" charset="0"/>
+                <a:ea typeface="BIZ UDPGothic" pitchFamily="34" charset="-122"/>
+                <a:cs typeface="BIZ UDPGothic" pitchFamily="34" charset="-120"/>
               </a:rPr>
               <a:t>奨学金問題の根本解決</a:t>
             </a:r>
@@ -6507,11 +6507,11 @@
             <a:avLst/>
           </a:prstGeom>
           <a:solidFill>
-            <a:srgbClr val="2E2E2E"/>
+            <a:srgbClr val="DDE0E6"/>
           </a:solidFill>
           <a:ln w="12700">
             <a:solidFill>
-              <a:srgbClr val="2E2E2E"/>
+              <a:srgbClr val="DDE0E6"/>
             </a:solidFill>
             <a:prstDash val="solid"/>
           </a:ln>
@@ -6544,11 +6544,11 @@
             <a:r>
               <a:rPr lang="en-US" sz="1300" b="1" dirty="0">
                 <a:solidFill>
-                  <a:srgbClr val="D62828"/>
-                </a:solidFill>
-                <a:latin typeface="Cambria" pitchFamily="34" charset="0"/>
-                <a:ea typeface="Cambria" pitchFamily="34" charset="-122"/>
-                <a:cs typeface="Cambria" pitchFamily="34" charset="-120"/>
+                  <a:srgbClr val="C8161D"/>
+                </a:solidFill>
+                <a:latin typeface="BIZ UDPGothic" pitchFamily="34" charset="0"/>
+                <a:ea typeface="BIZ UDPGothic" pitchFamily="34" charset="-122"/>
+                <a:cs typeface="BIZ UDPGothic" pitchFamily="34" charset="-120"/>
               </a:rPr>
               <a:t>現在の構造</a:t>
             </a:r>
@@ -6586,11 +6586,11 @@
             <a:r>
               <a:rPr lang="en-US" sz="1100" dirty="0">
                 <a:solidFill>
-                  <a:srgbClr val="CCCCCC"/>
-                </a:solidFill>
-                <a:latin typeface="Arial" pitchFamily="34" charset="0"/>
-                <a:ea typeface="Arial" pitchFamily="34" charset="-122"/>
-                <a:cs typeface="Arial" pitchFamily="34" charset="-120"/>
+                  <a:srgbClr val="2B2F36"/>
+                </a:solidFill>
+                <a:latin typeface="Arial" pitchFamily="34" charset="0"/>
+                <a:ea typeface="BIZ UDPGothic" pitchFamily="34" charset="-122"/>
+                <a:cs typeface="BIZ UDPGothic" pitchFamily="34" charset="-120"/>
               </a:rPr>
               <a:t>「大卒でないとまともな職に就けない」という強迫観念</a:t>
             </a:r>
@@ -6606,11 +6606,11 @@
             <a:r>
               <a:rPr lang="en-US" sz="1100" dirty="0">
                 <a:solidFill>
-                  <a:srgbClr val="CCCCCC"/>
-                </a:solidFill>
-                <a:latin typeface="Arial" pitchFamily="34" charset="0"/>
-                <a:ea typeface="Arial" pitchFamily="34" charset="-122"/>
-                <a:cs typeface="Arial" pitchFamily="34" charset="-120"/>
+                  <a:srgbClr val="2B2F36"/>
+                </a:solidFill>
+                <a:latin typeface="Arial" pitchFamily="34" charset="0"/>
+                <a:ea typeface="BIZ UDPGothic" pitchFamily="34" charset="-122"/>
+                <a:cs typeface="BIZ UDPGothic" pitchFamily="34" charset="-120"/>
               </a:rPr>
               <a:t>→ 自覚なく「とりあえず大学」へ</a:t>
             </a:r>
@@ -6626,11 +6626,11 @@
             <a:r>
               <a:rPr lang="en-US" sz="1100" dirty="0">
                 <a:solidFill>
-                  <a:srgbClr val="CCCCCC"/>
-                </a:solidFill>
-                <a:latin typeface="Arial" pitchFamily="34" charset="0"/>
-                <a:ea typeface="Arial" pitchFamily="34" charset="-122"/>
-                <a:cs typeface="Arial" pitchFamily="34" charset="-120"/>
+                  <a:srgbClr val="2B2F36"/>
+                </a:solidFill>
+                <a:latin typeface="Arial" pitchFamily="34" charset="0"/>
+                <a:ea typeface="BIZ UDPGothic" pitchFamily="34" charset="-122"/>
+                <a:cs typeface="BIZ UDPGothic" pitchFamily="34" charset="-120"/>
               </a:rPr>
               <a:t>→ 数百万円の奨学金を借りる</a:t>
             </a:r>
@@ -6646,11 +6646,11 @@
             <a:r>
               <a:rPr lang="en-US" sz="1100" dirty="0">
                 <a:solidFill>
-                  <a:srgbClr val="CCCCCC"/>
-                </a:solidFill>
-                <a:latin typeface="Arial" pitchFamily="34" charset="0"/>
-                <a:ea typeface="Arial" pitchFamily="34" charset="-122"/>
-                <a:cs typeface="Arial" pitchFamily="34" charset="-120"/>
+                  <a:srgbClr val="2B2F36"/>
+                </a:solidFill>
+                <a:latin typeface="Arial" pitchFamily="34" charset="0"/>
+                <a:ea typeface="BIZ UDPGothic" pitchFamily="34" charset="-122"/>
+                <a:cs typeface="BIZ UDPGothic" pitchFamily="34" charset="-120"/>
               </a:rPr>
               <a:t>→ 社会人になる前から負債スタート</a:t>
             </a:r>
@@ -6685,11 +6685,11 @@
             <a:r>
               <a:rPr lang="en-US" sz="1300" b="1" dirty="0">
                 <a:solidFill>
-                  <a:srgbClr val="4CAF50"/>
-                </a:solidFill>
-                <a:latin typeface="Cambria" pitchFamily="34" charset="0"/>
-                <a:ea typeface="Cambria" pitchFamily="34" charset="-122"/>
-                <a:cs typeface="Cambria" pitchFamily="34" charset="-120"/>
+                  <a:srgbClr val="1D4F91"/>
+                </a:solidFill>
+                <a:latin typeface="BIZ UDPGothic" pitchFamily="34" charset="0"/>
+                <a:ea typeface="BIZ UDPGothic" pitchFamily="34" charset="-122"/>
+                <a:cs typeface="BIZ UDPGothic" pitchFamily="34" charset="-120"/>
               </a:rPr>
               <a:t>改革後の構造</a:t>
             </a:r>
@@ -6727,11 +6727,11 @@
             <a:r>
               <a:rPr lang="en-US" sz="1100" dirty="0">
                 <a:solidFill>
-                  <a:srgbClr val="CCCCCC"/>
-                </a:solidFill>
-                <a:latin typeface="Arial" pitchFamily="34" charset="0"/>
-                <a:ea typeface="Arial" pitchFamily="34" charset="-122"/>
-                <a:cs typeface="Arial" pitchFamily="34" charset="-120"/>
+                  <a:srgbClr val="2B2F36"/>
+                </a:solidFill>
+                <a:latin typeface="Arial" pitchFamily="34" charset="0"/>
+                <a:ea typeface="BIZ UDPGothic" pitchFamily="34" charset="-122"/>
+                <a:cs typeface="BIZ UDPGothic" pitchFamily="34" charset="-120"/>
               </a:rPr>
               <a:t>21歳で実務スキルを持って社会人スタート</a:t>
             </a:r>
@@ -6747,11 +6747,11 @@
             <a:r>
               <a:rPr lang="en-US" sz="1100" dirty="0">
                 <a:solidFill>
-                  <a:srgbClr val="CCCCCC"/>
-                </a:solidFill>
-                <a:latin typeface="Arial" pitchFamily="34" charset="0"/>
-                <a:ea typeface="Arial" pitchFamily="34" charset="-122"/>
-                <a:cs typeface="Arial" pitchFamily="34" charset="-120"/>
+                  <a:srgbClr val="2B2F36"/>
+                </a:solidFill>
+                <a:latin typeface="Arial" pitchFamily="34" charset="0"/>
+                <a:ea typeface="BIZ UDPGothic" pitchFamily="34" charset="-122"/>
+                <a:cs typeface="BIZ UDPGothic" pitchFamily="34" charset="-120"/>
               </a:rPr>
               <a:t>→ 奨学金ゼロで収入が始まる</a:t>
             </a:r>
@@ -6767,11 +6767,11 @@
             <a:r>
               <a:rPr lang="en-US" sz="1100" dirty="0">
                 <a:solidFill>
-                  <a:srgbClr val="CCCCCC"/>
-                </a:solidFill>
-                <a:latin typeface="Arial" pitchFamily="34" charset="0"/>
-                <a:ea typeface="Arial" pitchFamily="34" charset="-122"/>
-                <a:cs typeface="Arial" pitchFamily="34" charset="-120"/>
+                  <a:srgbClr val="2B2F36"/>
+                </a:solidFill>
+                <a:latin typeface="Arial" pitchFamily="34" charset="0"/>
+                <a:ea typeface="BIZ UDPGothic" pitchFamily="34" charset="-122"/>
+                <a:cs typeface="BIZ UDPGothic" pitchFamily="34" charset="-120"/>
               </a:rPr>
               <a:t>→ 学びたくなったら自費・企業支援で学ぶ</a:t>
             </a:r>
@@ -6787,11 +6787,11 @@
             <a:r>
               <a:rPr lang="en-US" sz="1100" dirty="0">
                 <a:solidFill>
-                  <a:srgbClr val="CCCCCC"/>
-                </a:solidFill>
-                <a:latin typeface="Arial" pitchFamily="34" charset="0"/>
-                <a:ea typeface="Arial" pitchFamily="34" charset="-122"/>
-                <a:cs typeface="Arial" pitchFamily="34" charset="-120"/>
+                  <a:srgbClr val="2B2F36"/>
+                </a:solidFill>
+                <a:latin typeface="Arial" pitchFamily="34" charset="0"/>
+                <a:ea typeface="BIZ UDPGothic" pitchFamily="34" charset="-122"/>
+                <a:cs typeface="BIZ UDPGothic" pitchFamily="34" charset="-120"/>
               </a:rPr>
               <a:t>→ 経済格差による教育格差が消滅する</a:t>
             </a:r>
@@ -6826,11 +6826,11 @@
             <a:r>
               <a:rPr lang="en-US" sz="4000" dirty="0">
                 <a:solidFill>
-                  <a:srgbClr val="D62828"/>
-                </a:solidFill>
-                <a:latin typeface="Arial" pitchFamily="34" charset="0"/>
-                <a:ea typeface="Arial" pitchFamily="34" charset="-122"/>
-                <a:cs typeface="Arial" pitchFamily="34" charset="-120"/>
+                  <a:srgbClr val="C8161D"/>
+                </a:solidFill>
+                <a:latin typeface="Arial" pitchFamily="34" charset="0"/>
+                <a:ea typeface="BIZ UDPGothic" pitchFamily="34" charset="-122"/>
+                <a:cs typeface="BIZ UDPGothic" pitchFamily="34" charset="-120"/>
               </a:rPr>
               <a:t>→</a:t>
             </a:r>
@@ -6855,11 +6855,11 @@
             </a:avLst>
           </a:prstGeom>
           <a:solidFill>
-            <a:srgbClr val="081808"/>
+            <a:srgbClr val="E9EFF8"/>
           </a:solidFill>
           <a:ln w="12700">
             <a:solidFill>
-              <a:srgbClr val="2E2E2E"/>
+              <a:srgbClr val="DDE0E6"/>
             </a:solidFill>
             <a:prstDash val="solid"/>
           </a:ln>
@@ -6892,11 +6892,11 @@
             <a:r>
               <a:rPr lang="en-US" sz="1600" b="1" dirty="0">
                 <a:solidFill>
-                  <a:srgbClr val="4CAF50"/>
-                </a:solidFill>
-                <a:latin typeface="Cambria" pitchFamily="34" charset="0"/>
-                <a:ea typeface="Cambria" pitchFamily="34" charset="-122"/>
-                <a:cs typeface="Cambria" pitchFamily="34" charset="-120"/>
+                  <a:srgbClr val="1D4F91"/>
+                </a:solidFill>
+                <a:latin typeface="BIZ UDPGothic" pitchFamily="34" charset="0"/>
+                <a:ea typeface="BIZ UDPGothic" pitchFamily="34" charset="-122"/>
+                <a:cs typeface="BIZ UDPGothic" pitchFamily="34" charset="-120"/>
               </a:rPr>
               <a:t>「経済格差による教育格差」という概念そのものが社会から消滅する</a:t>
             </a:r>
@@ -6918,7 +6918,7 @@
     <p:bg>
       <p:bgPr>
         <a:solidFill>
-          <a:srgbClr val="0A0A0A"/>
+          <a:srgbClr val="F5F6F8"/>
         </a:solidFill>
       </p:bgPr>
     </p:bg>
@@ -6963,11 +6963,11 @@
             <a:r>
               <a:rPr lang="en-US" sz="900" b="1" spc="400" kern="0" dirty="0">
                 <a:solidFill>
-                  <a:srgbClr val="D62828"/>
-                </a:solidFill>
-                <a:latin typeface="Arial" pitchFamily="34" charset="0"/>
-                <a:ea typeface="Arial" pitchFamily="34" charset="-122"/>
-                <a:cs typeface="Arial" pitchFamily="34" charset="-120"/>
+                  <a:srgbClr val="C8161D"/>
+                </a:solidFill>
+                <a:latin typeface="Arial" pitchFamily="34" charset="0"/>
+                <a:ea typeface="BIZ UDPGothic" pitchFamily="34" charset="-122"/>
+                <a:cs typeface="BIZ UDPGothic" pitchFamily="34" charset="-120"/>
               </a:rPr>
               <a:t>SOCIAL INFRASTRUCTURE 02</a:t>
             </a:r>
@@ -7002,11 +7002,11 @@
             <a:r>
               <a:rPr lang="en-US" sz="3600" b="1" dirty="0">
                 <a:solidFill>
-                  <a:srgbClr val="F5F5F0"/>
-                </a:solidFill>
-                <a:latin typeface="Cambria" pitchFamily="34" charset="0"/>
-                <a:ea typeface="Cambria" pitchFamily="34" charset="-122"/>
-                <a:cs typeface="Cambria" pitchFamily="34" charset="-120"/>
+                  <a:srgbClr val="16181D"/>
+                </a:solidFill>
+                <a:latin typeface="BIZ UDPGothic" pitchFamily="34" charset="0"/>
+                <a:ea typeface="BIZ UDPGothic" pitchFamily="34" charset="-122"/>
+                <a:cs typeface="BIZ UDPGothic" pitchFamily="34" charset="-120"/>
               </a:rPr>
               <a:t>社会人の「必要駆動型」リカレント教育</a:t>
             </a:r>
@@ -7029,11 +7029,11 @@
             <a:avLst/>
           </a:prstGeom>
           <a:solidFill>
-            <a:srgbClr val="2E2E2E"/>
+            <a:srgbClr val="DDE0E6"/>
           </a:solidFill>
           <a:ln w="12700">
             <a:solidFill>
-              <a:srgbClr val="2E2E2E"/>
+              <a:srgbClr val="DDE0E6"/>
             </a:solidFill>
             <a:prstDash val="solid"/>
           </a:ln>
@@ -7056,11 +7056,11 @@
             </a:avLst>
           </a:prstGeom>
           <a:solidFill>
-            <a:srgbClr val="141414"/>
+            <a:srgbClr val="FFFFFF"/>
           </a:solidFill>
           <a:ln w="12700">
             <a:solidFill>
-              <a:srgbClr val="2E2E2E"/>
+              <a:srgbClr val="DDE0E6"/>
             </a:solidFill>
             <a:prstDash val="solid"/>
           </a:ln>
@@ -7093,11 +7093,11 @@
             <a:r>
               <a:rPr lang="en-US" sz="1000" dirty="0">
                 <a:solidFill>
-                  <a:srgbClr val="F5F5F0"/>
-                </a:solidFill>
-                <a:latin typeface="Arial" pitchFamily="34" charset="0"/>
-                <a:ea typeface="Arial" pitchFamily="34" charset="-122"/>
-                <a:cs typeface="Arial" pitchFamily="34" charset="-120"/>
+                  <a:srgbClr val="16181D"/>
+                </a:solidFill>
+                <a:latin typeface="Arial" pitchFamily="34" charset="0"/>
+                <a:ea typeface="BIZ UDPGothic" pitchFamily="34" charset="-122"/>
+                <a:cs typeface="BIZ UDPGothic" pitchFamily="34" charset="-120"/>
               </a:rPr>
               <a:t>社会に出る</a:t>
             </a:r>
@@ -7110,11 +7110,11 @@
             <a:r>
               <a:rPr lang="en-US" sz="1000" dirty="0">
                 <a:solidFill>
-                  <a:srgbClr val="F5F5F0"/>
-                </a:solidFill>
-                <a:latin typeface="Arial" pitchFamily="34" charset="0"/>
-                <a:ea typeface="Arial" pitchFamily="34" charset="-122"/>
-                <a:cs typeface="Arial" pitchFamily="34" charset="-120"/>
+                  <a:srgbClr val="16181D"/>
+                </a:solidFill>
+                <a:latin typeface="Arial" pitchFamily="34" charset="0"/>
+                <a:ea typeface="BIZ UDPGothic" pitchFamily="34" charset="-122"/>
+                <a:cs typeface="BIZ UDPGothic" pitchFamily="34" charset="-120"/>
               </a:rPr>
               <a:t>（21歳）</a:t>
             </a:r>
@@ -7149,11 +7149,11 @@
             <a:r>
               <a:rPr lang="en-US" sz="1400" dirty="0">
                 <a:solidFill>
-                  <a:srgbClr val="D62828"/>
-                </a:solidFill>
-                <a:latin typeface="Arial" pitchFamily="34" charset="0"/>
-                <a:ea typeface="Arial" pitchFamily="34" charset="-122"/>
-                <a:cs typeface="Arial" pitchFamily="34" charset="-120"/>
+                  <a:srgbClr val="C8161D"/>
+                </a:solidFill>
+                <a:latin typeface="Arial" pitchFamily="34" charset="0"/>
+                <a:ea typeface="BIZ UDPGothic" pitchFamily="34" charset="-122"/>
+                <a:cs typeface="BIZ UDPGothic" pitchFamily="34" charset="-120"/>
               </a:rPr>
               <a:t>→</a:t>
             </a:r>
@@ -7178,11 +7178,11 @@
             </a:avLst>
           </a:prstGeom>
           <a:solidFill>
-            <a:srgbClr val="141414"/>
+            <a:srgbClr val="FFFFFF"/>
           </a:solidFill>
           <a:ln w="12700">
             <a:solidFill>
-              <a:srgbClr val="2E2E2E"/>
+              <a:srgbClr val="DDE0E6"/>
             </a:solidFill>
             <a:prstDash val="solid"/>
           </a:ln>
@@ -7215,11 +7215,11 @@
             <a:r>
               <a:rPr lang="en-US" sz="1000" dirty="0">
                 <a:solidFill>
-                  <a:srgbClr val="F5F5F0"/>
-                </a:solidFill>
-                <a:latin typeface="Arial" pitchFamily="34" charset="0"/>
-                <a:ea typeface="Arial" pitchFamily="34" charset="-122"/>
-                <a:cs typeface="Arial" pitchFamily="34" charset="-120"/>
+                  <a:srgbClr val="16181D"/>
+                </a:solidFill>
+                <a:latin typeface="Arial" pitchFamily="34" charset="0"/>
+                <a:ea typeface="BIZ UDPGothic" pitchFamily="34" charset="-122"/>
+                <a:cs typeface="BIZ UDPGothic" pitchFamily="34" charset="-120"/>
               </a:rPr>
               <a:t>現実の壁に</a:t>
             </a:r>
@@ -7232,11 +7232,11 @@
             <a:r>
               <a:rPr lang="en-US" sz="1000" dirty="0">
                 <a:solidFill>
-                  <a:srgbClr val="F5F5F0"/>
-                </a:solidFill>
-                <a:latin typeface="Arial" pitchFamily="34" charset="0"/>
-                <a:ea typeface="Arial" pitchFamily="34" charset="-122"/>
-                <a:cs typeface="Arial" pitchFamily="34" charset="-120"/>
+                  <a:srgbClr val="16181D"/>
+                </a:solidFill>
+                <a:latin typeface="Arial" pitchFamily="34" charset="0"/>
+                <a:ea typeface="BIZ UDPGothic" pitchFamily="34" charset="-122"/>
+                <a:cs typeface="BIZ UDPGothic" pitchFamily="34" charset="-120"/>
               </a:rPr>
               <a:t>ぶつかる</a:t>
             </a:r>
@@ -7271,11 +7271,11 @@
             <a:r>
               <a:rPr lang="en-US" sz="1400" dirty="0">
                 <a:solidFill>
-                  <a:srgbClr val="D62828"/>
-                </a:solidFill>
-                <a:latin typeface="Arial" pitchFamily="34" charset="0"/>
-                <a:ea typeface="Arial" pitchFamily="34" charset="-122"/>
-                <a:cs typeface="Arial" pitchFamily="34" charset="-120"/>
+                  <a:srgbClr val="C8161D"/>
+                </a:solidFill>
+                <a:latin typeface="Arial" pitchFamily="34" charset="0"/>
+                <a:ea typeface="BIZ UDPGothic" pitchFamily="34" charset="-122"/>
+                <a:cs typeface="BIZ UDPGothic" pitchFamily="34" charset="-120"/>
               </a:rPr>
               <a:t>→</a:t>
             </a:r>
@@ -7300,11 +7300,11 @@
             </a:avLst>
           </a:prstGeom>
           <a:solidFill>
-            <a:srgbClr val="141420"/>
+            <a:srgbClr val="E9EFF8"/>
           </a:solidFill>
           <a:ln w="12700">
             <a:solidFill>
-              <a:srgbClr val="2E2E2E"/>
+              <a:srgbClr val="DDE0E6"/>
             </a:solidFill>
             <a:prstDash val="solid"/>
           </a:ln>
@@ -7337,11 +7337,11 @@
             <a:r>
               <a:rPr lang="en-US" sz="1000" dirty="0">
                 <a:solidFill>
-                  <a:srgbClr val="F5F5F0"/>
-                </a:solidFill>
-                <a:latin typeface="Arial" pitchFamily="34" charset="0"/>
-                <a:ea typeface="Arial" pitchFamily="34" charset="-122"/>
-                <a:cs typeface="Arial" pitchFamily="34" charset="-120"/>
+                  <a:srgbClr val="16181D"/>
+                </a:solidFill>
+                <a:latin typeface="Arial" pitchFamily="34" charset="0"/>
+                <a:ea typeface="BIZ UDPGothic" pitchFamily="34" charset="-122"/>
+                <a:cs typeface="BIZ UDPGothic" pitchFamily="34" charset="-120"/>
               </a:rPr>
               <a:t>必要なスキルが</a:t>
             </a:r>
@@ -7354,11 +7354,11 @@
             <a:r>
               <a:rPr lang="en-US" sz="1000" dirty="0">
                 <a:solidFill>
-                  <a:srgbClr val="F5F5F0"/>
-                </a:solidFill>
-                <a:latin typeface="Arial" pitchFamily="34" charset="0"/>
-                <a:ea typeface="Arial" pitchFamily="34" charset="-122"/>
-                <a:cs typeface="Arial" pitchFamily="34" charset="-120"/>
+                  <a:srgbClr val="16181D"/>
+                </a:solidFill>
+                <a:latin typeface="Arial" pitchFamily="34" charset="0"/>
+                <a:ea typeface="BIZ UDPGothic" pitchFamily="34" charset="-122"/>
+                <a:cs typeface="BIZ UDPGothic" pitchFamily="34" charset="-120"/>
               </a:rPr>
               <a:t>明確になる</a:t>
             </a:r>
@@ -7393,11 +7393,11 @@
             <a:r>
               <a:rPr lang="en-US" sz="1400" dirty="0">
                 <a:solidFill>
-                  <a:srgbClr val="D62828"/>
-                </a:solidFill>
-                <a:latin typeface="Arial" pitchFamily="34" charset="0"/>
-                <a:ea typeface="Arial" pitchFamily="34" charset="-122"/>
-                <a:cs typeface="Arial" pitchFamily="34" charset="-120"/>
+                  <a:srgbClr val="C8161D"/>
+                </a:solidFill>
+                <a:latin typeface="Arial" pitchFamily="34" charset="0"/>
+                <a:ea typeface="BIZ UDPGothic" pitchFamily="34" charset="-122"/>
+                <a:cs typeface="BIZ UDPGothic" pitchFamily="34" charset="-120"/>
               </a:rPr>
               <a:t>→</a:t>
             </a:r>
@@ -7422,11 +7422,11 @@
             </a:avLst>
           </a:prstGeom>
           <a:solidFill>
-            <a:srgbClr val="081818"/>
+            <a:srgbClr val="E9EFF8"/>
           </a:solidFill>
           <a:ln w="12700">
             <a:solidFill>
-              <a:srgbClr val="2E2E2E"/>
+              <a:srgbClr val="DDE0E6"/>
             </a:solidFill>
             <a:prstDash val="solid"/>
           </a:ln>
@@ -7459,11 +7459,11 @@
             <a:r>
               <a:rPr lang="en-US" sz="1000" dirty="0">
                 <a:solidFill>
-                  <a:srgbClr val="F5F5F0"/>
-                </a:solidFill>
-                <a:latin typeface="Arial" pitchFamily="34" charset="0"/>
-                <a:ea typeface="Arial" pitchFamily="34" charset="-122"/>
-                <a:cs typeface="Arial" pitchFamily="34" charset="-120"/>
+                  <a:srgbClr val="16181D"/>
+                </a:solidFill>
+                <a:latin typeface="Arial" pitchFamily="34" charset="0"/>
+                <a:ea typeface="BIZ UDPGothic" pitchFamily="34" charset="-122"/>
+                <a:cs typeface="BIZ UDPGothic" pitchFamily="34" charset="-120"/>
               </a:rPr>
               <a:t>主体的意志で</a:t>
             </a:r>
@@ -7476,11 +7476,11 @@
             <a:r>
               <a:rPr lang="en-US" sz="1000" dirty="0">
                 <a:solidFill>
-                  <a:srgbClr val="F5F5F0"/>
-                </a:solidFill>
-                <a:latin typeface="Arial" pitchFamily="34" charset="0"/>
-                <a:ea typeface="Arial" pitchFamily="34" charset="-122"/>
-                <a:cs typeface="Arial" pitchFamily="34" charset="-120"/>
+                  <a:srgbClr val="16181D"/>
+                </a:solidFill>
+                <a:latin typeface="Arial" pitchFamily="34" charset="0"/>
+                <a:ea typeface="BIZ UDPGothic" pitchFamily="34" charset="-122"/>
+                <a:cs typeface="BIZ UDPGothic" pitchFamily="34" charset="-120"/>
               </a:rPr>
               <a:t>大学へ</a:t>
             </a:r>
@@ -7515,11 +7515,11 @@
             <a:r>
               <a:rPr lang="en-US" sz="1400" dirty="0">
                 <a:solidFill>
-                  <a:srgbClr val="D62828"/>
-                </a:solidFill>
-                <a:latin typeface="Arial" pitchFamily="34" charset="0"/>
-                <a:ea typeface="Arial" pitchFamily="34" charset="-122"/>
-                <a:cs typeface="Arial" pitchFamily="34" charset="-120"/>
+                  <a:srgbClr val="C8161D"/>
+                </a:solidFill>
+                <a:latin typeface="Arial" pitchFamily="34" charset="0"/>
+                <a:ea typeface="BIZ UDPGothic" pitchFamily="34" charset="-122"/>
+                <a:cs typeface="BIZ UDPGothic" pitchFamily="34" charset="-120"/>
               </a:rPr>
               <a:t>→</a:t>
             </a:r>
@@ -7544,11 +7544,11 @@
             </a:avLst>
           </a:prstGeom>
           <a:solidFill>
-            <a:srgbClr val="081808"/>
+            <a:srgbClr val="E9EFF8"/>
           </a:solidFill>
           <a:ln w="12700">
             <a:solidFill>
-              <a:srgbClr val="2E2E2E"/>
+              <a:srgbClr val="DDE0E6"/>
             </a:solidFill>
             <a:prstDash val="solid"/>
           </a:ln>
@@ -7581,11 +7581,11 @@
             <a:r>
               <a:rPr lang="en-US" sz="1000" dirty="0">
                 <a:solidFill>
-                  <a:srgbClr val="F5F5F0"/>
-                </a:solidFill>
-                <a:latin typeface="Arial" pitchFamily="34" charset="0"/>
-                <a:ea typeface="Arial" pitchFamily="34" charset="-122"/>
-                <a:cs typeface="Arial" pitchFamily="34" charset="-120"/>
+                  <a:srgbClr val="16181D"/>
+                </a:solidFill>
+                <a:latin typeface="Arial" pitchFamily="34" charset="0"/>
+                <a:ea typeface="BIZ UDPGothic" pitchFamily="34" charset="-122"/>
+                <a:cs typeface="BIZ UDPGothic" pitchFamily="34" charset="-120"/>
               </a:rPr>
               <a:t>スキルを得て</a:t>
             </a:r>
@@ -7598,11 +7598,11 @@
             <a:r>
               <a:rPr lang="en-US" sz="1000" dirty="0">
                 <a:solidFill>
-                  <a:srgbClr val="F5F5F0"/>
-                </a:solidFill>
-                <a:latin typeface="Arial" pitchFamily="34" charset="0"/>
-                <a:ea typeface="Arial" pitchFamily="34" charset="-122"/>
-                <a:cs typeface="Arial" pitchFamily="34" charset="-120"/>
+                  <a:srgbClr val="16181D"/>
+                </a:solidFill>
+                <a:latin typeface="Arial" pitchFamily="34" charset="0"/>
+                <a:ea typeface="BIZ UDPGothic" pitchFamily="34" charset="-122"/>
+                <a:cs typeface="BIZ UDPGothic" pitchFamily="34" charset="-120"/>
               </a:rPr>
               <a:t>職場に戻る</a:t>
             </a:r>
@@ -7637,11 +7637,11 @@
             <a:r>
               <a:rPr lang="en-US" sz="1400" b="1" dirty="0">
                 <a:solidFill>
-                  <a:srgbClr val="D62828"/>
-                </a:solidFill>
-                <a:latin typeface="Cambria" pitchFamily="34" charset="0"/>
-                <a:ea typeface="Cambria" pitchFamily="34" charset="-122"/>
-                <a:cs typeface="Cambria" pitchFamily="34" charset="-120"/>
+                  <a:srgbClr val="C8161D"/>
+                </a:solidFill>
+                <a:latin typeface="BIZ UDPGothic" pitchFamily="34" charset="0"/>
+                <a:ea typeface="BIZ UDPGothic" pitchFamily="34" charset="-122"/>
+                <a:cs typeface="BIZ UDPGothic" pitchFamily="34" charset="-120"/>
               </a:rPr>
               <a:t>法的な保護・推奨の範囲</a:t>
             </a:r>
@@ -7680,11 +7680,11 @@
             <a:r>
               <a:rPr lang="en-US" sz="1100" dirty="0">
                 <a:solidFill>
-                  <a:srgbClr val="CCCCCC"/>
-                </a:solidFill>
-                <a:latin typeface="Arial" pitchFamily="34" charset="0"/>
-                <a:ea typeface="Arial" pitchFamily="34" charset="-122"/>
-                <a:cs typeface="Arial" pitchFamily="34" charset="-120"/>
+                  <a:srgbClr val="2B2F36"/>
+                </a:solidFill>
+                <a:latin typeface="Arial" pitchFamily="34" charset="0"/>
+                <a:ea typeface="BIZ UDPGothic" pitchFamily="34" charset="-122"/>
+                <a:cs typeface="BIZ UDPGothic" pitchFamily="34" charset="-120"/>
               </a:rPr>
               <a:t>休職・進学中も昇進・異動・経済面において一切の社会的デメリットを被らないよう法的に保護</a:t>
             </a:r>
@@ -7701,11 +7701,11 @@
             <a:r>
               <a:rPr lang="en-US" sz="1100" dirty="0">
                 <a:solidFill>
-                  <a:srgbClr val="CCCCCC"/>
-                </a:solidFill>
-                <a:latin typeface="Arial" pitchFamily="34" charset="0"/>
-                <a:ea typeface="Arial" pitchFamily="34" charset="-122"/>
-                <a:cs typeface="Arial" pitchFamily="34" charset="-120"/>
+                  <a:srgbClr val="2B2F36"/>
+                </a:solidFill>
+                <a:latin typeface="Arial" pitchFamily="34" charset="0"/>
+                <a:ea typeface="BIZ UDPGothic" pitchFamily="34" charset="-122"/>
+                <a:cs typeface="BIZ UDPGothic" pitchFamily="34" charset="-120"/>
               </a:rPr>
               <a:t>企業によるリカレント教育支援（費用補助・休職制度）を義務化または強力に推奨</a:t>
             </a:r>
@@ -7722,11 +7722,11 @@
             <a:r>
               <a:rPr lang="en-US" sz="1100" dirty="0">
                 <a:solidFill>
-                  <a:srgbClr val="CCCCCC"/>
-                </a:solidFill>
-                <a:latin typeface="Arial" pitchFamily="34" charset="0"/>
-                <a:ea typeface="Arial" pitchFamily="34" charset="-122"/>
-                <a:cs typeface="Arial" pitchFamily="34" charset="-120"/>
+                  <a:srgbClr val="2B2F36"/>
+                </a:solidFill>
+                <a:latin typeface="Arial" pitchFamily="34" charset="0"/>
+                <a:ea typeface="BIZ UDPGothic" pitchFamily="34" charset="-122"/>
+                <a:cs typeface="BIZ UDPGothic" pitchFamily="34" charset="-120"/>
               </a:rPr>
               <a:t>格上げされた大学は「18歳の通過儀礼」ではなく「本物の学びを求める者が来る場」として機能する</a:t>
             </a:r>
@@ -7748,7 +7748,7 @@
     <p:bg>
       <p:bgPr>
         <a:solidFill>
-          <a:srgbClr val="0A0A0A"/>
+          <a:srgbClr val="F5F6F8"/>
         </a:solidFill>
       </p:bgPr>
     </p:bg>
@@ -7781,11 +7781,11 @@
             <a:avLst/>
           </a:prstGeom>
           <a:solidFill>
-            <a:srgbClr val="D62828"/>
+            <a:srgbClr val="C8161D"/>
           </a:solidFill>
           <a:ln w="12700">
             <a:solidFill>
-              <a:srgbClr val="D62828"/>
+              <a:srgbClr val="C8161D"/>
             </a:solidFill>
             <a:prstDash val="solid"/>
           </a:ln>
@@ -7818,11 +7818,11 @@
             <a:r>
               <a:rPr lang="en-US" sz="1000" b="1" spc="300" kern="0" dirty="0">
                 <a:solidFill>
-                  <a:srgbClr val="D62828"/>
-                </a:solidFill>
-                <a:latin typeface="Arial" pitchFamily="34" charset="0"/>
-                <a:ea typeface="Arial" pitchFamily="34" charset="-122"/>
-                <a:cs typeface="Arial" pitchFamily="34" charset="-120"/>
+                  <a:srgbClr val="C8161D"/>
+                </a:solidFill>
+                <a:latin typeface="Arial" pitchFamily="34" charset="0"/>
+                <a:ea typeface="BIZ UDPGothic" pitchFamily="34" charset="-122"/>
+                <a:cs typeface="BIZ UDPGothic" pitchFamily="34" charset="-120"/>
               </a:rPr>
               <a:t>REBOOT JAPAN ── 提言007　まとめ</a:t>
             </a:r>
@@ -7857,11 +7857,11 @@
             <a:r>
               <a:rPr lang="en-US" sz="2800" b="1" dirty="0">
                 <a:solidFill>
-                  <a:srgbClr val="F5F5F0"/>
-                </a:solidFill>
-                <a:latin typeface="Cambria" pitchFamily="34" charset="0"/>
-                <a:ea typeface="Cambria" pitchFamily="34" charset="-122"/>
-                <a:cs typeface="Cambria" pitchFamily="34" charset="-120"/>
+                  <a:srgbClr val="16181D"/>
+                </a:solidFill>
+                <a:latin typeface="BIZ UDPGothic" pitchFamily="34" charset="0"/>
+                <a:ea typeface="BIZ UDPGothic" pitchFamily="34" charset="-122"/>
+                <a:cs typeface="BIZ UDPGothic" pitchFamily="34" charset="-120"/>
               </a:rPr>
               <a:t>「18歳の偏差値」で</a:t>
             </a:r>
@@ -7874,11 +7874,11 @@
             <a:r>
               <a:rPr lang="en-US" sz="2800" b="1" dirty="0">
                 <a:solidFill>
-                  <a:srgbClr val="F5F5F0"/>
-                </a:solidFill>
-                <a:latin typeface="Cambria" pitchFamily="34" charset="0"/>
-                <a:ea typeface="Cambria" pitchFamily="34" charset="-122"/>
-                <a:cs typeface="Cambria" pitchFamily="34" charset="-120"/>
+                  <a:srgbClr val="16181D"/>
+                </a:solidFill>
+                <a:latin typeface="BIZ UDPGothic" pitchFamily="34" charset="0"/>
+                <a:ea typeface="BIZ UDPGothic" pitchFamily="34" charset="-122"/>
+                <a:cs typeface="BIZ UDPGothic" pitchFamily="34" charset="-120"/>
               </a:rPr>
               <a:t>人生が決まる国から、</a:t>
             </a:r>
@@ -7891,11 +7891,11 @@
             <a:r>
               <a:rPr lang="en-US" sz="2800" b="1" dirty="0">
                 <a:solidFill>
-                  <a:srgbClr val="F5F5F0"/>
-                </a:solidFill>
-                <a:latin typeface="Cambria" pitchFamily="34" charset="0"/>
-                <a:ea typeface="Cambria" pitchFamily="34" charset="-122"/>
-                <a:cs typeface="Cambria" pitchFamily="34" charset="-120"/>
+                  <a:srgbClr val="16181D"/>
+                </a:solidFill>
+                <a:latin typeface="BIZ UDPGothic" pitchFamily="34" charset="0"/>
+                <a:ea typeface="BIZ UDPGothic" pitchFamily="34" charset="-122"/>
+                <a:cs typeface="BIZ UDPGothic" pitchFamily="34" charset="-120"/>
               </a:rPr>
               <a:t>「何歳からでも自分を</a:t>
             </a:r>
@@ -7908,11 +7908,11 @@
             <a:r>
               <a:rPr lang="en-US" sz="2800" b="1" dirty="0">
                 <a:solidFill>
-                  <a:srgbClr val="F5F5F0"/>
-                </a:solidFill>
-                <a:latin typeface="Cambria" pitchFamily="34" charset="0"/>
-                <a:ea typeface="Cambria" pitchFamily="34" charset="-122"/>
-                <a:cs typeface="Cambria" pitchFamily="34" charset="-120"/>
+                  <a:srgbClr val="16181D"/>
+                </a:solidFill>
+                <a:latin typeface="BIZ UDPGothic" pitchFamily="34" charset="0"/>
+                <a:ea typeface="BIZ UDPGothic" pitchFamily="34" charset="-122"/>
+                <a:cs typeface="BIZ UDPGothic" pitchFamily="34" charset="-120"/>
               </a:rPr>
               <a:t>アップデートできる国」へ。</a:t>
             </a:r>
@@ -7935,11 +7935,11 @@
             <a:avLst/>
           </a:prstGeom>
           <a:solidFill>
-            <a:srgbClr val="2E2E2E"/>
+            <a:srgbClr val="DDE0E6"/>
           </a:solidFill>
           <a:ln w="12700">
             <a:solidFill>
-              <a:srgbClr val="2E2E2E"/>
+              <a:srgbClr val="DDE0E6"/>
             </a:solidFill>
             <a:prstDash val="solid"/>
           </a:ln>
@@ -7975,11 +7975,11 @@
             <a:r>
               <a:rPr lang="en-US" sz="1100" dirty="0">
                 <a:solidFill>
-                  <a:srgbClr val="CCCCCC"/>
-                </a:solidFill>
-                <a:latin typeface="Arial" pitchFamily="34" charset="0"/>
-                <a:ea typeface="Arial" pitchFamily="34" charset="-122"/>
-                <a:cs typeface="Arial" pitchFamily="34" charset="-120"/>
+                  <a:srgbClr val="2B2F36"/>
+                </a:solidFill>
+                <a:latin typeface="Arial" pitchFamily="34" charset="0"/>
+                <a:ea typeface="BIZ UDPGothic" pitchFamily="34" charset="-122"/>
+                <a:cs typeface="BIZ UDPGothic" pitchFamily="34" charset="-120"/>
               </a:rPr>
               <a:t>高校3年を「基礎→探索→社会リテラシー」に再設計</a:t>
             </a:r>
@@ -7995,11 +7995,11 @@
             <a:r>
               <a:rPr lang="en-US" sz="1100" dirty="0">
                 <a:solidFill>
-                  <a:srgbClr val="CCCCCC"/>
-                </a:solidFill>
-                <a:latin typeface="Arial" pitchFamily="34" charset="0"/>
-                <a:ea typeface="Arial" pitchFamily="34" charset="-122"/>
-                <a:cs typeface="Arial" pitchFamily="34" charset="-120"/>
+                  <a:srgbClr val="2B2F36"/>
+                </a:solidFill>
+                <a:latin typeface="Arial" pitchFamily="34" charset="0"/>
+                <a:ea typeface="BIZ UDPGothic" pitchFamily="34" charset="-122"/>
+                <a:cs typeface="BIZ UDPGothic" pitchFamily="34" charset="-120"/>
               </a:rPr>
               <a:t>9割は専門学校2年で21歳社会人スタート（ルート①）</a:t>
             </a:r>
@@ -8015,11 +8015,11 @@
             <a:r>
               <a:rPr lang="en-US" sz="1100" dirty="0">
                 <a:solidFill>
-                  <a:srgbClr val="CCCCCC"/>
-                </a:solidFill>
-                <a:latin typeface="Arial" pitchFamily="34" charset="0"/>
-                <a:ea typeface="Arial" pitchFamily="34" charset="-122"/>
-                <a:cs typeface="Arial" pitchFamily="34" charset="-120"/>
+                  <a:srgbClr val="2B2F36"/>
+                </a:solidFill>
+                <a:latin typeface="Arial" pitchFamily="34" charset="0"/>
+                <a:ea typeface="BIZ UDPGothic" pitchFamily="34" charset="-122"/>
+                <a:cs typeface="BIZ UDPGothic" pitchFamily="34" charset="-120"/>
               </a:rPr>
               <a:t>医療・公安・防衛は国費＋10年従事義務（ルート②）</a:t>
             </a:r>
@@ -8035,11 +8035,11 @@
             <a:r>
               <a:rPr lang="en-US" sz="1100" dirty="0">
                 <a:solidFill>
-                  <a:srgbClr val="CCCCCC"/>
-                </a:solidFill>
-                <a:latin typeface="Arial" pitchFamily="34" charset="0"/>
-                <a:ea typeface="Arial" pitchFamily="34" charset="-122"/>
-                <a:cs typeface="Arial" pitchFamily="34" charset="-120"/>
+                  <a:srgbClr val="2B2F36"/>
+                </a:solidFill>
+                <a:latin typeface="Arial" pitchFamily="34" charset="0"/>
+                <a:ea typeface="BIZ UDPGothic" pitchFamily="34" charset="-122"/>
+                <a:cs typeface="BIZ UDPGothic" pitchFamily="34" charset="-120"/>
               </a:rPr>
               <a:t>上位数％は国費完全無償で研究へ直行（ルート③）</a:t>
             </a:r>
@@ -8055,11 +8055,11 @@
             <a:r>
               <a:rPr lang="en-US" sz="1100" dirty="0">
                 <a:solidFill>
-                  <a:srgbClr val="CCCCCC"/>
-                </a:solidFill>
-                <a:latin typeface="Arial" pitchFamily="34" charset="0"/>
-                <a:ea typeface="Arial" pitchFamily="34" charset="-122"/>
-                <a:cs typeface="Arial" pitchFamily="34" charset="-120"/>
+                  <a:srgbClr val="2B2F36"/>
+                </a:solidFill>
+                <a:latin typeface="Arial" pitchFamily="34" charset="0"/>
+                <a:ea typeface="BIZ UDPGothic" pitchFamily="34" charset="-122"/>
+                <a:cs typeface="BIZ UDPGothic" pitchFamily="34" charset="-120"/>
               </a:rPr>
               <a:t>大学を偏差値60基準で5年かけて削減・研究力競争軸へ転換</a:t>
             </a:r>
@@ -8081,7 +8081,7 @@
     <p:bg>
       <p:bgPr>
         <a:solidFill>
-          <a:srgbClr val="0A0A0A"/>
+          <a:srgbClr val="F5F6F8"/>
         </a:solidFill>
       </p:bgPr>
     </p:bg>
@@ -8126,11 +8126,11 @@
             <a:r>
               <a:rPr lang="en-US" sz="900" b="1" spc="400" kern="0" dirty="0">
                 <a:solidFill>
-                  <a:srgbClr val="D62828"/>
-                </a:solidFill>
-                <a:latin typeface="Arial" pitchFamily="34" charset="0"/>
-                <a:ea typeface="Arial" pitchFamily="34" charset="-122"/>
-                <a:cs typeface="Arial" pitchFamily="34" charset="-120"/>
+                  <a:srgbClr val="C8161D"/>
+                </a:solidFill>
+                <a:latin typeface="Arial" pitchFamily="34" charset="0"/>
+                <a:ea typeface="BIZ UDPGothic" pitchFamily="34" charset="-122"/>
+                <a:cs typeface="BIZ UDPGothic" pitchFamily="34" charset="-120"/>
               </a:rPr>
               <a:t>PROBLEM</a:t>
             </a:r>
@@ -8165,11 +8165,11 @@
             <a:r>
               <a:rPr lang="en-US" sz="2800" b="1" dirty="0">
                 <a:solidFill>
-                  <a:srgbClr val="F5F5F0"/>
-                </a:solidFill>
-                <a:latin typeface="Cambria" pitchFamily="34" charset="0"/>
-                <a:ea typeface="Cambria" pitchFamily="34" charset="-122"/>
-                <a:cs typeface="Cambria" pitchFamily="34" charset="-120"/>
+                  <a:srgbClr val="16181D"/>
+                </a:solidFill>
+                <a:latin typeface="BIZ UDPGothic" pitchFamily="34" charset="0"/>
+                <a:ea typeface="BIZ UDPGothic" pitchFamily="34" charset="-122"/>
+                <a:cs typeface="BIZ UDPGothic" pitchFamily="34" charset="-120"/>
               </a:rPr>
               <a:t>大学が「就職のための通過儀礼」になっている</a:t>
             </a:r>
@@ -8192,11 +8192,11 @@
             <a:avLst/>
           </a:prstGeom>
           <a:solidFill>
-            <a:srgbClr val="2E2E2E"/>
+            <a:srgbClr val="DDE0E6"/>
           </a:solidFill>
           <a:ln w="12700">
             <a:solidFill>
-              <a:srgbClr val="2E2E2E"/>
+              <a:srgbClr val="DDE0E6"/>
             </a:solidFill>
             <a:prstDash val="solid"/>
           </a:ln>
@@ -8219,11 +8219,11 @@
             </a:avLst>
           </a:prstGeom>
           <a:solidFill>
-            <a:srgbClr val="1A1A1A"/>
+            <a:srgbClr val="FFFFFF"/>
           </a:solidFill>
           <a:ln w="12700">
             <a:solidFill>
-              <a:srgbClr val="2E2E2E"/>
+              <a:srgbClr val="DDE0E6"/>
             </a:solidFill>
             <a:prstDash val="solid"/>
           </a:ln>
@@ -8256,11 +8256,11 @@
             <a:r>
               <a:rPr lang="en-US" sz="2600" b="1" dirty="0">
                 <a:solidFill>
-                  <a:srgbClr val="D62828"/>
-                </a:solidFill>
-                <a:latin typeface="Cambria" pitchFamily="34" charset="0"/>
-                <a:ea typeface="Cambria" pitchFamily="34" charset="-122"/>
-                <a:cs typeface="Cambria" pitchFamily="34" charset="-120"/>
+                  <a:srgbClr val="C8161D"/>
+                </a:solidFill>
+                <a:latin typeface="BIZ UDPGothic" pitchFamily="34" charset="0"/>
+                <a:ea typeface="BIZ UDPGothic" pitchFamily="34" charset="-122"/>
+                <a:cs typeface="BIZ UDPGothic" pitchFamily="34" charset="-120"/>
               </a:rPr>
               <a:t>01</a:t>
             </a:r>
@@ -8283,11 +8283,11 @@
             <a:avLst/>
           </a:prstGeom>
           <a:solidFill>
-            <a:srgbClr val="2E2E2E"/>
+            <a:srgbClr val="DDE0E6"/>
           </a:solidFill>
           <a:ln w="12700">
             <a:solidFill>
-              <a:srgbClr val="2E2E2E"/>
+              <a:srgbClr val="DDE0E6"/>
             </a:solidFill>
             <a:prstDash val="solid"/>
           </a:ln>
@@ -8320,11 +8320,11 @@
             <a:r>
               <a:rPr lang="en-US" sz="1400" b="1" dirty="0">
                 <a:solidFill>
-                  <a:srgbClr val="F5F5F0"/>
-                </a:solidFill>
-                <a:latin typeface="Cambria" pitchFamily="34" charset="0"/>
-                <a:ea typeface="Cambria" pitchFamily="34" charset="-122"/>
-                <a:cs typeface="Cambria" pitchFamily="34" charset="-120"/>
+                  <a:srgbClr val="16181D"/>
+                </a:solidFill>
+                <a:latin typeface="BIZ UDPGothic" pitchFamily="34" charset="0"/>
+                <a:ea typeface="BIZ UDPGothic" pitchFamily="34" charset="-122"/>
+                <a:cs typeface="BIZ UDPGothic" pitchFamily="34" charset="-120"/>
               </a:rPr>
               <a:t>流されて入るモラトリアム</a:t>
             </a:r>
@@ -8359,11 +8359,11 @@
             <a:r>
               <a:rPr lang="en-US" sz="1100" dirty="0">
                 <a:solidFill>
-                  <a:srgbClr val="CCCCCC"/>
-                </a:solidFill>
-                <a:latin typeface="Arial" pitchFamily="34" charset="0"/>
-                <a:ea typeface="Arial" pitchFamily="34" charset="-122"/>
-                <a:cs typeface="Arial" pitchFamily="34" charset="-120"/>
+                  <a:srgbClr val="2B2F36"/>
+                </a:solidFill>
+                <a:latin typeface="Arial" pitchFamily="34" charset="0"/>
+                <a:ea typeface="BIZ UDPGothic" pitchFamily="34" charset="-122"/>
+                <a:cs typeface="BIZ UDPGothic" pitchFamily="34" charset="-120"/>
               </a:rPr>
               <a:t>18歳が自覚なく「とりあえず大学」へ進学。4年間の実態は就職活動の準備期間にすぎない</a:t>
             </a:r>
@@ -8388,11 +8388,11 @@
             </a:avLst>
           </a:prstGeom>
           <a:solidFill>
-            <a:srgbClr val="1A1A1A"/>
+            <a:srgbClr val="FFFFFF"/>
           </a:solidFill>
           <a:ln w="12700">
             <a:solidFill>
-              <a:srgbClr val="2E2E2E"/>
+              <a:srgbClr val="DDE0E6"/>
             </a:solidFill>
             <a:prstDash val="solid"/>
           </a:ln>
@@ -8425,11 +8425,11 @@
             <a:r>
               <a:rPr lang="en-US" sz="2600" b="1" dirty="0">
                 <a:solidFill>
-                  <a:srgbClr val="D62828"/>
-                </a:solidFill>
-                <a:latin typeface="Cambria" pitchFamily="34" charset="0"/>
-                <a:ea typeface="Cambria" pitchFamily="34" charset="-122"/>
-                <a:cs typeface="Cambria" pitchFamily="34" charset="-120"/>
+                  <a:srgbClr val="C8161D"/>
+                </a:solidFill>
+                <a:latin typeface="BIZ UDPGothic" pitchFamily="34" charset="0"/>
+                <a:ea typeface="BIZ UDPGothic" pitchFamily="34" charset="-122"/>
+                <a:cs typeface="BIZ UDPGothic" pitchFamily="34" charset="-120"/>
               </a:rPr>
               <a:t>02</a:t>
             </a:r>
@@ -8452,11 +8452,11 @@
             <a:avLst/>
           </a:prstGeom>
           <a:solidFill>
-            <a:srgbClr val="2E2E2E"/>
+            <a:srgbClr val="DDE0E6"/>
           </a:solidFill>
           <a:ln w="12700">
             <a:solidFill>
-              <a:srgbClr val="2E2E2E"/>
+              <a:srgbClr val="DDE0E6"/>
             </a:solidFill>
             <a:prstDash val="solid"/>
           </a:ln>
@@ -8489,11 +8489,11 @@
             <a:r>
               <a:rPr lang="en-US" sz="1400" b="1" dirty="0">
                 <a:solidFill>
-                  <a:srgbClr val="F5F5F0"/>
-                </a:solidFill>
-                <a:latin typeface="Cambria" pitchFamily="34" charset="0"/>
-                <a:ea typeface="Cambria" pitchFamily="34" charset="-122"/>
-                <a:cs typeface="Cambria" pitchFamily="34" charset="-120"/>
+                  <a:srgbClr val="16181D"/>
+                </a:solidFill>
+                <a:latin typeface="BIZ UDPGothic" pitchFamily="34" charset="0"/>
+                <a:ea typeface="BIZ UDPGothic" pitchFamily="34" charset="-122"/>
+                <a:cs typeface="BIZ UDPGothic" pitchFamily="34" charset="-120"/>
               </a:rPr>
               <a:t>巨額の奨学金債務</a:t>
             </a:r>
@@ -8528,11 +8528,11 @@
             <a:r>
               <a:rPr lang="en-US" sz="1100" dirty="0">
                 <a:solidFill>
-                  <a:srgbClr val="CCCCCC"/>
-                </a:solidFill>
-                <a:latin typeface="Arial" pitchFamily="34" charset="0"/>
-                <a:ea typeface="Arial" pitchFamily="34" charset="-122"/>
-                <a:cs typeface="Arial" pitchFamily="34" charset="-120"/>
+                  <a:srgbClr val="2B2F36"/>
+                </a:solidFill>
+                <a:latin typeface="Arial" pitchFamily="34" charset="0"/>
+                <a:ea typeface="BIZ UDPGothic" pitchFamily="34" charset="-122"/>
+                <a:cs typeface="BIZ UDPGothic" pitchFamily="34" charset="-120"/>
               </a:rPr>
               <a:t>自覚のない期間のために数百万円の借金を背負い、社会人になる前から負債がスタートする</a:t>
             </a:r>
@@ -8557,11 +8557,11 @@
             </a:avLst>
           </a:prstGeom>
           <a:solidFill>
-            <a:srgbClr val="1A1A1A"/>
+            <a:srgbClr val="FFFFFF"/>
           </a:solidFill>
           <a:ln w="12700">
             <a:solidFill>
-              <a:srgbClr val="2E2E2E"/>
+              <a:srgbClr val="DDE0E6"/>
             </a:solidFill>
             <a:prstDash val="solid"/>
           </a:ln>
@@ -8594,11 +8594,11 @@
             <a:r>
               <a:rPr lang="en-US" sz="2600" b="1" dirty="0">
                 <a:solidFill>
-                  <a:srgbClr val="D62828"/>
-                </a:solidFill>
-                <a:latin typeface="Cambria" pitchFamily="34" charset="0"/>
-                <a:ea typeface="Cambria" pitchFamily="34" charset="-122"/>
-                <a:cs typeface="Cambria" pitchFamily="34" charset="-120"/>
+                  <a:srgbClr val="C8161D"/>
+                </a:solidFill>
+                <a:latin typeface="BIZ UDPGothic" pitchFamily="34" charset="0"/>
+                <a:ea typeface="BIZ UDPGothic" pitchFamily="34" charset="-122"/>
+                <a:cs typeface="BIZ UDPGothic" pitchFamily="34" charset="-120"/>
               </a:rPr>
               <a:t>03</a:t>
             </a:r>
@@ -8621,11 +8621,11 @@
             <a:avLst/>
           </a:prstGeom>
           <a:solidFill>
-            <a:srgbClr val="2E2E2E"/>
+            <a:srgbClr val="DDE0E6"/>
           </a:solidFill>
           <a:ln w="12700">
             <a:solidFill>
-              <a:srgbClr val="2E2E2E"/>
+              <a:srgbClr val="DDE0E6"/>
             </a:solidFill>
             <a:prstDash val="solid"/>
           </a:ln>
@@ -8658,11 +8658,11 @@
             <a:r>
               <a:rPr lang="en-US" sz="1400" b="1" dirty="0">
                 <a:solidFill>
-                  <a:srgbClr val="F5F5F0"/>
-                </a:solidFill>
-                <a:latin typeface="Cambria" pitchFamily="34" charset="0"/>
-                <a:ea typeface="Cambria" pitchFamily="34" charset="-122"/>
-                <a:cs typeface="Cambria" pitchFamily="34" charset="-120"/>
+                  <a:srgbClr val="16181D"/>
+                </a:solidFill>
+                <a:latin typeface="BIZ UDPGothic" pitchFamily="34" charset="0"/>
+                <a:ea typeface="BIZ UDPGothic" pitchFamily="34" charset="-122"/>
+                <a:cs typeface="BIZ UDPGothic" pitchFamily="34" charset="-120"/>
               </a:rPr>
               <a:t>「大卒」という空虚な基準</a:t>
             </a:r>
@@ -8697,11 +8697,11 @@
             <a:r>
               <a:rPr lang="en-US" sz="1100" dirty="0">
                 <a:solidFill>
-                  <a:srgbClr val="CCCCCC"/>
-                </a:solidFill>
-                <a:latin typeface="Arial" pitchFamily="34" charset="0"/>
-                <a:ea typeface="Arial" pitchFamily="34" charset="-122"/>
-                <a:cs typeface="Arial" pitchFamily="34" charset="-120"/>
+                  <a:srgbClr val="2B2F36"/>
+                </a:solidFill>
+                <a:latin typeface="Arial" pitchFamily="34" charset="0"/>
+                <a:ea typeface="BIZ UDPGothic" pitchFamily="34" charset="-122"/>
+                <a:cs typeface="BIZ UDPGothic" pitchFamily="34" charset="-120"/>
               </a:rPr>
               <a:t>企業は中身ではなく肩書きで採用し、社会全体が「とりあえず大学」の強迫観念に縛られ続ける</a:t>
             </a:r>
@@ -8723,7 +8723,7 @@
     <p:bg>
       <p:bgPr>
         <a:solidFill>
-          <a:srgbClr val="0A0A0A"/>
+          <a:srgbClr val="F5F6F8"/>
         </a:solidFill>
       </p:bgPr>
     </p:bg>
@@ -8768,11 +8768,11 @@
             <a:r>
               <a:rPr lang="en-US" sz="900" b="1" spc="400" kern="0" dirty="0">
                 <a:solidFill>
-                  <a:srgbClr val="D62828"/>
-                </a:solidFill>
-                <a:latin typeface="Arial" pitchFamily="34" charset="0"/>
-                <a:ea typeface="Arial" pitchFamily="34" charset="-122"/>
-                <a:cs typeface="Arial" pitchFamily="34" charset="-120"/>
+                  <a:srgbClr val="C8161D"/>
+                </a:solidFill>
+                <a:latin typeface="Arial" pitchFamily="34" charset="0"/>
+                <a:ea typeface="BIZ UDPGothic" pitchFamily="34" charset="-122"/>
+                <a:cs typeface="BIZ UDPGothic" pitchFamily="34" charset="-120"/>
               </a:rPr>
               <a:t>OVERVIEW</a:t>
             </a:r>
@@ -8807,11 +8807,11 @@
             <a:r>
               <a:rPr lang="en-US" sz="3600" b="1" dirty="0">
                 <a:solidFill>
-                  <a:srgbClr val="F5F5F0"/>
-                </a:solidFill>
-                <a:latin typeface="Cambria" pitchFamily="34" charset="0"/>
-                <a:ea typeface="Cambria" pitchFamily="34" charset="-122"/>
-                <a:cs typeface="Cambria" pitchFamily="34" charset="-120"/>
+                  <a:srgbClr val="16181D"/>
+                </a:solidFill>
+                <a:latin typeface="BIZ UDPGothic" pitchFamily="34" charset="0"/>
+                <a:ea typeface="BIZ UDPGothic" pitchFamily="34" charset="-122"/>
+                <a:cs typeface="BIZ UDPGothic" pitchFamily="34" charset="-120"/>
               </a:rPr>
               <a:t>改革の全体像</a:t>
             </a:r>
@@ -8834,11 +8834,11 @@
             <a:avLst/>
           </a:prstGeom>
           <a:solidFill>
-            <a:srgbClr val="2E2E2E"/>
+            <a:srgbClr val="DDE0E6"/>
           </a:solidFill>
           <a:ln w="12700">
             <a:solidFill>
-              <a:srgbClr val="2E2E2E"/>
+              <a:srgbClr val="DDE0E6"/>
             </a:solidFill>
             <a:prstDash val="solid"/>
           </a:ln>
@@ -8871,11 +8871,11 @@
             <a:r>
               <a:rPr lang="en-US" sz="1100" dirty="0">
                 <a:solidFill>
-                  <a:srgbClr val="CCCCCC"/>
-                </a:solidFill>
-                <a:latin typeface="Arial" pitchFamily="34" charset="0"/>
-                <a:ea typeface="Arial" pitchFamily="34" charset="-122"/>
-                <a:cs typeface="Arial" pitchFamily="34" charset="-120"/>
+                  <a:srgbClr val="2B2F36"/>
+                </a:solidFill>
+                <a:latin typeface="Arial" pitchFamily="34" charset="0"/>
+                <a:ea typeface="BIZ UDPGothic" pitchFamily="34" charset="-122"/>
+                <a:cs typeface="BIZ UDPGothic" pitchFamily="34" charset="-120"/>
               </a:rPr>
               <a:t>高校3年間で教養を完結 → 18歳以降は目的と適性に応じて3ルートに完全分離</a:t>
             </a:r>
@@ -8900,11 +8900,11 @@
             </a:avLst>
           </a:prstGeom>
           <a:solidFill>
-            <a:srgbClr val="1A1A1A"/>
+            <a:srgbClr val="FFFFFF"/>
           </a:solidFill>
           <a:ln w="12700">
             <a:solidFill>
-              <a:srgbClr val="2E2E2E"/>
+              <a:srgbClr val="DDE0E6"/>
             </a:solidFill>
             <a:prstDash val="solid"/>
           </a:ln>
@@ -8937,11 +8937,11 @@
             <a:r>
               <a:rPr lang="en-US" sz="1200" b="1" dirty="0">
                 <a:solidFill>
-                  <a:srgbClr val="F5F5F0"/>
-                </a:solidFill>
-                <a:latin typeface="Cambria" pitchFamily="34" charset="0"/>
-                <a:ea typeface="Cambria" pitchFamily="34" charset="-122"/>
-                <a:cs typeface="Cambria" pitchFamily="34" charset="-120"/>
+                  <a:srgbClr val="16181D"/>
+                </a:solidFill>
+                <a:latin typeface="BIZ UDPGothic" pitchFamily="34" charset="0"/>
+                <a:ea typeface="BIZ UDPGothic" pitchFamily="34" charset="-122"/>
+                <a:cs typeface="BIZ UDPGothic" pitchFamily="34" charset="-120"/>
               </a:rPr>
               <a:t>【前提改革】高校教育の再設計（1年：基礎　2年：自由選択　3年：社会リテラシー）</a:t>
             </a:r>
@@ -8976,11 +8976,11 @@
             <a:r>
               <a:rPr lang="en-US" sz="1200" b="1" dirty="0">
                 <a:solidFill>
-                  <a:srgbClr val="D62828"/>
-                </a:solidFill>
-                <a:latin typeface="Arial" pitchFamily="34" charset="0"/>
-                <a:ea typeface="Arial" pitchFamily="34" charset="-122"/>
-                <a:cs typeface="Arial" pitchFamily="34" charset="-120"/>
+                  <a:srgbClr val="C8161D"/>
+                </a:solidFill>
+                <a:latin typeface="Arial" pitchFamily="34" charset="0"/>
+                <a:ea typeface="BIZ UDPGothic" pitchFamily="34" charset="-122"/>
+                <a:cs typeface="BIZ UDPGothic" pitchFamily="34" charset="-120"/>
               </a:rPr>
               <a:t>↓  18歳  ↓</a:t>
             </a:r>
@@ -9005,11 +9005,11 @@
             </a:avLst>
           </a:prstGeom>
           <a:solidFill>
-            <a:srgbClr val="141414"/>
+            <a:srgbClr val="FFFFFF"/>
           </a:solidFill>
           <a:ln w="12700">
             <a:solidFill>
-              <a:srgbClr val="2E2E2E"/>
+              <a:srgbClr val="DDE0E6"/>
             </a:solidFill>
             <a:prstDash val="solid"/>
           </a:ln>
@@ -9032,11 +9032,11 @@
             </a:avLst>
           </a:prstGeom>
           <a:solidFill>
-            <a:srgbClr val="D62828"/>
+            <a:srgbClr val="C8161D"/>
           </a:solidFill>
           <a:ln w="12700">
             <a:solidFill>
-              <a:srgbClr val="D62828"/>
+              <a:srgbClr val="C8161D"/>
             </a:solidFill>
             <a:prstDash val="solid"/>
           </a:ln>
@@ -9069,11 +9069,11 @@
             <a:r>
               <a:rPr lang="en-US" sz="1800" b="1" dirty="0">
                 <a:solidFill>
-                  <a:srgbClr val="F5F5F0"/>
-                </a:solidFill>
-                <a:latin typeface="Arial" pitchFamily="34" charset="0"/>
-                <a:ea typeface="Arial" pitchFamily="34" charset="-122"/>
-                <a:cs typeface="Arial" pitchFamily="34" charset="-120"/>
+                  <a:srgbClr val="FFFFFF"/>
+                </a:solidFill>
+                <a:latin typeface="Arial" pitchFamily="34" charset="0"/>
+                <a:ea typeface="BIZ UDPGothic" pitchFamily="34" charset="-122"/>
+                <a:cs typeface="BIZ UDPGothic" pitchFamily="34" charset="-120"/>
               </a:rPr>
               <a:t>①</a:t>
             </a:r>
@@ -9108,11 +9108,11 @@
             <a:r>
               <a:rPr lang="en-US" sz="1300" b="1" dirty="0">
                 <a:solidFill>
-                  <a:srgbClr val="F5F5F0"/>
-                </a:solidFill>
-                <a:latin typeface="Cambria" pitchFamily="34" charset="0"/>
-                <a:ea typeface="Cambria" pitchFamily="34" charset="-122"/>
-                <a:cs typeface="Cambria" pitchFamily="34" charset="-120"/>
+                  <a:srgbClr val="16181D"/>
+                </a:solidFill>
+                <a:latin typeface="BIZ UDPGothic" pitchFamily="34" charset="0"/>
+                <a:ea typeface="BIZ UDPGothic" pitchFamily="34" charset="-122"/>
+                <a:cs typeface="BIZ UDPGothic" pitchFamily="34" charset="-120"/>
               </a:rPr>
               <a:t>マジョリティ</a:t>
             </a:r>
@@ -9125,11 +9125,11 @@
             <a:r>
               <a:rPr lang="en-US" sz="1300" b="1" dirty="0">
                 <a:solidFill>
-                  <a:srgbClr val="F5F5F0"/>
-                </a:solidFill>
-                <a:latin typeface="Cambria" pitchFamily="34" charset="0"/>
-                <a:ea typeface="Cambria" pitchFamily="34" charset="-122"/>
-                <a:cs typeface="Cambria" pitchFamily="34" charset="-120"/>
+                  <a:srgbClr val="16181D"/>
+                </a:solidFill>
+                <a:latin typeface="BIZ UDPGothic" pitchFamily="34" charset="0"/>
+                <a:ea typeface="BIZ UDPGothic" pitchFamily="34" charset="-122"/>
+                <a:cs typeface="BIZ UDPGothic" pitchFamily="34" charset="-120"/>
               </a:rPr>
               <a:t>標準ルート</a:t>
             </a:r>
@@ -9164,11 +9164,11 @@
             <a:r>
               <a:rPr lang="en-US" sz="1000" dirty="0">
                 <a:solidFill>
-                  <a:srgbClr val="CCCCCC"/>
-                </a:solidFill>
-                <a:latin typeface="Arial" pitchFamily="34" charset="0"/>
-                <a:ea typeface="Arial" pitchFamily="34" charset="-122"/>
-                <a:cs typeface="Arial" pitchFamily="34" charset="-120"/>
+                  <a:srgbClr val="2B2F36"/>
+                </a:solidFill>
+                <a:latin typeface="Arial" pitchFamily="34" charset="0"/>
+                <a:ea typeface="BIZ UDPGothic" pitchFamily="34" charset="-122"/>
+                <a:cs typeface="BIZ UDPGothic" pitchFamily="34" charset="-120"/>
               </a:rPr>
               <a:t>9割の一般職</a:t>
             </a:r>
@@ -9181,11 +9181,11 @@
             <a:r>
               <a:rPr lang="en-US" sz="1000" dirty="0">
                 <a:solidFill>
-                  <a:srgbClr val="CCCCCC"/>
-                </a:solidFill>
-                <a:latin typeface="Arial" pitchFamily="34" charset="0"/>
-                <a:ea typeface="Arial" pitchFamily="34" charset="-122"/>
-                <a:cs typeface="Arial" pitchFamily="34" charset="-120"/>
+                  <a:srgbClr val="2B2F36"/>
+                </a:solidFill>
+                <a:latin typeface="Arial" pitchFamily="34" charset="0"/>
+                <a:ea typeface="BIZ UDPGothic" pitchFamily="34" charset="-122"/>
+                <a:cs typeface="BIZ UDPGothic" pitchFamily="34" charset="-120"/>
               </a:rPr>
               <a:t>専門学校2年</a:t>
             </a:r>
@@ -9198,11 +9198,11 @@
             <a:r>
               <a:rPr lang="en-US" sz="1000" dirty="0">
                 <a:solidFill>
-                  <a:srgbClr val="CCCCCC"/>
-                </a:solidFill>
-                <a:latin typeface="Arial" pitchFamily="34" charset="0"/>
-                <a:ea typeface="Arial" pitchFamily="34" charset="-122"/>
-                <a:cs typeface="Arial" pitchFamily="34" charset="-120"/>
+                  <a:srgbClr val="2B2F36"/>
+                </a:solidFill>
+                <a:latin typeface="Arial" pitchFamily="34" charset="0"/>
+                <a:ea typeface="BIZ UDPGothic" pitchFamily="34" charset="-122"/>
+                <a:cs typeface="BIZ UDPGothic" pitchFamily="34" charset="-120"/>
               </a:rPr>
               <a:t>21歳社会人スタート</a:t>
             </a:r>
@@ -9227,11 +9227,11 @@
             </a:avLst>
           </a:prstGeom>
           <a:solidFill>
-            <a:srgbClr val="141420"/>
+            <a:srgbClr val="E9EFF8"/>
           </a:solidFill>
           <a:ln w="12700">
             <a:solidFill>
-              <a:srgbClr val="2E2E2E"/>
+              <a:srgbClr val="DDE0E6"/>
             </a:solidFill>
             <a:prstDash val="solid"/>
           </a:ln>
@@ -9254,11 +9254,11 @@
             </a:avLst>
           </a:prstGeom>
           <a:solidFill>
-            <a:srgbClr val="D62828"/>
+            <a:srgbClr val="C8161D"/>
           </a:solidFill>
           <a:ln w="12700">
             <a:solidFill>
-              <a:srgbClr val="D62828"/>
+              <a:srgbClr val="C8161D"/>
             </a:solidFill>
             <a:prstDash val="solid"/>
           </a:ln>
@@ -9291,11 +9291,11 @@
             <a:r>
               <a:rPr lang="en-US" sz="1800" b="1" dirty="0">
                 <a:solidFill>
-                  <a:srgbClr val="F5F5F0"/>
-                </a:solidFill>
-                <a:latin typeface="Arial" pitchFamily="34" charset="0"/>
-                <a:ea typeface="Arial" pitchFamily="34" charset="-122"/>
-                <a:cs typeface="Arial" pitchFamily="34" charset="-120"/>
+                  <a:srgbClr val="FFFFFF"/>
+                </a:solidFill>
+                <a:latin typeface="Arial" pitchFamily="34" charset="0"/>
+                <a:ea typeface="BIZ UDPGothic" pitchFamily="34" charset="-122"/>
+                <a:cs typeface="BIZ UDPGothic" pitchFamily="34" charset="-120"/>
               </a:rPr>
               <a:t>②</a:t>
             </a:r>
@@ -9330,11 +9330,11 @@
             <a:r>
               <a:rPr lang="en-US" sz="1300" b="1" dirty="0">
                 <a:solidFill>
-                  <a:srgbClr val="F5F5F0"/>
-                </a:solidFill>
-                <a:latin typeface="Cambria" pitchFamily="34" charset="0"/>
-                <a:ea typeface="Cambria" pitchFamily="34" charset="-122"/>
-                <a:cs typeface="Cambria" pitchFamily="34" charset="-120"/>
+                  <a:srgbClr val="16181D"/>
+                </a:solidFill>
+                <a:latin typeface="BIZ UDPGothic" pitchFamily="34" charset="0"/>
+                <a:ea typeface="BIZ UDPGothic" pitchFamily="34" charset="-122"/>
+                <a:cs typeface="BIZ UDPGothic" pitchFamily="34" charset="-120"/>
               </a:rPr>
               <a:t>国家戦略</a:t>
             </a:r>
@@ -9347,11 +9347,11 @@
             <a:r>
               <a:rPr lang="en-US" sz="1300" b="1" dirty="0">
                 <a:solidFill>
-                  <a:srgbClr val="F5F5F0"/>
-                </a:solidFill>
-                <a:latin typeface="Cambria" pitchFamily="34" charset="0"/>
-                <a:ea typeface="Cambria" pitchFamily="34" charset="-122"/>
-                <a:cs typeface="Cambria" pitchFamily="34" charset="-120"/>
+                  <a:srgbClr val="16181D"/>
+                </a:solidFill>
+                <a:latin typeface="BIZ UDPGothic" pitchFamily="34" charset="0"/>
+                <a:ea typeface="BIZ UDPGothic" pitchFamily="34" charset="-122"/>
+                <a:cs typeface="BIZ UDPGothic" pitchFamily="34" charset="-120"/>
               </a:rPr>
               <a:t>特殊ルート</a:t>
             </a:r>
@@ -9386,11 +9386,11 @@
             <a:r>
               <a:rPr lang="en-US" sz="1000" dirty="0">
                 <a:solidFill>
-                  <a:srgbClr val="CCCCCC"/>
-                </a:solidFill>
-                <a:latin typeface="Arial" pitchFamily="34" charset="0"/>
-                <a:ea typeface="Arial" pitchFamily="34" charset="-122"/>
-                <a:cs typeface="Arial" pitchFamily="34" charset="-120"/>
+                  <a:srgbClr val="2B2F36"/>
+                </a:solidFill>
+                <a:latin typeface="Arial" pitchFamily="34" charset="0"/>
+                <a:ea typeface="BIZ UDPGothic" pitchFamily="34" charset="-122"/>
+                <a:cs typeface="BIZ UDPGothic" pitchFamily="34" charset="-120"/>
               </a:rPr>
               <a:t>医療・公安・防衛</a:t>
             </a:r>
@@ -9403,11 +9403,11 @@
             <a:r>
               <a:rPr lang="en-US" sz="1000" dirty="0">
                 <a:solidFill>
-                  <a:srgbClr val="CCCCCC"/>
-                </a:solidFill>
-                <a:latin typeface="Arial" pitchFamily="34" charset="0"/>
-                <a:ea typeface="Arial" pitchFamily="34" charset="-122"/>
-                <a:cs typeface="Arial" pitchFamily="34" charset="-120"/>
+                  <a:srgbClr val="2B2F36"/>
+                </a:solidFill>
+                <a:latin typeface="Arial" pitchFamily="34" charset="0"/>
+                <a:ea typeface="BIZ UDPGothic" pitchFamily="34" charset="-122"/>
+                <a:cs typeface="BIZ UDPGothic" pitchFamily="34" charset="-120"/>
               </a:rPr>
               <a:t>国費＋自費一部</a:t>
             </a:r>
@@ -9420,11 +9420,11 @@
             <a:r>
               <a:rPr lang="en-US" sz="1000" dirty="0">
                 <a:solidFill>
-                  <a:srgbClr val="CCCCCC"/>
-                </a:solidFill>
-                <a:latin typeface="Arial" pitchFamily="34" charset="0"/>
-                <a:ea typeface="Arial" pitchFamily="34" charset="-122"/>
-                <a:cs typeface="Arial" pitchFamily="34" charset="-120"/>
+                  <a:srgbClr val="2B2F36"/>
+                </a:solidFill>
+                <a:latin typeface="Arial" pitchFamily="34" charset="0"/>
+                <a:ea typeface="BIZ UDPGothic" pitchFamily="34" charset="-122"/>
+                <a:cs typeface="BIZ UDPGothic" pitchFamily="34" charset="-120"/>
               </a:rPr>
               <a:t>10年従事義務</a:t>
             </a:r>
@@ -9449,11 +9449,11 @@
             </a:avLst>
           </a:prstGeom>
           <a:solidFill>
-            <a:srgbClr val="201414"/>
+            <a:srgbClr val="FCEBEB"/>
           </a:solidFill>
           <a:ln w="12700">
             <a:solidFill>
-              <a:srgbClr val="2E2E2E"/>
+              <a:srgbClr val="DDE0E6"/>
             </a:solidFill>
             <a:prstDash val="solid"/>
           </a:ln>
@@ -9476,11 +9476,11 @@
             </a:avLst>
           </a:prstGeom>
           <a:solidFill>
-            <a:srgbClr val="D62828"/>
+            <a:srgbClr val="C8161D"/>
           </a:solidFill>
           <a:ln w="12700">
             <a:solidFill>
-              <a:srgbClr val="D62828"/>
+              <a:srgbClr val="C8161D"/>
             </a:solidFill>
             <a:prstDash val="solid"/>
           </a:ln>
@@ -9513,11 +9513,11 @@
             <a:r>
               <a:rPr lang="en-US" sz="1800" b="1" dirty="0">
                 <a:solidFill>
-                  <a:srgbClr val="F5F5F0"/>
-                </a:solidFill>
-                <a:latin typeface="Arial" pitchFamily="34" charset="0"/>
-                <a:ea typeface="Arial" pitchFamily="34" charset="-122"/>
-                <a:cs typeface="Arial" pitchFamily="34" charset="-120"/>
+                  <a:srgbClr val="FFFFFF"/>
+                </a:solidFill>
+                <a:latin typeface="Arial" pitchFamily="34" charset="0"/>
+                <a:ea typeface="BIZ UDPGothic" pitchFamily="34" charset="-122"/>
+                <a:cs typeface="BIZ UDPGothic" pitchFamily="34" charset="-120"/>
               </a:rPr>
               <a:t>③</a:t>
             </a:r>
@@ -9552,11 +9552,11 @@
             <a:r>
               <a:rPr lang="en-US" sz="1300" b="1" dirty="0">
                 <a:solidFill>
-                  <a:srgbClr val="F5F5F0"/>
-                </a:solidFill>
-                <a:latin typeface="Cambria" pitchFamily="34" charset="0"/>
-                <a:ea typeface="Cambria" pitchFamily="34" charset="-122"/>
-                <a:cs typeface="Cambria" pitchFamily="34" charset="-120"/>
+                  <a:srgbClr val="16181D"/>
+                </a:solidFill>
+                <a:latin typeface="BIZ UDPGothic" pitchFamily="34" charset="0"/>
+                <a:ea typeface="BIZ UDPGothic" pitchFamily="34" charset="-122"/>
+                <a:cs typeface="BIZ UDPGothic" pitchFamily="34" charset="-120"/>
               </a:rPr>
               <a:t>天才・研究者</a:t>
             </a:r>
@@ -9569,11 +9569,11 @@
             <a:r>
               <a:rPr lang="en-US" sz="1300" b="1" dirty="0">
                 <a:solidFill>
-                  <a:srgbClr val="F5F5F0"/>
-                </a:solidFill>
-                <a:latin typeface="Cambria" pitchFamily="34" charset="0"/>
-                <a:ea typeface="Cambria" pitchFamily="34" charset="-122"/>
-                <a:cs typeface="Cambria" pitchFamily="34" charset="-120"/>
+                  <a:srgbClr val="16181D"/>
+                </a:solidFill>
+                <a:latin typeface="BIZ UDPGothic" pitchFamily="34" charset="0"/>
+                <a:ea typeface="BIZ UDPGothic" pitchFamily="34" charset="-122"/>
+                <a:cs typeface="BIZ UDPGothic" pitchFamily="34" charset="-120"/>
               </a:rPr>
               <a:t>ルート</a:t>
             </a:r>
@@ -9608,11 +9608,11 @@
             <a:r>
               <a:rPr lang="en-US" sz="1000" dirty="0">
                 <a:solidFill>
-                  <a:srgbClr val="CCCCCC"/>
-                </a:solidFill>
-                <a:latin typeface="Arial" pitchFamily="34" charset="0"/>
-                <a:ea typeface="Arial" pitchFamily="34" charset="-122"/>
-                <a:cs typeface="Arial" pitchFamily="34" charset="-120"/>
+                  <a:srgbClr val="2B2F36"/>
+                </a:solidFill>
+                <a:latin typeface="Arial" pitchFamily="34" charset="0"/>
+                <a:ea typeface="BIZ UDPGothic" pitchFamily="34" charset="-122"/>
+                <a:cs typeface="BIZ UDPGothic" pitchFamily="34" charset="-120"/>
               </a:rPr>
               <a:t>上位数％</a:t>
             </a:r>
@@ -9625,11 +9625,11 @@
             <a:r>
               <a:rPr lang="en-US" sz="1000" dirty="0">
                 <a:solidFill>
-                  <a:srgbClr val="CCCCCC"/>
-                </a:solidFill>
-                <a:latin typeface="Arial" pitchFamily="34" charset="0"/>
-                <a:ea typeface="Arial" pitchFamily="34" charset="-122"/>
-                <a:cs typeface="Arial" pitchFamily="34" charset="-120"/>
+                  <a:srgbClr val="2B2F36"/>
+                </a:solidFill>
+                <a:latin typeface="Arial" pitchFamily="34" charset="0"/>
+                <a:ea typeface="BIZ UDPGothic" pitchFamily="34" charset="-122"/>
+                <a:cs typeface="BIZ UDPGothic" pitchFamily="34" charset="-120"/>
               </a:rPr>
               <a:t>国費完全無償</a:t>
             </a:r>
@@ -9642,11 +9642,11 @@
             <a:r>
               <a:rPr lang="en-US" sz="1000" dirty="0">
                 <a:solidFill>
-                  <a:srgbClr val="CCCCCC"/>
-                </a:solidFill>
-                <a:latin typeface="Arial" pitchFamily="34" charset="0"/>
-                <a:ea typeface="Arial" pitchFamily="34" charset="-122"/>
-                <a:cs typeface="Arial" pitchFamily="34" charset="-120"/>
+                  <a:srgbClr val="2B2F36"/>
+                </a:solidFill>
+                <a:latin typeface="Arial" pitchFamily="34" charset="0"/>
+                <a:ea typeface="BIZ UDPGothic" pitchFamily="34" charset="-122"/>
+                <a:cs typeface="BIZ UDPGothic" pitchFamily="34" charset="-120"/>
               </a:rPr>
               <a:t>18歳直通研究</a:t>
             </a:r>
@@ -9668,7 +9668,7 @@
     <p:bg>
       <p:bgPr>
         <a:solidFill>
-          <a:srgbClr val="0A0A0A"/>
+          <a:srgbClr val="F5F6F8"/>
         </a:solidFill>
       </p:bgPr>
     </p:bg>
@@ -9713,11 +9713,11 @@
             <a:r>
               <a:rPr lang="en-US" sz="900" b="1" spc="400" kern="0" dirty="0">
                 <a:solidFill>
-                  <a:srgbClr val="D62828"/>
-                </a:solidFill>
-                <a:latin typeface="Arial" pitchFamily="34" charset="0"/>
-                <a:ea typeface="Arial" pitchFamily="34" charset="-122"/>
-                <a:cs typeface="Arial" pitchFamily="34" charset="-120"/>
+                  <a:srgbClr val="C8161D"/>
+                </a:solidFill>
+                <a:latin typeface="Arial" pitchFamily="34" charset="0"/>
+                <a:ea typeface="BIZ UDPGothic" pitchFamily="34" charset="-122"/>
+                <a:cs typeface="BIZ UDPGothic" pitchFamily="34" charset="-120"/>
               </a:rPr>
               <a:t>PREREQUISITE REFORM</a:t>
             </a:r>
@@ -9752,11 +9752,11 @@
             <a:r>
               <a:rPr lang="en-US" sz="2600" b="1" dirty="0">
                 <a:solidFill>
-                  <a:srgbClr val="F5F5F0"/>
-                </a:solidFill>
-                <a:latin typeface="Cambria" pitchFamily="34" charset="0"/>
-                <a:ea typeface="Cambria" pitchFamily="34" charset="-122"/>
-                <a:cs typeface="Cambria" pitchFamily="34" charset="-120"/>
+                  <a:srgbClr val="16181D"/>
+                </a:solidFill>
+                <a:latin typeface="BIZ UDPGothic" pitchFamily="34" charset="0"/>
+                <a:ea typeface="BIZ UDPGothic" pitchFamily="34" charset="-122"/>
+                <a:cs typeface="BIZ UDPGothic" pitchFamily="34" charset="-120"/>
               </a:rPr>
               <a:t>高校教育の再設計：3学年の役割を明確に分離する</a:t>
             </a:r>
@@ -9779,11 +9779,11 @@
             <a:avLst/>
           </a:prstGeom>
           <a:solidFill>
-            <a:srgbClr val="2E2E2E"/>
+            <a:srgbClr val="DDE0E6"/>
           </a:solidFill>
           <a:ln w="12700">
             <a:solidFill>
-              <a:srgbClr val="2E2E2E"/>
+              <a:srgbClr val="DDE0E6"/>
             </a:solidFill>
             <a:prstDash val="solid"/>
           </a:ln>
@@ -9806,11 +9806,11 @@
             </a:avLst>
           </a:prstGeom>
           <a:solidFill>
-            <a:srgbClr val="141414"/>
+            <a:srgbClr val="FFFFFF"/>
           </a:solidFill>
           <a:ln w="12700">
             <a:solidFill>
-              <a:srgbClr val="2E2E2E"/>
+              <a:srgbClr val="DDE0E6"/>
             </a:solidFill>
             <a:prstDash val="solid"/>
           </a:ln>
@@ -9833,11 +9833,11 @@
             </a:avLst>
           </a:prstGeom>
           <a:solidFill>
-            <a:srgbClr val="D62828"/>
+            <a:srgbClr val="C8161D"/>
           </a:solidFill>
           <a:ln w="12700">
             <a:solidFill>
-              <a:srgbClr val="D62828"/>
+              <a:srgbClr val="C8161D"/>
             </a:solidFill>
             <a:prstDash val="solid"/>
           </a:ln>
@@ -9870,11 +9870,11 @@
             <a:r>
               <a:rPr lang="en-US" sz="1400" b="1" dirty="0">
                 <a:solidFill>
-                  <a:srgbClr val="F5F5F0"/>
-                </a:solidFill>
-                <a:latin typeface="Arial" pitchFamily="34" charset="0"/>
-                <a:ea typeface="Arial" pitchFamily="34" charset="-122"/>
-                <a:cs typeface="Arial" pitchFamily="34" charset="-120"/>
+                  <a:srgbClr val="FFFFFF"/>
+                </a:solidFill>
+                <a:latin typeface="Arial" pitchFamily="34" charset="0"/>
+                <a:ea typeface="BIZ UDPGothic" pitchFamily="34" charset="-122"/>
+                <a:cs typeface="BIZ UDPGothic" pitchFamily="34" charset="-120"/>
               </a:rPr>
               <a:t>1年</a:t>
             </a:r>
@@ -9909,11 +9909,11 @@
             <a:r>
               <a:rPr lang="en-US" sz="1400" b="1" dirty="0">
                 <a:solidFill>
-                  <a:srgbClr val="F5F5F0"/>
-                </a:solidFill>
-                <a:latin typeface="Cambria" pitchFamily="34" charset="0"/>
-                <a:ea typeface="Cambria" pitchFamily="34" charset="-122"/>
-                <a:cs typeface="Cambria" pitchFamily="34" charset="-120"/>
+                  <a:srgbClr val="16181D"/>
+                </a:solidFill>
+                <a:latin typeface="BIZ UDPGothic" pitchFamily="34" charset="0"/>
+                <a:ea typeface="BIZ UDPGothic" pitchFamily="34" charset="-122"/>
+                <a:cs typeface="BIZ UDPGothic" pitchFamily="34" charset="-120"/>
               </a:rPr>
               <a:t>基礎教養の完成</a:t>
             </a:r>
@@ -9948,11 +9948,11 @@
             <a:r>
               <a:rPr lang="en-US" sz="1000" dirty="0">
                 <a:solidFill>
-                  <a:srgbClr val="CCCCCC"/>
-                </a:solidFill>
-                <a:latin typeface="Arial" pitchFamily="34" charset="0"/>
-                <a:ea typeface="Arial" pitchFamily="34" charset="-122"/>
-                <a:cs typeface="Arial" pitchFamily="34" charset="-120"/>
+                  <a:srgbClr val="2B2F36"/>
+                </a:solidFill>
+                <a:latin typeface="Arial" pitchFamily="34" charset="0"/>
+                <a:ea typeface="BIZ UDPGothic" pitchFamily="34" charset="-122"/>
+                <a:cs typeface="BIZ UDPGothic" pitchFamily="34" charset="-120"/>
               </a:rPr>
               <a:t>中学教育の延長。全員が共通して持つべき土台を揃える。数学・国語・理科・社会の基礎を確実に完結させる。</a:t>
             </a:r>
@@ -9977,11 +9977,11 @@
             </a:avLst>
           </a:prstGeom>
           <a:solidFill>
-            <a:srgbClr val="141420"/>
+            <a:srgbClr val="E9EFF8"/>
           </a:solidFill>
           <a:ln w="12700">
             <a:solidFill>
-              <a:srgbClr val="2E2E2E"/>
+              <a:srgbClr val="DDE0E6"/>
             </a:solidFill>
             <a:prstDash val="solid"/>
           </a:ln>
@@ -10004,11 +10004,11 @@
             </a:avLst>
           </a:prstGeom>
           <a:solidFill>
-            <a:srgbClr val="D62828"/>
+            <a:srgbClr val="C8161D"/>
           </a:solidFill>
           <a:ln w="12700">
             <a:solidFill>
-              <a:srgbClr val="D62828"/>
+              <a:srgbClr val="C8161D"/>
             </a:solidFill>
             <a:prstDash val="solid"/>
           </a:ln>
@@ -10041,11 +10041,11 @@
             <a:r>
               <a:rPr lang="en-US" sz="1400" b="1" dirty="0">
                 <a:solidFill>
-                  <a:srgbClr val="F5F5F0"/>
-                </a:solidFill>
-                <a:latin typeface="Arial" pitchFamily="34" charset="0"/>
-                <a:ea typeface="Arial" pitchFamily="34" charset="-122"/>
-                <a:cs typeface="Arial" pitchFamily="34" charset="-120"/>
+                  <a:srgbClr val="FFFFFF"/>
+                </a:solidFill>
+                <a:latin typeface="Arial" pitchFamily="34" charset="0"/>
+                <a:ea typeface="BIZ UDPGothic" pitchFamily="34" charset="-122"/>
+                <a:cs typeface="BIZ UDPGothic" pitchFamily="34" charset="-120"/>
               </a:rPr>
               <a:t>2年</a:t>
             </a:r>
@@ -10080,11 +10080,11 @@
             <a:r>
               <a:rPr lang="en-US" sz="1400" b="1" dirty="0">
                 <a:solidFill>
-                  <a:srgbClr val="F5F5F0"/>
-                </a:solidFill>
-                <a:latin typeface="Cambria" pitchFamily="34" charset="0"/>
-                <a:ea typeface="Cambria" pitchFamily="34" charset="-122"/>
-                <a:cs typeface="Cambria" pitchFamily="34" charset="-120"/>
+                  <a:srgbClr val="16181D"/>
+                </a:solidFill>
+                <a:latin typeface="BIZ UDPGothic" pitchFamily="34" charset="0"/>
+                <a:ea typeface="BIZ UDPGothic" pitchFamily="34" charset="-122"/>
+                <a:cs typeface="BIZ UDPGothic" pitchFamily="34" charset="-120"/>
               </a:rPr>
               <a:t>興味の探索</a:t>
             </a:r>
@@ -10119,11 +10119,11 @@
             <a:r>
               <a:rPr lang="en-US" sz="1000" dirty="0">
                 <a:solidFill>
-                  <a:srgbClr val="CCCCCC"/>
-                </a:solidFill>
-                <a:latin typeface="Arial" pitchFamily="34" charset="0"/>
-                <a:ea typeface="Arial" pitchFamily="34" charset="-122"/>
-                <a:cs typeface="Arial" pitchFamily="34" charset="-120"/>
+                  <a:srgbClr val="2B2F36"/>
+                </a:solidFill>
+                <a:latin typeface="Arial" pitchFamily="34" charset="0"/>
+                <a:ea typeface="BIZ UDPGothic" pitchFamily="34" charset="-122"/>
+                <a:cs typeface="BIZ UDPGothic" pitchFamily="34" charset="-120"/>
               </a:rPr>
               <a:t>文理の壁を完全に撤廃し、数学・哲学・経済学入門・文学・生物学・心理学・歴史などアカデミック教養系科目から本人が自由に組み合わせる。「将来の専門を決める」段階ではなく、自分が何に興味があるかを発見する段階。</a:t>
             </a:r>
@@ -10148,11 +10148,11 @@
             </a:avLst>
           </a:prstGeom>
           <a:solidFill>
-            <a:srgbClr val="141A14"/>
+            <a:srgbClr val="E9EFF8"/>
           </a:solidFill>
           <a:ln w="12700">
             <a:solidFill>
-              <a:srgbClr val="2E2E2E"/>
+              <a:srgbClr val="DDE0E6"/>
             </a:solidFill>
             <a:prstDash val="solid"/>
           </a:ln>
@@ -10175,11 +10175,11 @@
             </a:avLst>
           </a:prstGeom>
           <a:solidFill>
-            <a:srgbClr val="D62828"/>
+            <a:srgbClr val="C8161D"/>
           </a:solidFill>
           <a:ln w="12700">
             <a:solidFill>
-              <a:srgbClr val="D62828"/>
+              <a:srgbClr val="C8161D"/>
             </a:solidFill>
             <a:prstDash val="solid"/>
           </a:ln>
@@ -10212,11 +10212,11 @@
             <a:r>
               <a:rPr lang="en-US" sz="1400" b="1" dirty="0">
                 <a:solidFill>
-                  <a:srgbClr val="F5F5F0"/>
-                </a:solidFill>
-                <a:latin typeface="Arial" pitchFamily="34" charset="0"/>
-                <a:ea typeface="Arial" pitchFamily="34" charset="-122"/>
-                <a:cs typeface="Arial" pitchFamily="34" charset="-120"/>
+                  <a:srgbClr val="FFFFFF"/>
+                </a:solidFill>
+                <a:latin typeface="Arial" pitchFamily="34" charset="0"/>
+                <a:ea typeface="BIZ UDPGothic" pitchFamily="34" charset="-122"/>
+                <a:cs typeface="BIZ UDPGothic" pitchFamily="34" charset="-120"/>
               </a:rPr>
               <a:t>3年</a:t>
             </a:r>
@@ -10251,11 +10251,11 @@
             <a:r>
               <a:rPr lang="en-US" sz="1400" b="1" dirty="0">
                 <a:solidFill>
-                  <a:srgbClr val="F5F5F0"/>
-                </a:solidFill>
-                <a:latin typeface="Cambria" pitchFamily="34" charset="0"/>
-                <a:ea typeface="Cambria" pitchFamily="34" charset="-122"/>
-                <a:cs typeface="Cambria" pitchFamily="34" charset="-120"/>
+                  <a:srgbClr val="16181D"/>
+                </a:solidFill>
+                <a:latin typeface="BIZ UDPGothic" pitchFamily="34" charset="0"/>
+                <a:ea typeface="BIZ UDPGothic" pitchFamily="34" charset="-122"/>
+                <a:cs typeface="BIZ UDPGothic" pitchFamily="34" charset="-120"/>
               </a:rPr>
               <a:t>社会リテラシー</a:t>
             </a:r>
@@ -10290,11 +10290,11 @@
             <a:r>
               <a:rPr lang="en-US" sz="1000" dirty="0">
                 <a:solidFill>
-                  <a:srgbClr val="CCCCCC"/>
-                </a:solidFill>
-                <a:latin typeface="Arial" pitchFamily="34" charset="0"/>
-                <a:ea typeface="Arial" pitchFamily="34" charset="-122"/>
-                <a:cs typeface="Arial" pitchFamily="34" charset="-120"/>
+                  <a:srgbClr val="2B2F36"/>
+                </a:solidFill>
+                <a:latin typeface="Arial" pitchFamily="34" charset="0"/>
+                <a:ea typeface="BIZ UDPGothic" pitchFamily="34" charset="-122"/>
+                <a:cs typeface="BIZ UDPGothic" pitchFamily="34" charset="-120"/>
               </a:rPr>
               <a:t>税制・選挙制度・国会・社会保障・セーフティネット等を学ぶ。「どのルートを選んでも、失敗しても、やり直せる」という事実を制度として理解させ、根拠のある選択を18歳にさせる。</a:t>
             </a:r>
@@ -10316,7 +10316,7 @@
     <p:bg>
       <p:bgPr>
         <a:solidFill>
-          <a:srgbClr val="0A0A0A"/>
+          <a:srgbClr val="F5F6F8"/>
         </a:solidFill>
       </p:bgPr>
     </p:bg>
@@ -10361,11 +10361,11 @@
             <a:r>
               <a:rPr lang="en-US" sz="900" b="1" spc="400" kern="0" dirty="0">
                 <a:solidFill>
-                  <a:srgbClr val="D62828"/>
-                </a:solidFill>
-                <a:latin typeface="Arial" pitchFamily="34" charset="0"/>
-                <a:ea typeface="Arial" pitchFamily="34" charset="-122"/>
-                <a:cs typeface="Arial" pitchFamily="34" charset="-120"/>
+                  <a:srgbClr val="C8161D"/>
+                </a:solidFill>
+                <a:latin typeface="Arial" pitchFamily="34" charset="0"/>
+                <a:ea typeface="BIZ UDPGothic" pitchFamily="34" charset="-122"/>
+                <a:cs typeface="BIZ UDPGothic" pitchFamily="34" charset="-120"/>
               </a:rPr>
               <a:t>HIGH SCHOOL — YEAR 2</a:t>
             </a:r>
@@ -10400,11 +10400,11 @@
             <a:r>
               <a:rPr lang="en-US" sz="3600" b="1" dirty="0">
                 <a:solidFill>
-                  <a:srgbClr val="F5F5F0"/>
-                </a:solidFill>
-                <a:latin typeface="Cambria" pitchFamily="34" charset="0"/>
-                <a:ea typeface="Cambria" pitchFamily="34" charset="-122"/>
-                <a:cs typeface="Cambria" pitchFamily="34" charset="-120"/>
+                  <a:srgbClr val="16181D"/>
+                </a:solidFill>
+                <a:latin typeface="BIZ UDPGothic" pitchFamily="34" charset="0"/>
+                <a:ea typeface="BIZ UDPGothic" pitchFamily="34" charset="-122"/>
+                <a:cs typeface="BIZ UDPGothic" pitchFamily="34" charset="-120"/>
               </a:rPr>
               <a:t>2年生：文理の壁を撤廃した自由選択</a:t>
             </a:r>
@@ -10427,11 +10427,11 @@
             <a:avLst/>
           </a:prstGeom>
           <a:solidFill>
-            <a:srgbClr val="2E2E2E"/>
+            <a:srgbClr val="DDE0E6"/>
           </a:solidFill>
           <a:ln w="12700">
             <a:solidFill>
-              <a:srgbClr val="2E2E2E"/>
+              <a:srgbClr val="DDE0E6"/>
             </a:solidFill>
             <a:prstDash val="solid"/>
           </a:ln>
@@ -10464,11 +10464,11 @@
             <a:r>
               <a:rPr lang="en-US" sz="1100" dirty="0">
                 <a:solidFill>
-                  <a:srgbClr val="CCCCCC"/>
-                </a:solidFill>
-                <a:latin typeface="Arial" pitchFamily="34" charset="0"/>
-                <a:ea typeface="Arial" pitchFamily="34" charset="-122"/>
-                <a:cs typeface="Arial" pitchFamily="34" charset="-120"/>
+                  <a:srgbClr val="2B2F36"/>
+                </a:solidFill>
+                <a:latin typeface="Arial" pitchFamily="34" charset="0"/>
+                <a:ea typeface="BIZ UDPGothic" pitchFamily="34" charset="-122"/>
+                <a:cs typeface="BIZ UDPGothic" pitchFamily="34" charset="-120"/>
               </a:rPr>
               <a:t>「将来の専門を決める」ではなく「自分の興味を発見する」段階として位置づける</a:t>
             </a:r>
@@ -10493,11 +10493,11 @@
             </a:avLst>
           </a:prstGeom>
           <a:solidFill>
-            <a:srgbClr val="1A0808"/>
+            <a:srgbClr val="FCEBEB"/>
           </a:solidFill>
           <a:ln w="12700">
             <a:solidFill>
-              <a:srgbClr val="2E2E2E"/>
+              <a:srgbClr val="DDE0E6"/>
             </a:solidFill>
             <a:prstDash val="solid"/>
           </a:ln>
@@ -10530,11 +10530,11 @@
             <a:r>
               <a:rPr lang="en-US" sz="1500" b="1" dirty="0">
                 <a:solidFill>
-                  <a:srgbClr val="D62828"/>
-                </a:solidFill>
-                <a:latin typeface="Cambria" pitchFamily="34" charset="0"/>
-                <a:ea typeface="Cambria" pitchFamily="34" charset="-122"/>
-                <a:cs typeface="Cambria" pitchFamily="34" charset="-120"/>
+                  <a:srgbClr val="C8161D"/>
+                </a:solidFill>
+                <a:latin typeface="BIZ UDPGothic" pitchFamily="34" charset="0"/>
+                <a:ea typeface="BIZ UDPGothic" pitchFamily="34" charset="-122"/>
+                <a:cs typeface="BIZ UDPGothic" pitchFamily="34" charset="-120"/>
               </a:rPr>
               <a:t>現行</a:t>
             </a:r>
@@ -10573,11 +10573,11 @@
             <a:r>
               <a:rPr lang="en-US" sz="1100" dirty="0">
                 <a:solidFill>
-                  <a:srgbClr val="CCCCCC"/>
-                </a:solidFill>
-                <a:latin typeface="Arial" pitchFamily="34" charset="0"/>
-                <a:ea typeface="Arial" pitchFamily="34" charset="-122"/>
-                <a:cs typeface="Arial" pitchFamily="34" charset="-120"/>
+                  <a:srgbClr val="2B2F36"/>
+                </a:solidFill>
+                <a:latin typeface="Arial" pitchFamily="34" charset="0"/>
+                <a:ea typeface="BIZ UDPGothic" pitchFamily="34" charset="-122"/>
+                <a:cs typeface="BIZ UDPGothic" pitchFamily="34" charset="-120"/>
               </a:rPr>
               <a:t>文系・理系という人工的な分類</a:t>
             </a:r>
@@ -10594,11 +10594,11 @@
             <a:r>
               <a:rPr lang="en-US" sz="1100" dirty="0">
                 <a:solidFill>
-                  <a:srgbClr val="CCCCCC"/>
-                </a:solidFill>
-                <a:latin typeface="Arial" pitchFamily="34" charset="0"/>
-                <a:ea typeface="Arial" pitchFamily="34" charset="-122"/>
-                <a:cs typeface="Arial" pitchFamily="34" charset="-120"/>
+                  <a:srgbClr val="2B2F36"/>
+                </a:solidFill>
+                <a:latin typeface="Arial" pitchFamily="34" charset="0"/>
+                <a:ea typeface="BIZ UDPGothic" pitchFamily="34" charset="-122"/>
+                <a:cs typeface="BIZ UDPGothic" pitchFamily="34" charset="-120"/>
               </a:rPr>
               <a:t>受験科目に縛られた選択</a:t>
             </a:r>
@@ -10615,11 +10615,11 @@
             <a:r>
               <a:rPr lang="en-US" sz="1100" dirty="0">
                 <a:solidFill>
-                  <a:srgbClr val="CCCCCC"/>
-                </a:solidFill>
-                <a:latin typeface="Arial" pitchFamily="34" charset="0"/>
-                <a:ea typeface="Arial" pitchFamily="34" charset="-122"/>
-                <a:cs typeface="Arial" pitchFamily="34" charset="-120"/>
+                  <a:srgbClr val="2B2F36"/>
+                </a:solidFill>
+                <a:latin typeface="Arial" pitchFamily="34" charset="0"/>
+                <a:ea typeface="BIZ UDPGothic" pitchFamily="34" charset="-122"/>
+                <a:cs typeface="BIZ UDPGothic" pitchFamily="34" charset="-120"/>
               </a:rPr>
               <a:t>得意不得意より「大学の要求」が優先</a:t>
             </a:r>
@@ -10636,11 +10636,11 @@
             <a:r>
               <a:rPr lang="en-US" sz="1100" dirty="0">
                 <a:solidFill>
-                  <a:srgbClr val="CCCCCC"/>
-                </a:solidFill>
-                <a:latin typeface="Arial" pitchFamily="34" charset="0"/>
-                <a:ea typeface="Arial" pitchFamily="34" charset="-122"/>
-                <a:cs typeface="Arial" pitchFamily="34" charset="-120"/>
+                  <a:srgbClr val="2B2F36"/>
+                </a:solidFill>
+                <a:latin typeface="Arial" pitchFamily="34" charset="0"/>
+                <a:ea typeface="BIZ UDPGothic" pitchFamily="34" charset="-122"/>
+                <a:cs typeface="BIZ UDPGothic" pitchFamily="34" charset="-120"/>
               </a:rPr>
               <a:t>2年時点で進路が半ば固定される</a:t>
             </a:r>
@@ -10665,11 +10665,11 @@
             </a:avLst>
           </a:prstGeom>
           <a:solidFill>
-            <a:srgbClr val="081808"/>
+            <a:srgbClr val="E9EFF8"/>
           </a:solidFill>
           <a:ln w="12700">
             <a:solidFill>
-              <a:srgbClr val="2E2E2E"/>
+              <a:srgbClr val="DDE0E6"/>
             </a:solidFill>
             <a:prstDash val="solid"/>
           </a:ln>
@@ -10702,11 +10702,11 @@
             <a:r>
               <a:rPr lang="en-US" sz="1500" b="1" dirty="0">
                 <a:solidFill>
-                  <a:srgbClr val="4CAF50"/>
-                </a:solidFill>
-                <a:latin typeface="Cambria" pitchFamily="34" charset="0"/>
-                <a:ea typeface="Cambria" pitchFamily="34" charset="-122"/>
-                <a:cs typeface="Cambria" pitchFamily="34" charset="-120"/>
+                  <a:srgbClr val="1D4F91"/>
+                </a:solidFill>
+                <a:latin typeface="BIZ UDPGothic" pitchFamily="34" charset="0"/>
+                <a:ea typeface="BIZ UDPGothic" pitchFamily="34" charset="-122"/>
+                <a:cs typeface="BIZ UDPGothic" pitchFamily="34" charset="-120"/>
               </a:rPr>
               <a:t>改革後</a:t>
             </a:r>
@@ -10745,11 +10745,11 @@
             <a:r>
               <a:rPr lang="en-US" sz="1100" dirty="0">
                 <a:solidFill>
-                  <a:srgbClr val="CCCCCC"/>
-                </a:solidFill>
-                <a:latin typeface="Arial" pitchFamily="34" charset="0"/>
-                <a:ea typeface="Arial" pitchFamily="34" charset="-122"/>
-                <a:cs typeface="Arial" pitchFamily="34" charset="-120"/>
+                  <a:srgbClr val="2B2F36"/>
+                </a:solidFill>
+                <a:latin typeface="Arial" pitchFamily="34" charset="0"/>
+                <a:ea typeface="BIZ UDPGothic" pitchFamily="34" charset="-122"/>
+                <a:cs typeface="BIZ UDPGothic" pitchFamily="34" charset="-120"/>
               </a:rPr>
               <a:t>文理の壁を完全撤廃</a:t>
             </a:r>
@@ -10766,11 +10766,11 @@
             <a:r>
               <a:rPr lang="en-US" sz="1100" dirty="0">
                 <a:solidFill>
-                  <a:srgbClr val="CCCCCC"/>
-                </a:solidFill>
-                <a:latin typeface="Arial" pitchFamily="34" charset="0"/>
-                <a:ea typeface="Arial" pitchFamily="34" charset="-122"/>
-                <a:cs typeface="Arial" pitchFamily="34" charset="-120"/>
+                  <a:srgbClr val="2B2F36"/>
+                </a:solidFill>
+                <a:latin typeface="Arial" pitchFamily="34" charset="0"/>
+                <a:ea typeface="BIZ UDPGothic" pitchFamily="34" charset="-122"/>
+                <a:cs typeface="BIZ UDPGothic" pitchFamily="34" charset="-120"/>
               </a:rPr>
               <a:t>数学・哲学・経済学・文学・生物学・心理学・歴史等から自由に組み合わせ</a:t>
             </a:r>
@@ -10787,11 +10787,11 @@
             <a:r>
               <a:rPr lang="en-US" sz="1100" dirty="0">
                 <a:solidFill>
-                  <a:srgbClr val="CCCCCC"/>
-                </a:solidFill>
-                <a:latin typeface="Arial" pitchFamily="34" charset="0"/>
-                <a:ea typeface="Arial" pitchFamily="34" charset="-122"/>
-                <a:cs typeface="Arial" pitchFamily="34" charset="-120"/>
+                  <a:srgbClr val="2B2F36"/>
+                </a:solidFill>
+                <a:latin typeface="Arial" pitchFamily="34" charset="0"/>
+                <a:ea typeface="BIZ UDPGothic" pitchFamily="34" charset="-122"/>
+                <a:cs typeface="BIZ UDPGothic" pitchFamily="34" charset="-120"/>
               </a:rPr>
               <a:t>「好き」「面白い」を軸にした探索</a:t>
             </a:r>
@@ -10808,11 +10808,11 @@
             <a:r>
               <a:rPr lang="en-US" sz="1100" dirty="0">
                 <a:solidFill>
-                  <a:srgbClr val="CCCCCC"/>
-                </a:solidFill>
-                <a:latin typeface="Arial" pitchFamily="34" charset="0"/>
-                <a:ea typeface="Arial" pitchFamily="34" charset="-122"/>
-                <a:cs typeface="Arial" pitchFamily="34" charset="-120"/>
+                  <a:srgbClr val="2B2F36"/>
+                </a:solidFill>
+                <a:latin typeface="Arial" pitchFamily="34" charset="0"/>
+                <a:ea typeface="BIZ UDPGothic" pitchFamily="34" charset="-122"/>
+                <a:cs typeface="BIZ UDPGothic" pitchFamily="34" charset="-120"/>
               </a:rPr>
               <a:t>料理・音楽・アートは守備範囲外（独学・専門学校に委ねる）</a:t>
             </a:r>
@@ -10847,11 +10847,11 @@
             <a:r>
               <a:rPr lang="en-US" sz="3600" dirty="0">
                 <a:solidFill>
-                  <a:srgbClr val="D62828"/>
-                </a:solidFill>
-                <a:latin typeface="Arial" pitchFamily="34" charset="0"/>
-                <a:ea typeface="Arial" pitchFamily="34" charset="-122"/>
-                <a:cs typeface="Arial" pitchFamily="34" charset="-120"/>
+                  <a:srgbClr val="C8161D"/>
+                </a:solidFill>
+                <a:latin typeface="Arial" pitchFamily="34" charset="0"/>
+                <a:ea typeface="BIZ UDPGothic" pitchFamily="34" charset="-122"/>
+                <a:cs typeface="BIZ UDPGothic" pitchFamily="34" charset="-120"/>
               </a:rPr>
               <a:t>→</a:t>
             </a:r>
@@ -10873,7 +10873,7 @@
     <p:bg>
       <p:bgPr>
         <a:solidFill>
-          <a:srgbClr val="0A0A0A"/>
+          <a:srgbClr val="F5F6F8"/>
         </a:solidFill>
       </p:bgPr>
     </p:bg>
@@ -10918,11 +10918,11 @@
             <a:r>
               <a:rPr lang="en-US" sz="900" b="1" spc="400" kern="0" dirty="0">
                 <a:solidFill>
-                  <a:srgbClr val="D62828"/>
-                </a:solidFill>
-                <a:latin typeface="Arial" pitchFamily="34" charset="0"/>
-                <a:ea typeface="Arial" pitchFamily="34" charset="-122"/>
-                <a:cs typeface="Arial" pitchFamily="34" charset="-120"/>
+                  <a:srgbClr val="C8161D"/>
+                </a:solidFill>
+                <a:latin typeface="Arial" pitchFamily="34" charset="0"/>
+                <a:ea typeface="BIZ UDPGothic" pitchFamily="34" charset="-122"/>
+                <a:cs typeface="BIZ UDPGothic" pitchFamily="34" charset="-120"/>
               </a:rPr>
               <a:t>HIGH SCHOOL — YEAR 3</a:t>
             </a:r>
@@ -10957,11 +10957,11 @@
             <a:r>
               <a:rPr lang="en-US" sz="2400" b="1" dirty="0">
                 <a:solidFill>
-                  <a:srgbClr val="F5F5F0"/>
-                </a:solidFill>
-                <a:latin typeface="Cambria" pitchFamily="34" charset="0"/>
-                <a:ea typeface="Cambria" pitchFamily="34" charset="-122"/>
-                <a:cs typeface="Cambria" pitchFamily="34" charset="-120"/>
+                  <a:srgbClr val="16181D"/>
+                </a:solidFill>
+                <a:latin typeface="BIZ UDPGothic" pitchFamily="34" charset="0"/>
+                <a:ea typeface="BIZ UDPGothic" pitchFamily="34" charset="-122"/>
+                <a:cs typeface="BIZ UDPGothic" pitchFamily="34" charset="-120"/>
               </a:rPr>
               <a:t>3年生：社会リテラシー ── 失敗を恐れず選択できる土台</a:t>
             </a:r>
@@ -10984,11 +10984,11 @@
             <a:avLst/>
           </a:prstGeom>
           <a:solidFill>
-            <a:srgbClr val="2E2E2E"/>
+            <a:srgbClr val="DDE0E6"/>
           </a:solidFill>
           <a:ln w="12700">
             <a:solidFill>
-              <a:srgbClr val="2E2E2E"/>
+              <a:srgbClr val="DDE0E6"/>
             </a:solidFill>
             <a:prstDash val="solid"/>
           </a:ln>
@@ -11021,11 +11021,11 @@
             <a:r>
               <a:rPr lang="en-US" sz="1100" dirty="0">
                 <a:solidFill>
-                  <a:srgbClr val="CCCCCC"/>
-                </a:solidFill>
-                <a:latin typeface="Arial" pitchFamily="34" charset="0"/>
-                <a:ea typeface="Arial" pitchFamily="34" charset="-122"/>
-                <a:cs typeface="Arial" pitchFamily="34" charset="-120"/>
+                  <a:srgbClr val="2B2F36"/>
+                </a:solidFill>
+                <a:latin typeface="Arial" pitchFamily="34" charset="0"/>
+                <a:ea typeface="BIZ UDPGothic" pitchFamily="34" charset="-122"/>
+                <a:cs typeface="BIZ UDPGothic" pitchFamily="34" charset="-120"/>
               </a:rPr>
               <a:t>現在の18歳は、社会の仕組みを何も知らないまま人生の岐路に立たされている。</a:t>
             </a:r>
@@ -11050,11 +11050,11 @@
             </a:avLst>
           </a:prstGeom>
           <a:solidFill>
-            <a:srgbClr val="1A1A1A"/>
+            <a:srgbClr val="FFFFFF"/>
           </a:solidFill>
           <a:ln w="12700">
             <a:solidFill>
-              <a:srgbClr val="2E2E2E"/>
+              <a:srgbClr val="DDE0E6"/>
             </a:solidFill>
             <a:prstDash val="solid"/>
           </a:ln>
@@ -11087,11 +11087,11 @@
             <a:r>
               <a:rPr lang="en-US" sz="1400" b="1" dirty="0">
                 <a:solidFill>
-                  <a:srgbClr val="D62828"/>
-                </a:solidFill>
-                <a:latin typeface="Cambria" pitchFamily="34" charset="0"/>
-                <a:ea typeface="Cambria" pitchFamily="34" charset="-122"/>
-                <a:cs typeface="Cambria" pitchFamily="34" charset="-120"/>
+                  <a:srgbClr val="C8161D"/>
+                </a:solidFill>
+                <a:latin typeface="BIZ UDPGothic" pitchFamily="34" charset="0"/>
+                <a:ea typeface="BIZ UDPGothic" pitchFamily="34" charset="-122"/>
+                <a:cs typeface="BIZ UDPGothic" pitchFamily="34" charset="-120"/>
               </a:rPr>
               <a:t>税制・確定申告</a:t>
             </a:r>
@@ -11126,11 +11126,11 @@
             <a:r>
               <a:rPr lang="en-US" sz="1100" dirty="0">
                 <a:solidFill>
-                  <a:srgbClr val="CCCCCC"/>
-                </a:solidFill>
-                <a:latin typeface="Arial" pitchFamily="34" charset="0"/>
-                <a:ea typeface="Arial" pitchFamily="34" charset="-122"/>
-                <a:cs typeface="Arial" pitchFamily="34" charset="-120"/>
+                  <a:srgbClr val="2B2F36"/>
+                </a:solidFill>
+                <a:latin typeface="Arial" pitchFamily="34" charset="0"/>
+                <a:ea typeface="BIZ UDPGothic" pitchFamily="34" charset="-122"/>
+                <a:cs typeface="BIZ UDPGothic" pitchFamily="34" charset="-120"/>
               </a:rPr>
               <a:t>所得税・消費税・住民税の仕組み。自分が払う税金を自分で理解する</a:t>
             </a:r>
@@ -11155,11 +11155,11 @@
             </a:avLst>
           </a:prstGeom>
           <a:solidFill>
-            <a:srgbClr val="1A1A1A"/>
+            <a:srgbClr val="FFFFFF"/>
           </a:solidFill>
           <a:ln w="12700">
             <a:solidFill>
-              <a:srgbClr val="2E2E2E"/>
+              <a:srgbClr val="DDE0E6"/>
             </a:solidFill>
             <a:prstDash val="solid"/>
           </a:ln>
@@ -11192,11 +11192,11 @@
             <a:r>
               <a:rPr lang="en-US" sz="1400" b="1" dirty="0">
                 <a:solidFill>
-                  <a:srgbClr val="D62828"/>
-                </a:solidFill>
-                <a:latin typeface="Cambria" pitchFamily="34" charset="0"/>
-                <a:ea typeface="Cambria" pitchFamily="34" charset="-122"/>
-                <a:cs typeface="Cambria" pitchFamily="34" charset="-120"/>
+                  <a:srgbClr val="C8161D"/>
+                </a:solidFill>
+                <a:latin typeface="BIZ UDPGothic" pitchFamily="34" charset="0"/>
+                <a:ea typeface="BIZ UDPGothic" pitchFamily="34" charset="-122"/>
+                <a:cs typeface="BIZ UDPGothic" pitchFamily="34" charset="-120"/>
               </a:rPr>
               <a:t>選挙・国会制度</a:t>
             </a:r>
@@ -11231,11 +11231,11 @@
             <a:r>
               <a:rPr lang="en-US" sz="1100" dirty="0">
                 <a:solidFill>
-                  <a:srgbClr val="CCCCCC"/>
-                </a:solidFill>
-                <a:latin typeface="Arial" pitchFamily="34" charset="0"/>
-                <a:ea typeface="Arial" pitchFamily="34" charset="-122"/>
-                <a:cs typeface="Arial" pitchFamily="34" charset="-120"/>
+                  <a:srgbClr val="2B2F36"/>
+                </a:solidFill>
+                <a:latin typeface="Arial" pitchFamily="34" charset="0"/>
+                <a:ea typeface="BIZ UDPGothic" pitchFamily="34" charset="-122"/>
+                <a:cs typeface="BIZ UDPGothic" pitchFamily="34" charset="-120"/>
               </a:rPr>
               <a:t>一票の重さと選挙の仕組み。民主主義の参加者として機能するための基礎知識</a:t>
             </a:r>
@@ -11260,11 +11260,11 @@
             </a:avLst>
           </a:prstGeom>
           <a:solidFill>
-            <a:srgbClr val="1A1A1A"/>
+            <a:srgbClr val="FFFFFF"/>
           </a:solidFill>
           <a:ln w="12700">
             <a:solidFill>
-              <a:srgbClr val="2E2E2E"/>
+              <a:srgbClr val="DDE0E6"/>
             </a:solidFill>
             <a:prstDash val="solid"/>
           </a:ln>
@@ -11297,11 +11297,11 @@
             <a:r>
               <a:rPr lang="en-US" sz="1400" b="1" dirty="0">
                 <a:solidFill>
-                  <a:srgbClr val="D62828"/>
-                </a:solidFill>
-                <a:latin typeface="Cambria" pitchFamily="34" charset="0"/>
-                <a:ea typeface="Cambria" pitchFamily="34" charset="-122"/>
-                <a:cs typeface="Cambria" pitchFamily="34" charset="-120"/>
+                  <a:srgbClr val="C8161D"/>
+                </a:solidFill>
+                <a:latin typeface="BIZ UDPGothic" pitchFamily="34" charset="0"/>
+                <a:ea typeface="BIZ UDPGothic" pitchFamily="34" charset="-122"/>
+                <a:cs typeface="BIZ UDPGothic" pitchFamily="34" charset="-120"/>
               </a:rPr>
               <a:t>社会保障制度</a:t>
             </a:r>
@@ -11336,11 +11336,11 @@
             <a:r>
               <a:rPr lang="en-US" sz="1100" dirty="0">
                 <a:solidFill>
-                  <a:srgbClr val="CCCCCC"/>
-                </a:solidFill>
-                <a:latin typeface="Arial" pitchFamily="34" charset="0"/>
-                <a:ea typeface="Arial" pitchFamily="34" charset="-122"/>
-                <a:cs typeface="Arial" pitchFamily="34" charset="-120"/>
+                  <a:srgbClr val="2B2F36"/>
+                </a:solidFill>
+                <a:latin typeface="Arial" pitchFamily="34" charset="0"/>
+                <a:ea typeface="BIZ UDPGothic" pitchFamily="34" charset="-122"/>
+                <a:cs typeface="BIZ UDPGothic" pitchFamily="34" charset="-120"/>
               </a:rPr>
               <a:t>年金・健康保険・失業給付・生活保護の全体像。「網の目」の存在を知る</a:t>
             </a:r>
@@ -11365,11 +11365,11 @@
             </a:avLst>
           </a:prstGeom>
           <a:solidFill>
-            <a:srgbClr val="1A1A1A"/>
+            <a:srgbClr val="FFFFFF"/>
           </a:solidFill>
           <a:ln w="12700">
             <a:solidFill>
-              <a:srgbClr val="2E2E2E"/>
+              <a:srgbClr val="DDE0E6"/>
             </a:solidFill>
             <a:prstDash val="solid"/>
           </a:ln>
@@ -11402,11 +11402,11 @@
             <a:r>
               <a:rPr lang="en-US" sz="1400" b="1" dirty="0">
                 <a:solidFill>
-                  <a:srgbClr val="D62828"/>
-                </a:solidFill>
-                <a:latin typeface="Cambria" pitchFamily="34" charset="0"/>
-                <a:ea typeface="Cambria" pitchFamily="34" charset="-122"/>
-                <a:cs typeface="Cambria" pitchFamily="34" charset="-120"/>
+                  <a:srgbClr val="C8161D"/>
+                </a:solidFill>
+                <a:latin typeface="BIZ UDPGothic" pitchFamily="34" charset="0"/>
+                <a:ea typeface="BIZ UDPGothic" pitchFamily="34" charset="-122"/>
+                <a:cs typeface="BIZ UDPGothic" pitchFamily="34" charset="-120"/>
               </a:rPr>
               <a:t>セーフティネット</a:t>
             </a:r>
@@ -11441,11 +11441,11 @@
             <a:r>
               <a:rPr lang="en-US" sz="1100" dirty="0">
                 <a:solidFill>
-                  <a:srgbClr val="CCCCCC"/>
-                </a:solidFill>
-                <a:latin typeface="Arial" pitchFamily="34" charset="0"/>
-                <a:ea typeface="Arial" pitchFamily="34" charset="-122"/>
-                <a:cs typeface="Arial" pitchFamily="34" charset="-120"/>
+                  <a:srgbClr val="2B2F36"/>
+                </a:solidFill>
+                <a:latin typeface="Arial" pitchFamily="34" charset="0"/>
+                <a:ea typeface="BIZ UDPGothic" pitchFamily="34" charset="-122"/>
+                <a:cs typeface="BIZ UDPGothic" pitchFamily="34" charset="-120"/>
               </a:rPr>
               <a:t>失敗しても、路頭に迷わない制度が存在することを制度として学ぶ</a:t>
             </a:r>
@@ -11470,11 +11470,11 @@
             </a:avLst>
           </a:prstGeom>
           <a:solidFill>
-            <a:srgbClr val="1A1A1A"/>
+            <a:srgbClr val="FFFFFF"/>
           </a:solidFill>
           <a:ln w="12700">
             <a:solidFill>
-              <a:srgbClr val="2E2E2E"/>
+              <a:srgbClr val="DDE0E6"/>
             </a:solidFill>
             <a:prstDash val="solid"/>
           </a:ln>
@@ -11507,11 +11507,11 @@
             <a:r>
               <a:rPr lang="en-US" sz="1100" b="1" dirty="0">
                 <a:solidFill>
-                  <a:srgbClr val="F5F5F0"/>
-                </a:solidFill>
-                <a:latin typeface="Cambria" pitchFamily="34" charset="0"/>
-                <a:ea typeface="Cambria" pitchFamily="34" charset="-122"/>
-                <a:cs typeface="Cambria" pitchFamily="34" charset="-120"/>
+                  <a:srgbClr val="16181D"/>
+                </a:solidFill>
+                <a:latin typeface="BIZ UDPGothic" pitchFamily="34" charset="0"/>
+                <a:ea typeface="BIZ UDPGothic" pitchFamily="34" charset="-122"/>
+                <a:cs typeface="BIZ UDPGothic" pitchFamily="34" charset="-120"/>
               </a:rPr>
               <a:t>目的：「どのルートを選んでも、失敗しても、やり直せる」という事実を制度として理解させる</a:t>
             </a:r>
@@ -11533,7 +11533,7 @@
     <p:bg>
       <p:bgPr>
         <a:solidFill>
-          <a:srgbClr val="0A0A0A"/>
+          <a:srgbClr val="F5F6F8"/>
         </a:solidFill>
       </p:bgPr>
     </p:bg>
@@ -11578,11 +11578,11 @@
             <a:r>
               <a:rPr lang="en-US" sz="900" b="1" spc="400" kern="0" dirty="0">
                 <a:solidFill>
-                  <a:srgbClr val="D62828"/>
-                </a:solidFill>
-                <a:latin typeface="Arial" pitchFamily="34" charset="0"/>
-                <a:ea typeface="Arial" pitchFamily="34" charset="-122"/>
-                <a:cs typeface="Arial" pitchFamily="34" charset="-120"/>
+                  <a:srgbClr val="C8161D"/>
+                </a:solidFill>
+                <a:latin typeface="Arial" pitchFamily="34" charset="0"/>
+                <a:ea typeface="BIZ UDPGothic" pitchFamily="34" charset="-122"/>
+                <a:cs typeface="BIZ UDPGothic" pitchFamily="34" charset="-120"/>
               </a:rPr>
               <a:t>ROUTE 01</a:t>
             </a:r>
@@ -11617,11 +11617,11 @@
             <a:r>
               <a:rPr lang="en-US" sz="2800" b="1" dirty="0">
                 <a:solidFill>
-                  <a:srgbClr val="F5F5F0"/>
-                </a:solidFill>
-                <a:latin typeface="Cambria" pitchFamily="34" charset="0"/>
-                <a:ea typeface="Cambria" pitchFamily="34" charset="-122"/>
-                <a:cs typeface="Cambria" pitchFamily="34" charset="-120"/>
+                  <a:srgbClr val="16181D"/>
+                </a:solidFill>
+                <a:latin typeface="BIZ UDPGothic" pitchFamily="34" charset="0"/>
+                <a:ea typeface="BIZ UDPGothic" pitchFamily="34" charset="-122"/>
+                <a:cs typeface="BIZ UDPGothic" pitchFamily="34" charset="-120"/>
               </a:rPr>
               <a:t>マジョリティ・標準ルート ── 9割の一般職</a:t>
             </a:r>
@@ -11644,11 +11644,11 @@
             <a:avLst/>
           </a:prstGeom>
           <a:solidFill>
-            <a:srgbClr val="2E2E2E"/>
+            <a:srgbClr val="DDE0E6"/>
           </a:solidFill>
           <a:ln w="12700">
             <a:solidFill>
-              <a:srgbClr val="2E2E2E"/>
+              <a:srgbClr val="DDE0E6"/>
             </a:solidFill>
             <a:prstDash val="solid"/>
           </a:ln>
@@ -11671,11 +11671,11 @@
             </a:avLst>
           </a:prstGeom>
           <a:solidFill>
-            <a:srgbClr val="141414"/>
+            <a:srgbClr val="FFFFFF"/>
           </a:solidFill>
           <a:ln w="12700">
             <a:solidFill>
-              <a:srgbClr val="2E2E2E"/>
+              <a:srgbClr val="DDE0E6"/>
             </a:solidFill>
             <a:prstDash val="solid"/>
           </a:ln>
@@ -11708,11 +11708,11 @@
             <a:r>
               <a:rPr lang="en-US" sz="1500" b="1" dirty="0">
                 <a:solidFill>
-                  <a:srgbClr val="F5F5F0"/>
-                </a:solidFill>
-                <a:latin typeface="Cambria" pitchFamily="34" charset="0"/>
-                <a:ea typeface="Cambria" pitchFamily="34" charset="-122"/>
-                <a:cs typeface="Cambria" pitchFamily="34" charset="-120"/>
+                  <a:srgbClr val="16181D"/>
+                </a:solidFill>
+                <a:latin typeface="BIZ UDPGothic" pitchFamily="34" charset="0"/>
+                <a:ea typeface="BIZ UDPGothic" pitchFamily="34" charset="-122"/>
+                <a:cs typeface="BIZ UDPGothic" pitchFamily="34" charset="-120"/>
               </a:rPr>
               <a:t>高校3年</a:t>
             </a:r>
@@ -11747,11 +11747,11 @@
             <a:r>
               <a:rPr lang="en-US" sz="1000" dirty="0">
                 <a:solidFill>
-                  <a:srgbClr val="CCCCCC"/>
-                </a:solidFill>
-                <a:latin typeface="Arial" pitchFamily="34" charset="0"/>
-                <a:ea typeface="Arial" pitchFamily="34" charset="-122"/>
-                <a:cs typeface="Arial" pitchFamily="34" charset="-120"/>
+                  <a:srgbClr val="2B2F36"/>
+                </a:solidFill>
+                <a:latin typeface="Arial" pitchFamily="34" charset="0"/>
+                <a:ea typeface="BIZ UDPGothic" pitchFamily="34" charset="-122"/>
+                <a:cs typeface="BIZ UDPGothic" pitchFamily="34" charset="-120"/>
               </a:rPr>
               <a:t>教養・探索・社会リテラシー</a:t>
             </a:r>
@@ -11786,11 +11786,11 @@
             <a:r>
               <a:rPr lang="en-US" sz="1800" dirty="0">
                 <a:solidFill>
-                  <a:srgbClr val="D62828"/>
-                </a:solidFill>
-                <a:latin typeface="Arial" pitchFamily="34" charset="0"/>
-                <a:ea typeface="Arial" pitchFamily="34" charset="-122"/>
-                <a:cs typeface="Arial" pitchFamily="34" charset="-120"/>
+                  <a:srgbClr val="C8161D"/>
+                </a:solidFill>
+                <a:latin typeface="Arial" pitchFamily="34" charset="0"/>
+                <a:ea typeface="BIZ UDPGothic" pitchFamily="34" charset="-122"/>
+                <a:cs typeface="BIZ UDPGothic" pitchFamily="34" charset="-120"/>
               </a:rPr>
               <a:t>↓</a:t>
             </a:r>
@@ -11815,11 +11815,11 @@
             </a:avLst>
           </a:prstGeom>
           <a:solidFill>
-            <a:srgbClr val="141414"/>
+            <a:srgbClr val="FFFFFF"/>
           </a:solidFill>
           <a:ln w="12700">
             <a:solidFill>
-              <a:srgbClr val="2E2E2E"/>
+              <a:srgbClr val="DDE0E6"/>
             </a:solidFill>
             <a:prstDash val="solid"/>
           </a:ln>
@@ -11852,11 +11852,11 @@
             <a:r>
               <a:rPr lang="en-US" sz="1500" b="1" dirty="0">
                 <a:solidFill>
-                  <a:srgbClr val="F5F5F0"/>
-                </a:solidFill>
-                <a:latin typeface="Cambria" pitchFamily="34" charset="0"/>
-                <a:ea typeface="Cambria" pitchFamily="34" charset="-122"/>
-                <a:cs typeface="Cambria" pitchFamily="34" charset="-120"/>
+                  <a:srgbClr val="16181D"/>
+                </a:solidFill>
+                <a:latin typeface="BIZ UDPGothic" pitchFamily="34" charset="0"/>
+                <a:ea typeface="BIZ UDPGothic" pitchFamily="34" charset="-122"/>
+                <a:cs typeface="BIZ UDPGothic" pitchFamily="34" charset="-120"/>
               </a:rPr>
               <a:t>専門学校2年</a:t>
             </a:r>
@@ -11891,11 +11891,11 @@
             <a:r>
               <a:rPr lang="en-US" sz="1000" dirty="0">
                 <a:solidFill>
-                  <a:srgbClr val="CCCCCC"/>
-                </a:solidFill>
-                <a:latin typeface="Arial" pitchFamily="34" charset="0"/>
-                <a:ea typeface="Arial" pitchFamily="34" charset="-122"/>
-                <a:cs typeface="Arial" pitchFamily="34" charset="-120"/>
+                  <a:srgbClr val="2B2F36"/>
+                </a:solidFill>
+                <a:latin typeface="Arial" pitchFamily="34" charset="0"/>
+                <a:ea typeface="BIZ UDPGothic" pitchFamily="34" charset="-122"/>
+                <a:cs typeface="BIZ UDPGothic" pitchFamily="34" charset="-120"/>
               </a:rPr>
               <a:t>実務直結スキルを徹底習得</a:t>
             </a:r>
@@ -11908,11 +11908,11 @@
             <a:r>
               <a:rPr lang="en-US" sz="1000" dirty="0">
                 <a:solidFill>
-                  <a:srgbClr val="CCCCCC"/>
-                </a:solidFill>
-                <a:latin typeface="Arial" pitchFamily="34" charset="0"/>
-                <a:ea typeface="Arial" pitchFamily="34" charset="-122"/>
-                <a:cs typeface="Arial" pitchFamily="34" charset="-120"/>
+                  <a:srgbClr val="2B2F36"/>
+                </a:solidFill>
+                <a:latin typeface="Arial" pitchFamily="34" charset="0"/>
+                <a:ea typeface="BIZ UDPGothic" pitchFamily="34" charset="-122"/>
+                <a:cs typeface="BIZ UDPGothic" pitchFamily="34" charset="-120"/>
               </a:rPr>
               <a:t>IT・AI・簿記・高度技術等</a:t>
             </a:r>
@@ -11947,11 +11947,11 @@
             <a:r>
               <a:rPr lang="en-US" sz="1800" dirty="0">
                 <a:solidFill>
-                  <a:srgbClr val="D62828"/>
-                </a:solidFill>
-                <a:latin typeface="Arial" pitchFamily="34" charset="0"/>
-                <a:ea typeface="Arial" pitchFamily="34" charset="-122"/>
-                <a:cs typeface="Arial" pitchFamily="34" charset="-120"/>
+                  <a:srgbClr val="C8161D"/>
+                </a:solidFill>
+                <a:latin typeface="Arial" pitchFamily="34" charset="0"/>
+                <a:ea typeface="BIZ UDPGothic" pitchFamily="34" charset="-122"/>
+                <a:cs typeface="BIZ UDPGothic" pitchFamily="34" charset="-120"/>
               </a:rPr>
               <a:t>↓</a:t>
             </a:r>
@@ -11976,11 +11976,11 @@
             </a:avLst>
           </a:prstGeom>
           <a:solidFill>
-            <a:srgbClr val="081808"/>
+            <a:srgbClr val="E9EFF8"/>
           </a:solidFill>
           <a:ln w="12700">
             <a:solidFill>
-              <a:srgbClr val="2E2E2E"/>
+              <a:srgbClr val="DDE0E6"/>
             </a:solidFill>
             <a:prstDash val="solid"/>
           </a:ln>
@@ -12013,11 +12013,11 @@
             <a:r>
               <a:rPr lang="en-US" sz="1800" b="1" dirty="0">
                 <a:solidFill>
-                  <a:srgbClr val="4CAF50"/>
-                </a:solidFill>
-                <a:latin typeface="Cambria" pitchFamily="34" charset="0"/>
-                <a:ea typeface="Cambria" pitchFamily="34" charset="-122"/>
-                <a:cs typeface="Cambria" pitchFamily="34" charset="-120"/>
+                  <a:srgbClr val="1D4F91"/>
+                </a:solidFill>
+                <a:latin typeface="BIZ UDPGothic" pitchFamily="34" charset="0"/>
+                <a:ea typeface="BIZ UDPGothic" pitchFamily="34" charset="-122"/>
+                <a:cs typeface="BIZ UDPGothic" pitchFamily="34" charset="-120"/>
               </a:rPr>
               <a:t>21歳</a:t>
             </a:r>
@@ -12030,11 +12030,11 @@
             <a:r>
               <a:rPr lang="en-US" sz="1800" b="1" dirty="0">
                 <a:solidFill>
-                  <a:srgbClr val="4CAF50"/>
-                </a:solidFill>
-                <a:latin typeface="Cambria" pitchFamily="34" charset="0"/>
-                <a:ea typeface="Cambria" pitchFamily="34" charset="-122"/>
-                <a:cs typeface="Cambria" pitchFamily="34" charset="-120"/>
+                  <a:srgbClr val="1D4F91"/>
+                </a:solidFill>
+                <a:latin typeface="BIZ UDPGothic" pitchFamily="34" charset="0"/>
+                <a:ea typeface="BIZ UDPGothic" pitchFamily="34" charset="-122"/>
+                <a:cs typeface="BIZ UDPGothic" pitchFamily="34" charset="-120"/>
               </a:rPr>
               <a:t>社会人スタート</a:t>
             </a:r>
@@ -12069,11 +12069,11 @@
             <a:r>
               <a:rPr lang="en-US" sz="1000" dirty="0">
                 <a:solidFill>
-                  <a:srgbClr val="CCCCCC"/>
-                </a:solidFill>
-                <a:latin typeface="Arial" pitchFamily="34" charset="0"/>
-                <a:ea typeface="Arial" pitchFamily="34" charset="-122"/>
-                <a:cs typeface="Arial" pitchFamily="34" charset="-120"/>
+                  <a:srgbClr val="2B2F36"/>
+                </a:solidFill>
+                <a:latin typeface="Arial" pitchFamily="34" charset="0"/>
+                <a:ea typeface="BIZ UDPGothic" pitchFamily="34" charset="-122"/>
+                <a:cs typeface="BIZ UDPGothic" pitchFamily="34" charset="-120"/>
               </a:rPr>
               <a:t>即戦力として就職</a:t>
             </a:r>
@@ -12086,11 +12086,11 @@
             <a:r>
               <a:rPr lang="en-US" sz="1000" dirty="0">
                 <a:solidFill>
-                  <a:srgbClr val="CCCCCC"/>
-                </a:solidFill>
-                <a:latin typeface="Arial" pitchFamily="34" charset="0"/>
-                <a:ea typeface="Arial" pitchFamily="34" charset="-122"/>
-                <a:cs typeface="Arial" pitchFamily="34" charset="-120"/>
+                  <a:srgbClr val="2B2F36"/>
+                </a:solidFill>
+                <a:latin typeface="Arial" pitchFamily="34" charset="0"/>
+                <a:ea typeface="BIZ UDPGothic" pitchFamily="34" charset="-122"/>
+                <a:cs typeface="BIZ UDPGothic" pitchFamily="34" charset="-120"/>
               </a:rPr>
               <a:t>奨学金債務なし</a:t>
             </a:r>
@@ -12115,11 +12115,11 @@
             </a:avLst>
           </a:prstGeom>
           <a:solidFill>
-            <a:srgbClr val="141414"/>
+            <a:srgbClr val="FFFFFF"/>
           </a:solidFill>
           <a:ln w="12700">
             <a:solidFill>
-              <a:srgbClr val="2E2E2E"/>
+              <a:srgbClr val="DDE0E6"/>
             </a:solidFill>
             <a:prstDash val="solid"/>
           </a:ln>
@@ -12152,11 +12152,11 @@
             <a:r>
               <a:rPr lang="en-US" sz="1300" b="1" dirty="0">
                 <a:solidFill>
-                  <a:srgbClr val="D62828"/>
-                </a:solidFill>
-                <a:latin typeface="Cambria" pitchFamily="34" charset="0"/>
-                <a:ea typeface="Cambria" pitchFamily="34" charset="-122"/>
-                <a:cs typeface="Cambria" pitchFamily="34" charset="-120"/>
+                  <a:srgbClr val="C8161D"/>
+                </a:solidFill>
+                <a:latin typeface="BIZ UDPGothic" pitchFamily="34" charset="0"/>
+                <a:ea typeface="BIZ UDPGothic" pitchFamily="34" charset="-122"/>
+                <a:cs typeface="BIZ UDPGothic" pitchFamily="34" charset="-120"/>
               </a:rPr>
               <a:t>このルートが9割の標準</a:t>
             </a:r>
@@ -12195,11 +12195,11 @@
             <a:r>
               <a:rPr lang="en-US" sz="1100" dirty="0">
                 <a:solidFill>
-                  <a:srgbClr val="CCCCCC"/>
-                </a:solidFill>
-                <a:latin typeface="Arial" pitchFamily="34" charset="0"/>
-                <a:ea typeface="Arial" pitchFamily="34" charset="-122"/>
-                <a:cs typeface="Arial" pitchFamily="34" charset="-120"/>
+                  <a:srgbClr val="2B2F36"/>
+                </a:solidFill>
+                <a:latin typeface="Arial" pitchFamily="34" charset="0"/>
+                <a:ea typeface="BIZ UDPGothic" pitchFamily="34" charset="-122"/>
+                <a:cs typeface="BIZ UDPGothic" pitchFamily="34" charset="-120"/>
               </a:rPr>
               <a:t>ほとんどの職種に大卒は不要</a:t>
             </a:r>
@@ -12216,11 +12216,11 @@
             <a:r>
               <a:rPr lang="en-US" sz="1100" dirty="0">
                 <a:solidFill>
-                  <a:srgbClr val="CCCCCC"/>
-                </a:solidFill>
-                <a:latin typeface="Arial" pitchFamily="34" charset="0"/>
-                <a:ea typeface="Arial" pitchFamily="34" charset="-122"/>
-                <a:cs typeface="Arial" pitchFamily="34" charset="-120"/>
+                  <a:srgbClr val="2B2F36"/>
+                </a:solidFill>
+                <a:latin typeface="Arial" pitchFamily="34" charset="0"/>
+                <a:ea typeface="BIZ UDPGothic" pitchFamily="34" charset="-122"/>
+                <a:cs typeface="BIZ UDPGothic" pitchFamily="34" charset="-120"/>
               </a:rPr>
               <a:t>21歳で即戦力・奨学金ゼロで社会へ</a:t>
             </a:r>
@@ -12237,11 +12237,11 @@
             <a:r>
               <a:rPr lang="en-US" sz="1100" dirty="0">
                 <a:solidFill>
-                  <a:srgbClr val="CCCCCC"/>
-                </a:solidFill>
-                <a:latin typeface="Arial" pitchFamily="34" charset="0"/>
-                <a:ea typeface="Arial" pitchFamily="34" charset="-122"/>
-                <a:cs typeface="Arial" pitchFamily="34" charset="-120"/>
+                  <a:srgbClr val="2B2F36"/>
+                </a:solidFill>
+                <a:latin typeface="Arial" pitchFamily="34" charset="0"/>
+                <a:ea typeface="BIZ UDPGothic" pitchFamily="34" charset="-122"/>
+                <a:cs typeface="BIZ UDPGothic" pitchFamily="34" charset="-120"/>
               </a:rPr>
               <a:t>専門2年間で実務スキルを集中習得</a:t>
             </a:r>
@@ -12258,11 +12258,11 @@
             <a:r>
               <a:rPr lang="en-US" sz="1100" dirty="0">
                 <a:solidFill>
-                  <a:srgbClr val="CCCCCC"/>
-                </a:solidFill>
-                <a:latin typeface="Arial" pitchFamily="34" charset="0"/>
-                <a:ea typeface="Arial" pitchFamily="34" charset="-122"/>
-                <a:cs typeface="Arial" pitchFamily="34" charset="-120"/>
+                  <a:srgbClr val="2B2F36"/>
+                </a:solidFill>
+                <a:latin typeface="Arial" pitchFamily="34" charset="0"/>
+                <a:ea typeface="BIZ UDPGothic" pitchFamily="34" charset="-122"/>
+                <a:cs typeface="BIZ UDPGothic" pitchFamily="34" charset="-120"/>
               </a:rPr>
               <a:t>「大学の肩書き」より「実務力」で勝負</a:t>
             </a:r>
@@ -12284,7 +12284,7 @@
     <p:bg>
       <p:bgPr>
         <a:solidFill>
-          <a:srgbClr val="0A0A0A"/>
+          <a:srgbClr val="F5F6F8"/>
         </a:solidFill>
       </p:bgPr>
     </p:bg>
@@ -12329,11 +12329,11 @@
             <a:r>
               <a:rPr lang="en-US" sz="900" b="1" spc="400" kern="0" dirty="0">
                 <a:solidFill>
-                  <a:srgbClr val="D62828"/>
-                </a:solidFill>
-                <a:latin typeface="Arial" pitchFamily="34" charset="0"/>
-                <a:ea typeface="Arial" pitchFamily="34" charset="-122"/>
-                <a:cs typeface="Arial" pitchFamily="34" charset="-120"/>
+                  <a:srgbClr val="C8161D"/>
+                </a:solidFill>
+                <a:latin typeface="Arial" pitchFamily="34" charset="0"/>
+                <a:ea typeface="BIZ UDPGothic" pitchFamily="34" charset="-122"/>
+                <a:cs typeface="BIZ UDPGothic" pitchFamily="34" charset="-120"/>
               </a:rPr>
               <a:t>ROUTE 01 — SAFETY NET</a:t>
             </a:r>
@@ -12368,11 +12368,11 @@
             <a:r>
               <a:rPr lang="en-US" sz="2800" b="1" dirty="0">
                 <a:solidFill>
-                  <a:srgbClr val="F5F5F0"/>
-                </a:solidFill>
-                <a:latin typeface="Cambria" pitchFamily="34" charset="0"/>
-                <a:ea typeface="Cambria" pitchFamily="34" charset="-122"/>
-                <a:cs typeface="Cambria" pitchFamily="34" charset="-120"/>
+                  <a:srgbClr val="16181D"/>
+                </a:solidFill>
+                <a:latin typeface="BIZ UDPGothic" pitchFamily="34" charset="0"/>
+                <a:ea typeface="BIZ UDPGothic" pitchFamily="34" charset="-122"/>
+                <a:cs typeface="BIZ UDPGothic" pitchFamily="34" charset="-120"/>
               </a:rPr>
               <a:t>標準ルートのセーフティネット：2段階の柔軟性</a:t>
             </a:r>
@@ -12395,11 +12395,11 @@
             <a:avLst/>
           </a:prstGeom>
           <a:solidFill>
-            <a:srgbClr val="2E2E2E"/>
+            <a:srgbClr val="DDE0E6"/>
           </a:solidFill>
           <a:ln w="12700">
             <a:solidFill>
-              <a:srgbClr val="2E2E2E"/>
+              <a:srgbClr val="DDE0E6"/>
             </a:solidFill>
             <a:prstDash val="solid"/>
           </a:ln>
@@ -12422,11 +12422,11 @@
             </a:avLst>
           </a:prstGeom>
           <a:solidFill>
-            <a:srgbClr val="1A1A1A"/>
+            <a:srgbClr val="FFFFFF"/>
           </a:solidFill>
           <a:ln w="12700">
             <a:solidFill>
-              <a:srgbClr val="2E2E2E"/>
+              <a:srgbClr val="DDE0E6"/>
             </a:solidFill>
             <a:prstDash val="solid"/>
           </a:ln>
@@ -12449,11 +12449,11 @@
             </a:avLst>
           </a:prstGeom>
           <a:solidFill>
-            <a:srgbClr val="D62828"/>
+            <a:srgbClr val="C8161D"/>
           </a:solidFill>
           <a:ln w="12700">
             <a:solidFill>
-              <a:srgbClr val="D62828"/>
+              <a:srgbClr val="C8161D"/>
             </a:solidFill>
             <a:prstDash val="solid"/>
           </a:ln>
@@ -12486,11 +12486,11 @@
             <a:r>
               <a:rPr lang="en-US" sz="1200" b="1" dirty="0">
                 <a:solidFill>
-                  <a:srgbClr val="F5F5F0"/>
-                </a:solidFill>
-                <a:latin typeface="Arial" pitchFamily="34" charset="0"/>
-                <a:ea typeface="Arial" pitchFamily="34" charset="-122"/>
-                <a:cs typeface="Arial" pitchFamily="34" charset="-120"/>
+                  <a:srgbClr val="FFFFFF"/>
+                </a:solidFill>
+                <a:latin typeface="Arial" pitchFamily="34" charset="0"/>
+                <a:ea typeface="BIZ UDPGothic" pitchFamily="34" charset="-122"/>
+                <a:cs typeface="BIZ UDPGothic" pitchFamily="34" charset="-120"/>
               </a:rPr>
               <a:t>転科の自由</a:t>
             </a:r>
@@ -12525,11 +12525,11 @@
             <a:r>
               <a:rPr lang="en-US" sz="1200" b="1" dirty="0">
                 <a:solidFill>
-                  <a:srgbClr val="F5F5F0"/>
-                </a:solidFill>
-                <a:latin typeface="Cambria" pitchFamily="34" charset="0"/>
-                <a:ea typeface="Cambria" pitchFamily="34" charset="-122"/>
-                <a:cs typeface="Cambria" pitchFamily="34" charset="-120"/>
+                  <a:srgbClr val="16181D"/>
+                </a:solidFill>
+                <a:latin typeface="BIZ UDPGothic" pitchFamily="34" charset="0"/>
+                <a:ea typeface="BIZ UDPGothic" pitchFamily="34" charset="-122"/>
+                <a:cs typeface="BIZ UDPGothic" pitchFamily="34" charset="-120"/>
               </a:rPr>
               <a:t>1年目終了時点で発動可能</a:t>
             </a:r>
@@ -12564,11 +12564,11 @@
             <a:r>
               <a:rPr lang="en-US" sz="1100" dirty="0">
                 <a:solidFill>
-                  <a:srgbClr val="CCCCCC"/>
-                </a:solidFill>
-                <a:latin typeface="Arial" pitchFamily="34" charset="0"/>
-                <a:ea typeface="Arial" pitchFamily="34" charset="-122"/>
-                <a:cs typeface="Arial" pitchFamily="34" charset="-120"/>
+                  <a:srgbClr val="2B2F36"/>
+                </a:solidFill>
+                <a:latin typeface="Arial" pitchFamily="34" charset="0"/>
+                <a:ea typeface="BIZ UDPGothic" pitchFamily="34" charset="-122"/>
+                <a:cs typeface="BIZ UDPGothic" pitchFamily="34" charset="-120"/>
               </a:rPr>
               <a:t>18歳時点で選んだ専門が合わないと感じた場合、ペナルティなしで別の専門コースへ転科・リセットできる。「合わなかった」は失敗ではなく、自己発見のプロセスとして制度が受け止める。</a:t>
             </a:r>
@@ -12593,11 +12593,11 @@
             </a:avLst>
           </a:prstGeom>
           <a:solidFill>
-            <a:srgbClr val="1A1A1A"/>
+            <a:srgbClr val="FFFFFF"/>
           </a:solidFill>
           <a:ln w="12700">
             <a:solidFill>
-              <a:srgbClr val="2E2E2E"/>
+              <a:srgbClr val="DDE0E6"/>
             </a:solidFill>
             <a:prstDash val="solid"/>
           </a:ln>
@@ -12620,11 +12620,11 @@
             </a:avLst>
           </a:prstGeom>
           <a:solidFill>
-            <a:srgbClr val="D62828"/>
+            <a:srgbClr val="C8161D"/>
           </a:solidFill>
           <a:ln w="12700">
             <a:solidFill>
-              <a:srgbClr val="D62828"/>
+              <a:srgbClr val="C8161D"/>
             </a:solidFill>
             <a:prstDash val="solid"/>
           </a:ln>
@@ -12657,11 +12657,11 @@
             <a:r>
               <a:rPr lang="en-US" sz="1200" b="1" dirty="0">
                 <a:solidFill>
-                  <a:srgbClr val="F5F5F0"/>
-                </a:solidFill>
-                <a:latin typeface="Arial" pitchFamily="34" charset="0"/>
-                <a:ea typeface="Arial" pitchFamily="34" charset="-122"/>
-                <a:cs typeface="Arial" pitchFamily="34" charset="-120"/>
+                  <a:srgbClr val="FFFFFF"/>
+                </a:solidFill>
+                <a:latin typeface="Arial" pitchFamily="34" charset="0"/>
+                <a:ea typeface="BIZ UDPGothic" pitchFamily="34" charset="-122"/>
+                <a:cs typeface="BIZ UDPGothic" pitchFamily="34" charset="-120"/>
               </a:rPr>
               <a:t>延長の自由</a:t>
             </a:r>
@@ -12696,11 +12696,11 @@
             <a:r>
               <a:rPr lang="en-US" sz="1200" b="1" dirty="0">
                 <a:solidFill>
-                  <a:srgbClr val="F5F5F0"/>
-                </a:solidFill>
-                <a:latin typeface="Cambria" pitchFamily="34" charset="0"/>
-                <a:ea typeface="Cambria" pitchFamily="34" charset="-122"/>
-                <a:cs typeface="Cambria" pitchFamily="34" charset="-120"/>
+                  <a:srgbClr val="16181D"/>
+                </a:solidFill>
+                <a:latin typeface="BIZ UDPGothic" pitchFamily="34" charset="0"/>
+                <a:ea typeface="BIZ UDPGothic" pitchFamily="34" charset="-122"/>
+                <a:cs typeface="BIZ UDPGothic" pitchFamily="34" charset="-120"/>
               </a:rPr>
               <a:t>本人の主体的選択で発動</a:t>
             </a:r>
@@ -12735,11 +12735,11 @@
             <a:r>
               <a:rPr lang="en-US" sz="1100" dirty="0">
                 <a:solidFill>
-                  <a:srgbClr val="CCCCCC"/>
-                </a:solidFill>
-                <a:latin typeface="Arial" pitchFamily="34" charset="0"/>
-                <a:ea typeface="Arial" pitchFamily="34" charset="-122"/>
-                <a:cs typeface="Arial" pitchFamily="34" charset="-120"/>
+                  <a:srgbClr val="2B2F36"/>
+                </a:solidFill>
+                <a:latin typeface="Arial" pitchFamily="34" charset="0"/>
+                <a:ea typeface="BIZ UDPGothic" pitchFamily="34" charset="-122"/>
+                <a:cs typeface="BIZ UDPGothic" pitchFamily="34" charset="-120"/>
               </a:rPr>
               <a:t>人間的な猶予が必要な場合は専門学校の延長（再入学等）を認める。さらに3年行けば24歳——現行の大卒と年齢は変わらない。しかしそれは「流された4年」ではなく「自ら選んだ猶予」であり、そこには自覚と責任が生まれる。</a:t>
             </a:r>
@@ -12764,11 +12764,11 @@
             </a:avLst>
           </a:prstGeom>
           <a:solidFill>
-            <a:srgbClr val="1A1A1A"/>
+            <a:srgbClr val="FFFFFF"/>
           </a:solidFill>
           <a:ln w="12700">
             <a:solidFill>
-              <a:srgbClr val="2E2E2E"/>
+              <a:srgbClr val="DDE0E6"/>
             </a:solidFill>
             <a:prstDash val="solid"/>
           </a:ln>
@@ -12801,11 +12801,11 @@
             <a:r>
               <a:rPr lang="en-US" sz="1000" dirty="0">
                 <a:solidFill>
-                  <a:srgbClr val="CCCCCC"/>
-                </a:solidFill>
-                <a:latin typeface="Arial" pitchFamily="34" charset="0"/>
-                <a:ea typeface="Arial" pitchFamily="34" charset="-122"/>
-                <a:cs typeface="Arial" pitchFamily="34" charset="-120"/>
+                  <a:srgbClr val="2B2F36"/>
+                </a:solidFill>
+                <a:latin typeface="Arial" pitchFamily="34" charset="0"/>
+                <a:ea typeface="BIZ UDPGothic" pitchFamily="34" charset="-122"/>
+                <a:cs typeface="BIZ UDPGothic" pitchFamily="34" charset="-120"/>
               </a:rPr>
               <a:t>「失敗してもやり直せる」を制度として保障することで、18歳の選択の重さを適切な水準に下げる</a:t>
             </a:r>
@@ -12827,7 +12827,7 @@
     <p:bg>
       <p:bgPr>
         <a:solidFill>
-          <a:srgbClr val="0A0A0A"/>
+          <a:srgbClr val="F5F6F8"/>
         </a:solidFill>
       </p:bgPr>
     </p:bg>
@@ -12872,11 +12872,11 @@
             <a:r>
               <a:rPr lang="en-US" sz="900" b="1" spc="400" kern="0" dirty="0">
                 <a:solidFill>
-                  <a:srgbClr val="D62828"/>
-                </a:solidFill>
-                <a:latin typeface="Arial" pitchFamily="34" charset="0"/>
-                <a:ea typeface="Arial" pitchFamily="34" charset="-122"/>
-                <a:cs typeface="Arial" pitchFamily="34" charset="-120"/>
+                  <a:srgbClr val="C8161D"/>
+                </a:solidFill>
+                <a:latin typeface="Arial" pitchFamily="34" charset="0"/>
+                <a:ea typeface="BIZ UDPGothic" pitchFamily="34" charset="-122"/>
+                <a:cs typeface="BIZ UDPGothic" pitchFamily="34" charset="-120"/>
               </a:rPr>
               <a:t>ROUTE 02</a:t>
             </a:r>
@@ -12911,11 +12911,11 @@
             <a:r>
               <a:rPr lang="en-US" sz="2800" b="1" dirty="0">
                 <a:solidFill>
-                  <a:srgbClr val="F5F5F0"/>
-                </a:solidFill>
-                <a:latin typeface="Cambria" pitchFamily="34" charset="0"/>
-                <a:ea typeface="Cambria" pitchFamily="34" charset="-122"/>
-                <a:cs typeface="Cambria" pitchFamily="34" charset="-120"/>
+                  <a:srgbClr val="16181D"/>
+                </a:solidFill>
+                <a:latin typeface="BIZ UDPGothic" pitchFamily="34" charset="0"/>
+                <a:ea typeface="BIZ UDPGothic" pitchFamily="34" charset="-122"/>
+                <a:cs typeface="BIZ UDPGothic" pitchFamily="34" charset="-120"/>
               </a:rPr>
               <a:t>国家戦略・特殊ルート ── 医療・公安・防衛職</a:t>
             </a:r>
@@ -12938,11 +12938,11 @@
             <a:avLst/>
           </a:prstGeom>
           <a:solidFill>
-            <a:srgbClr val="2E2E2E"/>
+            <a:srgbClr val="DDE0E6"/>
           </a:solidFill>
           <a:ln w="12700">
             <a:solidFill>
-              <a:srgbClr val="2E2E2E"/>
+              <a:srgbClr val="DDE0E6"/>
             </a:solidFill>
             <a:prstDash val="solid"/>
           </a:ln>
@@ -12975,11 +12975,11 @@
             <a:r>
               <a:rPr lang="en-US" sz="1100" dirty="0">
                 <a:solidFill>
-                  <a:srgbClr val="CCCCCC"/>
-                </a:solidFill>
-                <a:latin typeface="Arial" pitchFamily="34" charset="0"/>
-                <a:ea typeface="Arial" pitchFamily="34" charset="-122"/>
-                <a:cs typeface="Arial" pitchFamily="34" charset="-120"/>
+                  <a:srgbClr val="2B2F36"/>
+                </a:solidFill>
+                <a:latin typeface="Arial" pitchFamily="34" charset="0"/>
+                <a:ea typeface="BIZ UDPGothic" pitchFamily="34" charset="-122"/>
+                <a:cs typeface="BIZ UDPGothic" pitchFamily="34" charset="-120"/>
               </a:rPr>
               <a:t>命の担保・国家安全保障に関わる職種に限り、18歳から専門高等教育機関への進学を維持・推奨する</a:t>
             </a:r>
@@ -13004,11 +13004,11 @@
             </a:avLst>
           </a:prstGeom>
           <a:solidFill>
-            <a:srgbClr val="1A1A1A"/>
+            <a:srgbClr val="FFFFFF"/>
           </a:solidFill>
           <a:ln w="12700">
             <a:solidFill>
-              <a:srgbClr val="2E2E2E"/>
+              <a:srgbClr val="DDE0E6"/>
             </a:solidFill>
             <a:prstDash val="solid"/>
           </a:ln>
@@ -13031,11 +13031,11 @@
             </a:avLst>
           </a:prstGeom>
           <a:solidFill>
-            <a:srgbClr val="D62828"/>
+            <a:srgbClr val="C8161D"/>
           </a:solidFill>
           <a:ln w="12700">
             <a:solidFill>
-              <a:srgbClr val="D62828"/>
+              <a:srgbClr val="C8161D"/>
             </a:solidFill>
             <a:prstDash val="solid"/>
           </a:ln>
@@ -13068,11 +13068,11 @@
             <a:r>
               <a:rPr lang="en-US" sz="1800" b="1" dirty="0">
                 <a:solidFill>
-                  <a:srgbClr val="F5F5F0"/>
-                </a:solidFill>
-                <a:latin typeface="Cambria" pitchFamily="34" charset="0"/>
-                <a:ea typeface="Cambria" pitchFamily="34" charset="-122"/>
-                <a:cs typeface="Cambria" pitchFamily="34" charset="-120"/>
+                  <a:srgbClr val="FFFFFF"/>
+                </a:solidFill>
+                <a:latin typeface="BIZ UDPGothic" pitchFamily="34" charset="0"/>
+                <a:ea typeface="BIZ UDPGothic" pitchFamily="34" charset="-122"/>
+                <a:cs typeface="BIZ UDPGothic" pitchFamily="34" charset="-120"/>
               </a:rPr>
               <a:t>医</a:t>
             </a:r>
@@ -13107,11 +13107,11 @@
             <a:r>
               <a:rPr lang="en-US" sz="1400" b="1" dirty="0">
                 <a:solidFill>
-                  <a:srgbClr val="F5F5F0"/>
-                </a:solidFill>
-                <a:latin typeface="Cambria" pitchFamily="34" charset="0"/>
-                <a:ea typeface="Cambria" pitchFamily="34" charset="-122"/>
-                <a:cs typeface="Cambria" pitchFamily="34" charset="-120"/>
+                  <a:srgbClr val="16181D"/>
+                </a:solidFill>
+                <a:latin typeface="BIZ UDPGothic" pitchFamily="34" charset="0"/>
+                <a:ea typeface="BIZ UDPGothic" pitchFamily="34" charset="-122"/>
+                <a:cs typeface="BIZ UDPGothic" pitchFamily="34" charset="-120"/>
               </a:rPr>
               <a:t>医師・薬剤師・高度看護師</a:t>
             </a:r>
@@ -13146,11 +13146,11 @@
             <a:r>
               <a:rPr lang="en-US" sz="1100" dirty="0">
                 <a:solidFill>
-                  <a:srgbClr val="CCCCCC"/>
-                </a:solidFill>
-                <a:latin typeface="Arial" pitchFamily="34" charset="0"/>
-                <a:ea typeface="Arial" pitchFamily="34" charset="-122"/>
-                <a:cs typeface="Arial" pitchFamily="34" charset="-120"/>
+                  <a:srgbClr val="2B2F36"/>
+                </a:solidFill>
+                <a:latin typeface="Arial" pitchFamily="34" charset="0"/>
+                <a:ea typeface="BIZ UDPGothic" pitchFamily="34" charset="-122"/>
+                <a:cs typeface="BIZ UDPGothic" pitchFamily="34" charset="-120"/>
               </a:rPr>
               <a:t>命に関わる判断には高度な専門知識と倫理観が不可欠</a:t>
             </a:r>
@@ -13175,11 +13175,11 @@
             </a:avLst>
           </a:prstGeom>
           <a:solidFill>
-            <a:srgbClr val="1A1A1A"/>
+            <a:srgbClr val="FFFFFF"/>
           </a:solidFill>
           <a:ln w="12700">
             <a:solidFill>
-              <a:srgbClr val="2E2E2E"/>
+              <a:srgbClr val="DDE0E6"/>
             </a:solidFill>
             <a:prstDash val="solid"/>
           </a:ln>
@@ -13202,11 +13202,11 @@
             </a:avLst>
           </a:prstGeom>
           <a:solidFill>
-            <a:srgbClr val="D62828"/>
+            <a:srgbClr val="C8161D"/>
           </a:solidFill>
           <a:ln w="12700">
             <a:solidFill>
-              <a:srgbClr val="D62828"/>
+              <a:srgbClr val="C8161D"/>
             </a:solidFill>
             <a:prstDash val="solid"/>
           </a:ln>
@@ -13239,11 +13239,11 @@
             <a:r>
               <a:rPr lang="en-US" sz="1800" b="1" dirty="0">
                 <a:solidFill>
-                  <a:srgbClr val="F5F5F0"/>
-                </a:solidFill>
-                <a:latin typeface="Cambria" pitchFamily="34" charset="0"/>
-                <a:ea typeface="Cambria" pitchFamily="34" charset="-122"/>
-                <a:cs typeface="Cambria" pitchFamily="34" charset="-120"/>
+                  <a:srgbClr val="FFFFFF"/>
+                </a:solidFill>
+                <a:latin typeface="BIZ UDPGothic" pitchFamily="34" charset="0"/>
+                <a:ea typeface="BIZ UDPGothic" pitchFamily="34" charset="-122"/>
+                <a:cs typeface="BIZ UDPGothic" pitchFamily="34" charset="-120"/>
               </a:rPr>
               <a:t>警</a:t>
             </a:r>
@@ -13278,11 +13278,11 @@
             <a:r>
               <a:rPr lang="en-US" sz="1400" b="1" dirty="0">
                 <a:solidFill>
-                  <a:srgbClr val="F5F5F0"/>
-                </a:solidFill>
-                <a:latin typeface="Cambria" pitchFamily="34" charset="0"/>
-                <a:ea typeface="Cambria" pitchFamily="34" charset="-122"/>
-                <a:cs typeface="Cambria" pitchFamily="34" charset="-120"/>
+                  <a:srgbClr val="16181D"/>
+                </a:solidFill>
+                <a:latin typeface="BIZ UDPGothic" pitchFamily="34" charset="0"/>
+                <a:ea typeface="BIZ UDPGothic" pitchFamily="34" charset="-122"/>
+                <a:cs typeface="BIZ UDPGothic" pitchFamily="34" charset="-120"/>
               </a:rPr>
               <a:t>警察・消防</a:t>
             </a:r>
@@ -13317,11 +13317,11 @@
             <a:r>
               <a:rPr lang="en-US" sz="1100" dirty="0">
                 <a:solidFill>
-                  <a:srgbClr val="CCCCCC"/>
-                </a:solidFill>
-                <a:latin typeface="Arial" pitchFamily="34" charset="0"/>
-                <a:ea typeface="Arial" pitchFamily="34" charset="-122"/>
-                <a:cs typeface="Arial" pitchFamily="34" charset="-120"/>
+                  <a:srgbClr val="2B2F36"/>
+                </a:solidFill>
+                <a:latin typeface="Arial" pitchFamily="34" charset="0"/>
+                <a:ea typeface="BIZ UDPGothic" pitchFamily="34" charset="-122"/>
+                <a:cs typeface="BIZ UDPGothic" pitchFamily="34" charset="-120"/>
               </a:rPr>
               <a:t>国民の安全を守る職務には組織訓練と強固な規律が必要</a:t>
             </a:r>
@@ -13346,11 +13346,11 @@
             </a:avLst>
           </a:prstGeom>
           <a:solidFill>
-            <a:srgbClr val="1A1A1A"/>
+            <a:srgbClr val="FFFFFF"/>
           </a:solidFill>
           <a:ln w="12700">
             <a:solidFill>
-              <a:srgbClr val="2E2E2E"/>
+              <a:srgbClr val="DDE0E6"/>
             </a:solidFill>
             <a:prstDash val="solid"/>
           </a:ln>
@@ -13373,11 +13373,11 @@
             </a:avLst>
           </a:prstGeom>
           <a:solidFill>
-            <a:srgbClr val="D62828"/>
+            <a:srgbClr val="C8161D"/>
           </a:solidFill>
           <a:ln w="12700">
             <a:solidFill>
-              <a:srgbClr val="D62828"/>
+              <a:srgbClr val="C8161D"/>
             </a:solidFill>
             <a:prstDash val="solid"/>
           </a:ln>
@@ -13410,11 +13410,11 @@
             <a:r>
               <a:rPr lang="en-US" sz="1800" b="1" dirty="0">
                 <a:solidFill>
-                  <a:srgbClr val="F5F5F0"/>
-                </a:solidFill>
-                <a:latin typeface="Cambria" pitchFamily="34" charset="0"/>
-                <a:ea typeface="Cambria" pitchFamily="34" charset="-122"/>
-                <a:cs typeface="Cambria" pitchFamily="34" charset="-120"/>
+                  <a:srgbClr val="FFFFFF"/>
+                </a:solidFill>
+                <a:latin typeface="BIZ UDPGothic" pitchFamily="34" charset="0"/>
+                <a:ea typeface="BIZ UDPGothic" pitchFamily="34" charset="-122"/>
+                <a:cs typeface="BIZ UDPGothic" pitchFamily="34" charset="-120"/>
               </a:rPr>
               <a:t>防</a:t>
             </a:r>
@@ -13449,11 +13449,11 @@
             <a:r>
               <a:rPr lang="en-US" sz="1400" b="1" dirty="0">
                 <a:solidFill>
-                  <a:srgbClr val="F5F5F0"/>
-                </a:solidFill>
-                <a:latin typeface="Cambria" pitchFamily="34" charset="0"/>
-                <a:ea typeface="Cambria" pitchFamily="34" charset="-122"/>
-                <a:cs typeface="Cambria" pitchFamily="34" charset="-120"/>
+                  <a:srgbClr val="16181D"/>
+                </a:solidFill>
+                <a:latin typeface="BIZ UDPGothic" pitchFamily="34" charset="0"/>
+                <a:ea typeface="BIZ UDPGothic" pitchFamily="34" charset="-122"/>
+                <a:cs typeface="BIZ UDPGothic" pitchFamily="34" charset="-120"/>
               </a:rPr>
               <a:t>自衛隊（防衛大学校等）</a:t>
             </a:r>
@@ -13488,11 +13488,11 @@
             <a:r>
               <a:rPr lang="en-US" sz="1100" dirty="0">
                 <a:solidFill>
-                  <a:srgbClr val="CCCCCC"/>
-                </a:solidFill>
-                <a:latin typeface="Arial" pitchFamily="34" charset="0"/>
-                <a:ea typeface="Arial" pitchFamily="34" charset="-122"/>
-                <a:cs typeface="Arial" pitchFamily="34" charset="-120"/>
+                  <a:srgbClr val="2B2F36"/>
+                </a:solidFill>
+                <a:latin typeface="Arial" pitchFamily="34" charset="0"/>
+                <a:ea typeface="BIZ UDPGothic" pitchFamily="34" charset="-122"/>
+                <a:cs typeface="BIZ UDPGothic" pitchFamily="34" charset="-120"/>
               </a:rPr>
               <a:t>国家安全保障の担い手として、高度な専門教育と任官訓練が前提</a:t>
             </a:r>
